--- a/8 семестр/ПпЦП/Итоговая презентация.pptx
+++ b/8 семестр/ПпЦП/Итоговая презентация.pptx
@@ -5,40 +5,41 @@
     <p:sldMasterId id="2147483648" r:id="rId1"/>
   </p:sldMasterIdLst>
   <p:notesMasterIdLst>
-    <p:notesMasterId r:id="rId5"/>
+    <p:notesMasterId r:id="rId13"/>
   </p:notesMasterIdLst>
   <p:sldIdLst>
     <p:sldId id="256" r:id="rId2"/>
     <p:sldId id="257" r:id="rId3"/>
-    <p:sldId id="378" r:id="rId4"/>
+    <p:sldId id="379" r:id="rId4"/>
+    <p:sldId id="380" r:id="rId5"/>
+    <p:sldId id="381" r:id="rId6"/>
+    <p:sldId id="382" r:id="rId7"/>
+    <p:sldId id="383" r:id="rId8"/>
+    <p:sldId id="384" r:id="rId9"/>
+    <p:sldId id="385" r:id="rId10"/>
+    <p:sldId id="386" r:id="rId11"/>
+    <p:sldId id="378" r:id="rId12"/>
   </p:sldIdLst>
   <p:sldSz cx="9144000" cy="5143500" type="screen16x9"/>
   <p:notesSz cx="9144000" cy="5143500"/>
   <p:embeddedFontLst>
     <p:embeddedFont>
-      <p:font typeface="Calibri" panose="020F0502020204030204" pitchFamily="34" charset="0"/>
-      <p:regular r:id="rId6"/>
-      <p:bold r:id="rId7"/>
-      <p:italic r:id="rId8"/>
-      <p:boldItalic r:id="rId9"/>
+      <p:font typeface="Century Gothic" panose="020B0502020202020204" pitchFamily="34" charset="0"/>
+      <p:regular r:id="rId14"/>
+      <p:bold r:id="rId15"/>
+      <p:italic r:id="rId16"/>
+      <p:boldItalic r:id="rId17"/>
+    </p:embeddedFont>
+    <p:embeddedFont>
+      <p:font typeface="Myriad Pro" panose="020B0503030403020204" charset="0"/>
+      <p:regular r:id="rId18"/>
+      <p:bold r:id="rId19"/>
+      <p:italic r:id="rId20"/>
+      <p:boldItalic r:id="rId21"/>
     </p:embeddedFont>
     <p:embeddedFont>
       <p:font typeface="Myriad Pro Black" panose="020B0803030403020204" charset="0"/>
-      <p:bold r:id="rId10"/>
-    </p:embeddedFont>
-    <p:embeddedFont>
-      <p:font typeface="Myriad Pro" panose="020B0503030403020204" pitchFamily="34" charset="0"/>
-      <p:regular r:id="rId11"/>
-      <p:bold r:id="rId12"/>
-      <p:italic r:id="rId13"/>
-      <p:boldItalic r:id="rId14"/>
-    </p:embeddedFont>
-    <p:embeddedFont>
-      <p:font typeface="Century Gothic" panose="020B0502020202020204" pitchFamily="34" charset="0"/>
-      <p:regular r:id="rId15"/>
-      <p:bold r:id="rId16"/>
-      <p:italic r:id="rId17"/>
-      <p:boldItalic r:id="rId18"/>
+      <p:bold r:id="rId22"/>
     </p:embeddedFont>
   </p:embeddedFontLst>
   <p:defaultTextStyle>
@@ -237,7 +238,7 @@
           <a:p>
             <a:fld id="{8F540C1F-0032-431C-8FAB-96526BBF0541}" type="datetimeFigureOut">
               <a:rPr lang="ru-RU" smtClean="0"/>
-              <a:t>17.03.2023</a:t>
+              <a:t>01.06.2026</a:t>
             </a:fld>
             <a:endParaRPr lang="ru-RU"/>
           </a:p>
@@ -301,38 +302,37 @@
           <a:p>
             <a:pPr lvl="0"/>
             <a:r>
-              <a:rPr lang="ru-RU" smtClean="0"/>
+              <a:rPr lang="ru-RU"/>
               <a:t>Образец текста</a:t>
             </a:r>
           </a:p>
           <a:p>
             <a:pPr lvl="1"/>
             <a:r>
-              <a:rPr lang="ru-RU" smtClean="0"/>
+              <a:rPr lang="ru-RU"/>
               <a:t>Второй уровень</a:t>
             </a:r>
           </a:p>
           <a:p>
             <a:pPr lvl="2"/>
             <a:r>
-              <a:rPr lang="ru-RU" smtClean="0"/>
+              <a:rPr lang="ru-RU"/>
               <a:t>Третий уровень</a:t>
             </a:r>
           </a:p>
           <a:p>
             <a:pPr lvl="3"/>
             <a:r>
-              <a:rPr lang="ru-RU" smtClean="0"/>
+              <a:rPr lang="ru-RU"/>
               <a:t>Четвертый уровень</a:t>
             </a:r>
           </a:p>
           <a:p>
             <a:pPr lvl="4"/>
             <a:r>
-              <a:rPr lang="ru-RU" smtClean="0"/>
+              <a:rPr lang="ru-RU"/>
               <a:t>Пятый уровень</a:t>
             </a:r>
-            <a:endParaRPr lang="ru-RU"/>
           </a:p>
         </p:txBody>
       </p:sp>
@@ -654,7 +654,7 @@
           <a:p>
             <a:fld id="{1D8BD707-D9CF-40AE-B4C6-C98DA3205C09}" type="datetimeFigureOut">
               <a:rPr lang="en-US"/>
-              <a:t>3/17/2023</a:t>
+              <a:t>6/1/2026</a:t>
             </a:fld>
             <a:endParaRPr lang="en-US"/>
           </a:p>
@@ -831,7 +831,7 @@
           <a:p>
             <a:fld id="{1D8BD707-D9CF-40AE-B4C6-C98DA3205C09}" type="datetimeFigureOut">
               <a:rPr lang="en-US"/>
-              <a:t>3/17/2023</a:t>
+              <a:t>6/1/2026</a:t>
             </a:fld>
             <a:endParaRPr lang="en-US"/>
           </a:p>
@@ -874,13 +874,6 @@
   <p:clrMapOvr>
     <a:masterClrMapping/>
   </p:clrMapOvr>
-  <p:timing>
-    <p:tnLst>
-      <p:par>
-        <p:cTn id="1" dur="indefinite" restart="never" nodeType="tmRoot"/>
-      </p:par>
-    </p:tnLst>
-  </p:timing>
 </p:sldLayout>
 </file>
 
@@ -1064,7 +1057,7 @@
           <a:p>
             <a:fld id="{1D8BD707-D9CF-40AE-B4C6-C98DA3205C09}" type="datetimeFigureOut">
               <a:rPr lang="en-US"/>
-              <a:t>3/17/2023</a:t>
+              <a:t>6/1/2026</a:t>
             </a:fld>
             <a:endParaRPr lang="en-US"/>
           </a:p>
@@ -1212,7 +1205,7 @@
           <a:p>
             <a:fld id="{1D8BD707-D9CF-40AE-B4C6-C98DA3205C09}" type="datetimeFigureOut">
               <a:rPr lang="en-US"/>
-              <a:t>3/17/2023</a:t>
+              <a:t>6/1/2026</a:t>
             </a:fld>
             <a:endParaRPr lang="en-US"/>
           </a:p>
@@ -1331,7 +1324,7 @@
           <a:p>
             <a:fld id="{1D8BD707-D9CF-40AE-B4C6-C98DA3205C09}" type="datetimeFigureOut">
               <a:rPr lang="en-US"/>
-              <a:t>3/17/2023</a:t>
+              <a:t>6/1/2026</a:t>
             </a:fld>
             <a:endParaRPr lang="en-US"/>
           </a:p>
@@ -1553,7 +1546,7 @@
           <a:p>
             <a:fld id="{1D8BD707-D9CF-40AE-B4C6-C98DA3205C09}" type="datetimeFigureOut">
               <a:rPr lang="en-US"/>
-              <a:t>3/17/2023</a:t>
+              <a:t>6/1/2026</a:t>
             </a:fld>
             <a:endParaRPr lang="en-US"/>
           </a:p>
@@ -1611,13 +1604,6 @@
     <p:sldLayoutId id="2147483664" r:id="rId4"/>
     <p:sldLayoutId id="2147483665" r:id="rId5"/>
   </p:sldLayoutIdLst>
-  <p:timing>
-    <p:tnLst>
-      <p:par>
-        <p:cTn id="1" dur="indefinite" restart="never" nodeType="tmRoot"/>
-      </p:par>
-    </p:tnLst>
-  </p:timing>
   <p:txStyles>
     <p:titleStyle>
       <a:lvl1pPr>
@@ -1801,7 +1787,7 @@
         </p:blipFill>
         <p:spPr>
           <a:xfrm>
-            <a:off x="0" y="0"/>
+            <a:off x="-7620" y="0"/>
             <a:ext cx="9144000" cy="5143500"/>
           </a:xfrm>
           <a:prstGeom prst="rect">
@@ -1847,8 +1833,8 @@
         </p:nvSpPr>
         <p:spPr>
           <a:xfrm>
-            <a:off x="721057" y="1809750"/>
-            <a:ext cx="5486400" cy="1734770"/>
+            <a:off x="721056" y="1809750"/>
+            <a:ext cx="6822743" cy="444417"/>
           </a:xfrm>
           <a:prstGeom prst="rect">
             <a:avLst/>
@@ -1867,37 +1853,14 @@
               </a:lnSpc>
             </a:pPr>
             <a:r>
-              <a:rPr lang="ru-RU" sz="6600" dirty="0" smtClean="0">
+              <a:rPr lang="ru-RU" sz="2800" dirty="0">
                 <a:solidFill>
                   <a:schemeClr val="bg1"/>
                 </a:solidFill>
                 <a:latin typeface="Myriad Pro Black" panose="020B0803030403020204" pitchFamily="34" charset="0"/>
               </a:rPr>
-              <a:t>НАЗВАНИЕ </a:t>
+              <a:t>Разработка системы оптимизации</a:t>
             </a:r>
-            <a:br>
-              <a:rPr lang="ru-RU" sz="6600" dirty="0" smtClean="0">
-                <a:solidFill>
-                  <a:schemeClr val="bg1"/>
-                </a:solidFill>
-                <a:latin typeface="Myriad Pro Black" panose="020B0803030403020204" pitchFamily="34" charset="0"/>
-              </a:rPr>
-            </a:br>
-            <a:r>
-              <a:rPr lang="ru-RU" sz="6600" dirty="0" smtClean="0">
-                <a:solidFill>
-                  <a:schemeClr val="bg1"/>
-                </a:solidFill>
-                <a:latin typeface="Myriad Pro Black" panose="020B0803030403020204" pitchFamily="34" charset="0"/>
-              </a:rPr>
-              <a:t>ДОКЛАДА</a:t>
-            </a:r>
-            <a:endParaRPr lang="ru-RU" sz="6600" dirty="0">
-              <a:solidFill>
-                <a:schemeClr val="bg1"/>
-              </a:solidFill>
-              <a:latin typeface="Myriad Pro Black" panose="020B0803030403020204" pitchFamily="34" charset="0"/>
-            </a:endParaRPr>
           </a:p>
         </p:txBody>
       </p:sp>
@@ -1924,7 +1887,7 @@
           <a:lstStyle/>
           <a:p>
             <a:r>
-              <a:rPr lang="ru-RU" dirty="0" smtClean="0">
+              <a:rPr lang="ru-RU" dirty="0">
                 <a:solidFill>
                   <a:schemeClr val="bg1"/>
                 </a:solidFill>
@@ -1933,7 +1896,7 @@
               <a:t>ДОКЛАДЧИК</a:t>
             </a:r>
             <a:r>
-              <a:rPr lang="en-US" dirty="0" smtClean="0">
+              <a:rPr lang="en-US" dirty="0">
                 <a:solidFill>
                   <a:schemeClr val="bg1"/>
                 </a:solidFill>
@@ -1942,7 +1905,7 @@
               <a:t>:</a:t>
             </a:r>
             <a:br>
-              <a:rPr lang="en-US" dirty="0" smtClean="0">
+              <a:rPr lang="en-US" dirty="0">
                 <a:solidFill>
                   <a:schemeClr val="bg1"/>
                 </a:solidFill>
@@ -1950,20 +1913,109 @@
               </a:rPr>
             </a:br>
             <a:r>
-              <a:rPr lang="ru-RU" dirty="0" smtClean="0">
+              <a:rPr lang="ru-RU" dirty="0">
                 <a:solidFill>
                   <a:schemeClr val="bg1"/>
                 </a:solidFill>
                 <a:latin typeface="Myriad Pro Black" panose="020B0803030403020204" pitchFamily="34" charset="0"/>
               </a:rPr>
-              <a:t>М.С. Иванов</a:t>
+              <a:t>К.М. Мовенко</a:t>
             </a:r>
-            <a:endParaRPr lang="ru-RU" dirty="0">
-              <a:solidFill>
-                <a:schemeClr val="bg1"/>
-              </a:solidFill>
-              <a:latin typeface="Myriad Pro Black" panose="020B0803030403020204" pitchFamily="34" charset="0"/>
-            </a:endParaRPr>
+          </a:p>
+        </p:txBody>
+      </p:sp>
+      <p:sp>
+        <p:nvSpPr>
+          <p:cNvPr id="3" name="TextBox 2">
+            <a:extLst>
+              <a:ext uri="{FF2B5EF4-FFF2-40B4-BE49-F238E27FC236}">
+                <a16:creationId xmlns:a16="http://schemas.microsoft.com/office/drawing/2014/main" id="{C5589011-3DBD-9AEC-F450-395F0D2FB640}"/>
+              </a:ext>
+            </a:extLst>
+          </p:cNvPr>
+          <p:cNvSpPr txBox="1"/>
+          <p:nvPr/>
+        </p:nvSpPr>
+        <p:spPr>
+          <a:xfrm>
+            <a:off x="2209800" y="2724150"/>
+            <a:ext cx="184731" cy="369332"/>
+          </a:xfrm>
+          <a:prstGeom prst="rect">
+            <a:avLst/>
+          </a:prstGeom>
+          <a:noFill/>
+        </p:spPr>
+        <p:txBody>
+          <a:bodyPr wrap="none" rtlCol="0">
+            <a:spAutoFit/>
+          </a:bodyPr>
+          <a:lstStyle/>
+          <a:p>
+            <a:endParaRPr lang="ru-RU" dirty="0"/>
+          </a:p>
+        </p:txBody>
+      </p:sp>
+      <p:sp>
+        <p:nvSpPr>
+          <p:cNvPr id="8" name="TextBox 7">
+            <a:extLst>
+              <a:ext uri="{FF2B5EF4-FFF2-40B4-BE49-F238E27FC236}">
+                <a16:creationId xmlns:a16="http://schemas.microsoft.com/office/drawing/2014/main" id="{A9A53DAD-39B7-8A15-FE2E-3B8501B72A9F}"/>
+              </a:ext>
+            </a:extLst>
+          </p:cNvPr>
+          <p:cNvSpPr txBox="1"/>
+          <p:nvPr/>
+        </p:nvSpPr>
+        <p:spPr>
+          <a:xfrm>
+            <a:off x="721056" y="2336630"/>
+            <a:ext cx="5603544" cy="983474"/>
+          </a:xfrm>
+          <a:prstGeom prst="rect">
+            <a:avLst/>
+          </a:prstGeom>
+          <a:noFill/>
+        </p:spPr>
+        <p:txBody>
+          <a:bodyPr wrap="square">
+            <a:spAutoFit/>
+          </a:bodyPr>
+          <a:lstStyle/>
+          <a:p>
+            <a:pPr>
+              <a:lnSpc>
+                <a:spcPct val="80000"/>
+              </a:lnSpc>
+            </a:pPr>
+            <a:r>
+              <a:rPr lang="ru-RU" b="1" dirty="0">
+                <a:solidFill>
+                  <a:schemeClr val="bg1"/>
+                </a:solidFill>
+                <a:latin typeface="Myriad Pro Black" panose="020B0803030403020204" pitchFamily="34" charset="0"/>
+              </a:rPr>
+              <a:t>р</a:t>
+            </a:r>
+            <a:r>
+              <a:rPr lang="ru-RU" sz="1800" b="1" dirty="0">
+                <a:solidFill>
+                  <a:schemeClr val="bg1"/>
+                </a:solidFill>
+                <a:latin typeface="Myriad Pro Black" panose="020B0803030403020204" pitchFamily="34" charset="0"/>
+              </a:rPr>
+              <a:t>асписания</a:t>
+            </a:r>
+            <a:r>
+              <a:rPr lang="ru-RU" sz="1800" dirty="0">
+                <a:solidFill>
+                  <a:schemeClr val="bg1"/>
+                </a:solidFill>
+                <a:latin typeface="Myriad Pro Black" panose="020B0803030403020204" pitchFamily="34" charset="0"/>
+              </a:rPr>
+              <a:t> выполнения пакетов заданий в конвейерных системах при учёте технического обслуживания приборов с использованием целочисленного программирования.</a:t>
+            </a:r>
           </a:p>
         </p:txBody>
       </p:sp>
@@ -1972,13 +2024,458 @@
   <p:clrMapOvr>
     <a:masterClrMapping/>
   </p:clrMapOvr>
-  <p:timing>
-    <p:tnLst>
-      <p:par>
-        <p:cTn id="1" dur="indefinite" restart="never" nodeType="tmRoot"/>
-      </p:par>
-    </p:tnLst>
-  </p:timing>
+</p:sld>
+</file>
+
+<file path=ppt/slides/slide10.xml><?xml version="1.0" encoding="utf-8"?>
+<p:sld xmlns:a="http://schemas.openxmlformats.org/drawingml/2006/main" xmlns:r="http://schemas.openxmlformats.org/officeDocument/2006/relationships" xmlns:p="http://schemas.openxmlformats.org/presentationml/2006/main">
+  <p:cSld>
+    <p:spTree>
+      <p:nvGrpSpPr>
+        <p:cNvPr id="1" name=""/>
+        <p:cNvGrpSpPr/>
+        <p:nvPr/>
+      </p:nvGrpSpPr>
+      <p:grpSpPr>
+        <a:xfrm>
+          <a:off x="0" y="0"/>
+          <a:ext cx="0" cy="0"/>
+          <a:chOff x="0" y="0"/>
+          <a:chExt cx="0" cy="0"/>
+        </a:xfrm>
+      </p:grpSpPr>
+      <p:pic>
+        <p:nvPicPr>
+          <p:cNvPr id="2" name="Рисунок 1">
+            <a:extLst>
+              <a:ext uri="{FF2B5EF4-FFF2-40B4-BE49-F238E27FC236}">
+                <a16:creationId xmlns:a16="http://schemas.microsoft.com/office/drawing/2014/main" id="{16AD90AA-CE59-D609-9AE3-AFF8266EDDB3}"/>
+              </a:ext>
+            </a:extLst>
+          </p:cNvPr>
+          <p:cNvPicPr>
+            <a:picLocks noChangeAspect="1"/>
+          </p:cNvPicPr>
+          <p:nvPr/>
+        </p:nvPicPr>
+        <p:blipFill>
+          <a:blip r:embed="rId2"/>
+          <a:stretch>
+            <a:fillRect/>
+          </a:stretch>
+        </p:blipFill>
+        <p:spPr>
+          <a:xfrm>
+            <a:off x="259080" y="209951"/>
+            <a:ext cx="5486400" cy="5151153"/>
+          </a:xfrm>
+          <a:prstGeom prst="rect">
+            <a:avLst/>
+          </a:prstGeom>
+        </p:spPr>
+      </p:pic>
+      <p:sp>
+        <p:nvSpPr>
+          <p:cNvPr id="3" name="TextBox 2">
+            <a:extLst>
+              <a:ext uri="{FF2B5EF4-FFF2-40B4-BE49-F238E27FC236}">
+                <a16:creationId xmlns:a16="http://schemas.microsoft.com/office/drawing/2014/main" id="{22247309-03EC-32AE-0838-9E12E566B5AB}"/>
+              </a:ext>
+            </a:extLst>
+          </p:cNvPr>
+          <p:cNvSpPr txBox="1"/>
+          <p:nvPr/>
+        </p:nvSpPr>
+        <p:spPr>
+          <a:xfrm>
+            <a:off x="5638800" y="209951"/>
+            <a:ext cx="3429000" cy="2062103"/>
+          </a:xfrm>
+          <a:prstGeom prst="rect">
+            <a:avLst/>
+          </a:prstGeom>
+          <a:noFill/>
+        </p:spPr>
+        <p:txBody>
+          <a:bodyPr wrap="square" rtlCol="0">
+            <a:spAutoFit/>
+          </a:bodyPr>
+          <a:lstStyle/>
+          <a:p>
+            <a:r>
+              <a:rPr lang="ru-RU" sz="2400" b="1" dirty="0"/>
+              <a:t>Алгоритм работы системы с учётом уровней архитектуры</a:t>
+            </a:r>
+            <a:endParaRPr lang="en-US" sz="2400" b="1" dirty="0"/>
+          </a:p>
+          <a:p>
+            <a:endParaRPr lang="en-US" sz="2000" b="1" dirty="0"/>
+          </a:p>
+          <a:p>
+            <a:r>
+              <a:rPr lang="ru-RU" dirty="0">
+                <a:latin typeface="Myriad Pro" panose="020B0503030403020204" charset="0"/>
+              </a:rPr>
+              <a:t>Диаграмма последовательности </a:t>
+            </a:r>
+            <a:r>
+              <a:rPr lang="en-US" dirty="0">
+                <a:latin typeface="Myriad Pro" panose="020B0503030403020204" charset="0"/>
+              </a:rPr>
+              <a:t>UML</a:t>
+            </a:r>
+            <a:endParaRPr lang="ru-RU" dirty="0">
+              <a:latin typeface="Myriad Pro" panose="020B0503030403020204" charset="0"/>
+            </a:endParaRPr>
+          </a:p>
+        </p:txBody>
+      </p:sp>
+    </p:spTree>
+    <p:extLst>
+      <p:ext uri="{BB962C8B-B14F-4D97-AF65-F5344CB8AC3E}">
+        <p14:creationId xmlns:p14="http://schemas.microsoft.com/office/powerpoint/2010/main" val="2530449190"/>
+      </p:ext>
+    </p:extLst>
+  </p:cSld>
+  <p:clrMapOvr>
+    <a:masterClrMapping/>
+  </p:clrMapOvr>
+</p:sld>
+</file>
+
+<file path=ppt/slides/slide11.xml><?xml version="1.0" encoding="utf-8"?>
+<p:sld xmlns:a="http://schemas.openxmlformats.org/drawingml/2006/main" xmlns:r="http://schemas.openxmlformats.org/officeDocument/2006/relationships" xmlns:p="http://schemas.openxmlformats.org/presentationml/2006/main" showMasterSp="0">
+  <p:cSld>
+    <p:spTree>
+      <p:nvGrpSpPr>
+        <p:cNvPr id="1" name=""/>
+        <p:cNvGrpSpPr/>
+        <p:nvPr/>
+      </p:nvGrpSpPr>
+      <p:grpSpPr>
+        <a:xfrm>
+          <a:off x="0" y="0"/>
+          <a:ext cx="0" cy="0"/>
+          <a:chOff x="0" y="0"/>
+          <a:chExt cx="0" cy="0"/>
+        </a:xfrm>
+      </p:grpSpPr>
+      <p:grpSp>
+        <p:nvGrpSpPr>
+          <p:cNvPr id="8" name="Группа 7"/>
+          <p:cNvGrpSpPr/>
+          <p:nvPr/>
+        </p:nvGrpSpPr>
+        <p:grpSpPr>
+          <a:xfrm>
+            <a:off x="0" y="-5563"/>
+            <a:ext cx="9144000" cy="5149063"/>
+            <a:chOff x="-2931" y="-6103"/>
+            <a:chExt cx="12194930" cy="867688"/>
+          </a:xfrm>
+        </p:grpSpPr>
+        <p:sp>
+          <p:nvSpPr>
+            <p:cNvPr id="9" name="Прямоугольник 8"/>
+            <p:cNvSpPr/>
+            <p:nvPr/>
+          </p:nvSpPr>
+          <p:spPr>
+            <a:xfrm>
+              <a:off x="0" y="-6103"/>
+              <a:ext cx="12191999" cy="867688"/>
+            </a:xfrm>
+            <a:prstGeom prst="rect">
+              <a:avLst/>
+            </a:prstGeom>
+            <a:solidFill>
+              <a:srgbClr val="002060"/>
+            </a:solidFill>
+            <a:ln>
+              <a:noFill/>
+            </a:ln>
+          </p:spPr>
+          <p:style>
+            <a:lnRef idx="2">
+              <a:schemeClr val="accent1">
+                <a:shade val="50000"/>
+              </a:schemeClr>
+            </a:lnRef>
+            <a:fillRef idx="1">
+              <a:schemeClr val="accent1"/>
+            </a:fillRef>
+            <a:effectRef idx="0">
+              <a:schemeClr val="accent1"/>
+            </a:effectRef>
+            <a:fontRef idx="minor">
+              <a:schemeClr val="lt1"/>
+            </a:fontRef>
+          </p:style>
+          <p:txBody>
+            <a:bodyPr rtlCol="0" anchor="ctr"/>
+            <a:lstStyle/>
+            <a:p>
+              <a:pPr algn="ctr"/>
+              <a:endParaRPr lang="ru-RU" dirty="0"/>
+            </a:p>
+          </p:txBody>
+        </p:sp>
+        <p:sp>
+          <p:nvSpPr>
+            <p:cNvPr id="10" name="Полилиния 9"/>
+            <p:cNvSpPr/>
+            <p:nvPr/>
+          </p:nvSpPr>
+          <p:spPr>
+            <a:xfrm>
+              <a:off x="-2931" y="-6103"/>
+              <a:ext cx="8638075" cy="867685"/>
+            </a:xfrm>
+            <a:custGeom>
+              <a:avLst/>
+              <a:gdLst>
+                <a:gd name="connsiteX0" fmla="*/ 0 w 9967865"/>
+                <a:gd name="connsiteY0" fmla="*/ 0 h 679010"/>
+                <a:gd name="connsiteX1" fmla="*/ 9967865 w 9967865"/>
+                <a:gd name="connsiteY1" fmla="*/ 0 h 679010"/>
+                <a:gd name="connsiteX2" fmla="*/ 7659232 w 9967865"/>
+                <a:gd name="connsiteY2" fmla="*/ 679010 h 679010"/>
+                <a:gd name="connsiteX3" fmla="*/ 0 w 9967865"/>
+                <a:gd name="connsiteY3" fmla="*/ 679010 h 679010"/>
+                <a:gd name="connsiteX4" fmla="*/ 0 w 9967865"/>
+                <a:gd name="connsiteY4" fmla="*/ 0 h 679010"/>
+                <a:gd name="connsiteX0" fmla="*/ 0 w 9967865"/>
+                <a:gd name="connsiteY0" fmla="*/ 0 h 686788"/>
+                <a:gd name="connsiteX1" fmla="*/ 9967865 w 9967865"/>
+                <a:gd name="connsiteY1" fmla="*/ 0 h 686788"/>
+                <a:gd name="connsiteX2" fmla="*/ 9086239 w 9967865"/>
+                <a:gd name="connsiteY2" fmla="*/ 686788 h 686788"/>
+                <a:gd name="connsiteX3" fmla="*/ 0 w 9967865"/>
+                <a:gd name="connsiteY3" fmla="*/ 679010 h 686788"/>
+                <a:gd name="connsiteX4" fmla="*/ 0 w 9967865"/>
+                <a:gd name="connsiteY4" fmla="*/ 0 h 686788"/>
+                <a:gd name="connsiteX0" fmla="*/ 0 w 9967865"/>
+                <a:gd name="connsiteY0" fmla="*/ 0 h 750734"/>
+                <a:gd name="connsiteX1" fmla="*/ 9967865 w 9967865"/>
+                <a:gd name="connsiteY1" fmla="*/ 0 h 750734"/>
+                <a:gd name="connsiteX2" fmla="*/ 9086239 w 9967865"/>
+                <a:gd name="connsiteY2" fmla="*/ 686788 h 750734"/>
+                <a:gd name="connsiteX3" fmla="*/ 422409 w 9967865"/>
+                <a:gd name="connsiteY3" fmla="*/ 750734 h 750734"/>
+                <a:gd name="connsiteX4" fmla="*/ 0 w 9967865"/>
+                <a:gd name="connsiteY4" fmla="*/ 0 h 750734"/>
+                <a:gd name="connsiteX0" fmla="*/ 0 w 9967865"/>
+                <a:gd name="connsiteY0" fmla="*/ 0 h 688791"/>
+                <a:gd name="connsiteX1" fmla="*/ 9967865 w 9967865"/>
+                <a:gd name="connsiteY1" fmla="*/ 0 h 688791"/>
+                <a:gd name="connsiteX2" fmla="*/ 9086239 w 9967865"/>
+                <a:gd name="connsiteY2" fmla="*/ 686788 h 688791"/>
+                <a:gd name="connsiteX3" fmla="*/ 4224 w 9967865"/>
+                <a:gd name="connsiteY3" fmla="*/ 688791 h 688791"/>
+                <a:gd name="connsiteX4" fmla="*/ 0 w 9967865"/>
+                <a:gd name="connsiteY4" fmla="*/ 0 h 688791"/>
+                <a:gd name="connsiteX0" fmla="*/ 0 w 9967865"/>
+                <a:gd name="connsiteY0" fmla="*/ 0 h 688791"/>
+                <a:gd name="connsiteX1" fmla="*/ 9967865 w 9967865"/>
+                <a:gd name="connsiteY1" fmla="*/ 0 h 688791"/>
+                <a:gd name="connsiteX2" fmla="*/ 9318564 w 9967865"/>
+                <a:gd name="connsiteY2" fmla="*/ 634624 h 688791"/>
+                <a:gd name="connsiteX3" fmla="*/ 4224 w 9967865"/>
+                <a:gd name="connsiteY3" fmla="*/ 688791 h 688791"/>
+                <a:gd name="connsiteX4" fmla="*/ 0 w 9967865"/>
+                <a:gd name="connsiteY4" fmla="*/ 0 h 688791"/>
+                <a:gd name="connsiteX0" fmla="*/ 0 w 9967865"/>
+                <a:gd name="connsiteY0" fmla="*/ 0 h 688791"/>
+                <a:gd name="connsiteX1" fmla="*/ 9967865 w 9967865"/>
+                <a:gd name="connsiteY1" fmla="*/ 0 h 688791"/>
+                <a:gd name="connsiteX2" fmla="*/ 9001757 w 9967865"/>
+                <a:gd name="connsiteY2" fmla="*/ 683527 h 688791"/>
+                <a:gd name="connsiteX3" fmla="*/ 4224 w 9967865"/>
+                <a:gd name="connsiteY3" fmla="*/ 688791 h 688791"/>
+                <a:gd name="connsiteX4" fmla="*/ 0 w 9967865"/>
+                <a:gd name="connsiteY4" fmla="*/ 0 h 688791"/>
+                <a:gd name="connsiteX0" fmla="*/ 0 w 9967865"/>
+                <a:gd name="connsiteY0" fmla="*/ 0 h 688791"/>
+                <a:gd name="connsiteX1" fmla="*/ 9967865 w 9967865"/>
+                <a:gd name="connsiteY1" fmla="*/ 0 h 688791"/>
+                <a:gd name="connsiteX2" fmla="*/ 8929948 w 9967865"/>
+                <a:gd name="connsiteY2" fmla="*/ 686788 h 688791"/>
+                <a:gd name="connsiteX3" fmla="*/ 4224 w 9967865"/>
+                <a:gd name="connsiteY3" fmla="*/ 688791 h 688791"/>
+                <a:gd name="connsiteX4" fmla="*/ 0 w 9967865"/>
+                <a:gd name="connsiteY4" fmla="*/ 0 h 688791"/>
+                <a:gd name="connsiteX0" fmla="*/ 0 w 9967865"/>
+                <a:gd name="connsiteY0" fmla="*/ 0 h 774813"/>
+                <a:gd name="connsiteX1" fmla="*/ 9967865 w 9967865"/>
+                <a:gd name="connsiteY1" fmla="*/ 0 h 774813"/>
+                <a:gd name="connsiteX2" fmla="*/ 9153824 w 9967865"/>
+                <a:gd name="connsiteY2" fmla="*/ 774813 h 774813"/>
+                <a:gd name="connsiteX3" fmla="*/ 4224 w 9967865"/>
+                <a:gd name="connsiteY3" fmla="*/ 688791 h 774813"/>
+                <a:gd name="connsiteX4" fmla="*/ 0 w 9967865"/>
+                <a:gd name="connsiteY4" fmla="*/ 0 h 774813"/>
+                <a:gd name="connsiteX0" fmla="*/ 0 w 9967865"/>
+                <a:gd name="connsiteY0" fmla="*/ 0 h 688791"/>
+                <a:gd name="connsiteX1" fmla="*/ 9967865 w 9967865"/>
+                <a:gd name="connsiteY1" fmla="*/ 0 h 688791"/>
+                <a:gd name="connsiteX2" fmla="*/ 8824346 w 9967865"/>
+                <a:gd name="connsiteY2" fmla="*/ 484656 h 688791"/>
+                <a:gd name="connsiteX3" fmla="*/ 4224 w 9967865"/>
+                <a:gd name="connsiteY3" fmla="*/ 688791 h 688791"/>
+                <a:gd name="connsiteX4" fmla="*/ 0 w 9967865"/>
+                <a:gd name="connsiteY4" fmla="*/ 0 h 688791"/>
+                <a:gd name="connsiteX0" fmla="*/ 0 w 9967865"/>
+                <a:gd name="connsiteY0" fmla="*/ 0 h 690048"/>
+                <a:gd name="connsiteX1" fmla="*/ 9967865 w 9967865"/>
+                <a:gd name="connsiteY1" fmla="*/ 0 h 690048"/>
+                <a:gd name="connsiteX2" fmla="*/ 8760984 w 9967865"/>
+                <a:gd name="connsiteY2" fmla="*/ 690048 h 690048"/>
+                <a:gd name="connsiteX3" fmla="*/ 4224 w 9967865"/>
+                <a:gd name="connsiteY3" fmla="*/ 688791 h 690048"/>
+                <a:gd name="connsiteX4" fmla="*/ 0 w 9967865"/>
+                <a:gd name="connsiteY4" fmla="*/ 0 h 690048"/>
+              </a:gdLst>
+              <a:ahLst/>
+              <a:cxnLst>
+                <a:cxn ang="0">
+                  <a:pos x="connsiteX0" y="connsiteY0"/>
+                </a:cxn>
+                <a:cxn ang="0">
+                  <a:pos x="connsiteX1" y="connsiteY1"/>
+                </a:cxn>
+                <a:cxn ang="0">
+                  <a:pos x="connsiteX2" y="connsiteY2"/>
+                </a:cxn>
+                <a:cxn ang="0">
+                  <a:pos x="connsiteX3" y="connsiteY3"/>
+                </a:cxn>
+                <a:cxn ang="0">
+                  <a:pos x="connsiteX4" y="connsiteY4"/>
+                </a:cxn>
+              </a:cxnLst>
+              <a:rect l="l" t="t" r="r" b="b"/>
+              <a:pathLst>
+                <a:path w="9967865" h="690048">
+                  <a:moveTo>
+                    <a:pt x="0" y="0"/>
+                  </a:moveTo>
+                  <a:lnTo>
+                    <a:pt x="9967865" y="0"/>
+                  </a:lnTo>
+                  <a:lnTo>
+                    <a:pt x="8760984" y="690048"/>
+                  </a:lnTo>
+                  <a:lnTo>
+                    <a:pt x="4224" y="688791"/>
+                  </a:lnTo>
+                  <a:lnTo>
+                    <a:pt x="0" y="0"/>
+                  </a:lnTo>
+                  <a:close/>
+                </a:path>
+              </a:pathLst>
+            </a:custGeom>
+            <a:solidFill>
+              <a:srgbClr val="0070C0"/>
+            </a:solidFill>
+            <a:ln>
+              <a:noFill/>
+            </a:ln>
+          </p:spPr>
+          <p:style>
+            <a:lnRef idx="2">
+              <a:schemeClr val="accent1">
+                <a:shade val="50000"/>
+              </a:schemeClr>
+            </a:lnRef>
+            <a:fillRef idx="1">
+              <a:schemeClr val="accent1"/>
+            </a:fillRef>
+            <a:effectRef idx="0">
+              <a:schemeClr val="accent1"/>
+            </a:effectRef>
+            <a:fontRef idx="minor">
+              <a:schemeClr val="lt1"/>
+            </a:fontRef>
+          </p:style>
+          <p:txBody>
+            <a:bodyPr rtlCol="0" anchor="ctr"/>
+            <a:lstStyle/>
+            <a:p>
+              <a:pPr algn="ctr"/>
+              <a:endParaRPr lang="ru-RU" dirty="0"/>
+            </a:p>
+          </p:txBody>
+        </p:sp>
+      </p:grpSp>
+      <p:sp>
+        <p:nvSpPr>
+          <p:cNvPr id="11" name="object 3"/>
+          <p:cNvSpPr txBox="1"/>
+          <p:nvPr/>
+        </p:nvSpPr>
+        <p:spPr>
+          <a:xfrm>
+            <a:off x="838200" y="1524630"/>
+            <a:ext cx="7543800" cy="1754776"/>
+          </a:xfrm>
+          <a:prstGeom prst="rect">
+            <a:avLst/>
+          </a:prstGeom>
+        </p:spPr>
+        <p:txBody>
+          <a:bodyPr vert="horz" wrap="square" lIns="0" tIns="419100" rIns="0" bIns="0" rtlCol="0" anchor="ctr" anchorCtr="0">
+            <a:spAutoFit/>
+          </a:bodyPr>
+          <a:lstStyle/>
+          <a:p>
+            <a:pPr marR="5080">
+              <a:lnSpc>
+                <a:spcPct val="70000"/>
+              </a:lnSpc>
+            </a:pPr>
+            <a:r>
+              <a:rPr lang="ru-RU" sz="6000" dirty="0">
+                <a:solidFill>
+                  <a:schemeClr val="bg1"/>
+                </a:solidFill>
+                <a:latin typeface="Myriad Pro Black" panose="020B0803030403020204" pitchFamily="34" charset="0"/>
+                <a:cs typeface="Calibri"/>
+              </a:rPr>
+              <a:t>СПАСИБО</a:t>
+            </a:r>
+            <a:br>
+              <a:rPr lang="ru-RU" sz="6000" dirty="0">
+                <a:solidFill>
+                  <a:schemeClr val="bg1"/>
+                </a:solidFill>
+                <a:latin typeface="Myriad Pro Black" panose="020B0803030403020204" pitchFamily="34" charset="0"/>
+                <a:cs typeface="Calibri"/>
+              </a:rPr>
+            </a:br>
+            <a:r>
+              <a:rPr lang="ru-RU" sz="6000" dirty="0">
+                <a:solidFill>
+                  <a:schemeClr val="bg1"/>
+                </a:solidFill>
+                <a:latin typeface="Myriad Pro Black" panose="020B0803030403020204" pitchFamily="34" charset="0"/>
+                <a:cs typeface="Calibri"/>
+              </a:rPr>
+              <a:t>ЗА ВНИМАНИЕ!</a:t>
+            </a:r>
+          </a:p>
+        </p:txBody>
+      </p:sp>
+    </p:spTree>
+    <p:extLst>
+      <p:ext uri="{BB962C8B-B14F-4D97-AF65-F5344CB8AC3E}">
+        <p14:creationId xmlns:p14="http://schemas.microsoft.com/office/powerpoint/2010/main" val="3733878091"/>
+      </p:ext>
+    </p:extLst>
+  </p:cSld>
+  <p:clrMapOvr>
+    <a:masterClrMapping/>
+  </p:clrMapOvr>
 </p:sld>
 </file>
 
@@ -2309,7 +2806,7 @@
         <p:spPr>
           <a:xfrm>
             <a:off x="726375" y="1123950"/>
-            <a:ext cx="7693448" cy="3170612"/>
+            <a:ext cx="7655625" cy="2111860"/>
           </a:xfrm>
           <a:prstGeom prst="rect">
             <a:avLst/>
@@ -2327,38 +2824,10 @@
               </a:lnSpc>
             </a:pPr>
             <a:r>
-              <a:rPr lang="ru-RU" sz="2800" dirty="0" smtClean="0">
-                <a:latin typeface="Myriad Pro Black" panose="020B0803030403020204" pitchFamily="34" charset="0"/>
-              </a:rPr>
-              <a:t>Севастопольский </a:t>
-            </a:r>
-            <a:r>
               <a:rPr lang="ru-RU" sz="2800" dirty="0">
                 <a:latin typeface="Myriad Pro Black" panose="020B0803030403020204" pitchFamily="34" charset="0"/>
               </a:rPr>
-              <a:t/>
-            </a:r>
-            <a:br>
-              <a:rPr lang="ru-RU" sz="2800" dirty="0">
-                <a:latin typeface="Myriad Pro Black" panose="020B0803030403020204" pitchFamily="34" charset="0"/>
-              </a:rPr>
-            </a:br>
-            <a:r>
-              <a:rPr lang="ru-RU" sz="2800" dirty="0">
-                <a:latin typeface="Myriad Pro Black" panose="020B0803030403020204" pitchFamily="34" charset="0"/>
-              </a:rPr>
-              <a:t>государственный </a:t>
-            </a:r>
-            <a:br>
-              <a:rPr lang="ru-RU" sz="2800" dirty="0">
-                <a:latin typeface="Myriad Pro Black" panose="020B0803030403020204" pitchFamily="34" charset="0"/>
-              </a:rPr>
-            </a:br>
-            <a:r>
-              <a:rPr lang="ru-RU" sz="2800" dirty="0">
-                <a:latin typeface="Myriad Pro Black" panose="020B0803030403020204" pitchFamily="34" charset="0"/>
-              </a:rPr>
-              <a:t>университет</a:t>
+              <a:t>Диаграммы потоков данных</a:t>
             </a:r>
             <a:endParaRPr lang="ru-RU" sz="1400" dirty="0">
               <a:latin typeface="Myriad Pro Black" panose="020B0803030403020204" pitchFamily="34" charset="0"/>
@@ -2376,194 +2845,22 @@
               </a:spcAft>
             </a:pPr>
             <a:r>
-              <a:rPr lang="ru-RU" sz="1400" b="1" dirty="0">
+              <a:rPr lang="ru-RU" sz="2000" dirty="0">
                 <a:latin typeface="Myriad Pro" panose="020B0503030403020204" pitchFamily="34" charset="0"/>
               </a:rPr>
-              <a:t>Ведущий образовательный и научно-исследовательский </a:t>
+              <a:t>Процесс проектирования системы был начат с анализа того, какие данные участвуют в процессе функционирования системы, откуда они приходят, куда передаются, где хранятся и как преобразуются. Для визуализации этого анализа была построена </a:t>
             </a:r>
             <a:r>
-              <a:rPr lang="ru-RU" sz="1400" b="1" dirty="0" smtClean="0">
+              <a:rPr lang="ru-RU" sz="2000" b="1" dirty="0">
                 <a:latin typeface="Myriad Pro" panose="020B0503030403020204" pitchFamily="34" charset="0"/>
               </a:rPr>
-              <a:t>центр </a:t>
+              <a:t>диаграмма DFD </a:t>
             </a:r>
             <a:r>
-              <a:rPr lang="ru-RU" sz="1400" b="1" dirty="0">
+              <a:rPr lang="ru-RU" sz="2000" dirty="0">
                 <a:latin typeface="Myriad Pro" panose="020B0503030403020204" pitchFamily="34" charset="0"/>
               </a:rPr>
-              <a:t>Крыма. </a:t>
-            </a:r>
-            <a:r>
-              <a:rPr lang="en-US" sz="1400" b="1" dirty="0" smtClean="0">
-                <a:latin typeface="Myriad Pro" panose="020B0503030403020204" pitchFamily="34" charset="0"/>
-              </a:rPr>
-              <a:t/>
-            </a:r>
-            <a:br>
-              <a:rPr lang="en-US" sz="1400" b="1" dirty="0" smtClean="0">
-                <a:latin typeface="Myriad Pro" panose="020B0503030403020204" pitchFamily="34" charset="0"/>
-              </a:rPr>
-            </a:br>
-            <a:r>
-              <a:rPr lang="ru-RU" sz="1400" b="1" dirty="0" smtClean="0">
-                <a:latin typeface="Myriad Pro" panose="020B0503030403020204" pitchFamily="34" charset="0"/>
-              </a:rPr>
-              <a:t>Наша </a:t>
-            </a:r>
-            <a:r>
-              <a:rPr lang="ru-RU" sz="1400" b="1" dirty="0">
-                <a:latin typeface="Myriad Pro" panose="020B0503030403020204" pitchFamily="34" charset="0"/>
-              </a:rPr>
-              <a:t>цель – </a:t>
-            </a:r>
-            <a:r>
-              <a:rPr lang="ru-RU" sz="1400" b="1" dirty="0" smtClean="0">
-                <a:latin typeface="Myriad Pro" panose="020B0503030403020204" pitchFamily="34" charset="0"/>
-              </a:rPr>
-              <a:t>стать </a:t>
-            </a:r>
-            <a:r>
-              <a:rPr lang="ru-RU" sz="1400" b="1" dirty="0">
-                <a:latin typeface="Myriad Pro" panose="020B0503030403020204" pitchFamily="34" charset="0"/>
-              </a:rPr>
-              <a:t>центром развития региона </a:t>
-            </a:r>
-            <a:r>
-              <a:rPr lang="ru-RU" sz="1400" b="1" dirty="0" smtClean="0">
-                <a:latin typeface="Myriad Pro" panose="020B0503030403020204" pitchFamily="34" charset="0"/>
-              </a:rPr>
-              <a:t>и </a:t>
-            </a:r>
-            <a:r>
-              <a:rPr lang="ru-RU" sz="1400" b="1" dirty="0">
-                <a:latin typeface="Myriad Pro" panose="020B0503030403020204" pitchFamily="34" charset="0"/>
-              </a:rPr>
-              <a:t>вернуть Севастополю </a:t>
-            </a:r>
-            <a:r>
-              <a:rPr lang="en-US" sz="1400" b="1" dirty="0" smtClean="0">
-                <a:latin typeface="Myriad Pro" panose="020B0503030403020204" pitchFamily="34" charset="0"/>
-              </a:rPr>
-              <a:t/>
-            </a:r>
-            <a:br>
-              <a:rPr lang="en-US" sz="1400" b="1" dirty="0" smtClean="0">
-                <a:latin typeface="Myriad Pro" panose="020B0503030403020204" pitchFamily="34" charset="0"/>
-              </a:rPr>
-            </a:br>
-            <a:r>
-              <a:rPr lang="ru-RU" sz="1400" b="1" dirty="0" smtClean="0">
-                <a:latin typeface="Myriad Pro" panose="020B0503030403020204" pitchFamily="34" charset="0"/>
-              </a:rPr>
-              <a:t>статус </a:t>
-            </a:r>
-            <a:r>
-              <a:rPr lang="ru-RU" sz="1400" b="1" dirty="0">
-                <a:latin typeface="Myriad Pro" panose="020B0503030403020204" pitchFamily="34" charset="0"/>
-              </a:rPr>
-              <a:t>технологической столицы Причерноморья. </a:t>
-            </a:r>
-          </a:p>
-          <a:p>
-            <a:pPr indent="180000"/>
-            <a:r>
-              <a:rPr lang="ru-RU" sz="1200" dirty="0">
-                <a:latin typeface="Myriad Pro" panose="020B0503030403020204" pitchFamily="34" charset="0"/>
-              </a:rPr>
-              <a:t>Университет проводит политику активной интеграции  </a:t>
-            </a:r>
-            <a:r>
-              <a:rPr lang="ru-RU" sz="1200" dirty="0" smtClean="0">
-                <a:latin typeface="Myriad Pro" panose="020B0503030403020204" pitchFamily="34" charset="0"/>
-              </a:rPr>
-              <a:t>в </a:t>
-            </a:r>
-            <a:r>
-              <a:rPr lang="ru-RU" sz="1200" dirty="0">
-                <a:latin typeface="Myriad Pro" panose="020B0503030403020204" pitchFamily="34" charset="0"/>
-              </a:rPr>
-              <a:t>образовательное поле Российской Федерации: заключаются договоры о сотрудничестве с вузами страны, студенты и преподаватели регулярно участвуют </a:t>
-            </a:r>
-            <a:r>
-              <a:rPr lang="en-US" sz="1200" dirty="0" smtClean="0">
-                <a:latin typeface="Myriad Pro" panose="020B0503030403020204" pitchFamily="34" charset="0"/>
-              </a:rPr>
-              <a:t/>
-            </a:r>
-            <a:br>
-              <a:rPr lang="en-US" sz="1200" dirty="0" smtClean="0">
-                <a:latin typeface="Myriad Pro" panose="020B0503030403020204" pitchFamily="34" charset="0"/>
-              </a:rPr>
-            </a:br>
-            <a:r>
-              <a:rPr lang="ru-RU" sz="1200" dirty="0" smtClean="0">
-                <a:latin typeface="Myriad Pro" panose="020B0503030403020204" pitchFamily="34" charset="0"/>
-              </a:rPr>
-              <a:t>во </a:t>
-            </a:r>
-            <a:r>
-              <a:rPr lang="ru-RU" sz="1200" dirty="0">
-                <a:latin typeface="Myriad Pro" panose="020B0503030403020204" pitchFamily="34" charset="0"/>
-              </a:rPr>
-              <a:t>всероссийских научных конкурсах и олимпиадах, сотрудники университета имеют возможность </a:t>
-            </a:r>
-            <a:r>
-              <a:rPr lang="en-US" sz="1200" dirty="0" smtClean="0">
-                <a:latin typeface="Myriad Pro" panose="020B0503030403020204" pitchFamily="34" charset="0"/>
-              </a:rPr>
-              <a:t/>
-            </a:r>
-            <a:br>
-              <a:rPr lang="en-US" sz="1200" dirty="0" smtClean="0">
-                <a:latin typeface="Myriad Pro" panose="020B0503030403020204" pitchFamily="34" charset="0"/>
-              </a:rPr>
-            </a:br>
-            <a:r>
-              <a:rPr lang="ru-RU" sz="1200" dirty="0" smtClean="0">
-                <a:latin typeface="Myriad Pro" panose="020B0503030403020204" pitchFamily="34" charset="0"/>
-              </a:rPr>
-              <a:t>обмена </a:t>
-            </a:r>
-            <a:r>
-              <a:rPr lang="ru-RU" sz="1200" dirty="0">
-                <a:latin typeface="Myriad Pro" panose="020B0503030403020204" pitchFamily="34" charset="0"/>
-              </a:rPr>
-              <a:t>опытом с коллегами из других высших </a:t>
-            </a:r>
-            <a:r>
-              <a:rPr lang="ru-RU" sz="1200" dirty="0" smtClean="0">
-                <a:latin typeface="Myriad Pro" panose="020B0503030403020204" pitchFamily="34" charset="0"/>
-              </a:rPr>
-              <a:t>учебных </a:t>
-            </a:r>
-            <a:r>
-              <a:rPr lang="ru-RU" sz="1200" dirty="0">
-                <a:latin typeface="Myriad Pro" panose="020B0503030403020204" pitchFamily="34" charset="0"/>
-              </a:rPr>
-              <a:t>заведений страны, реализуется программа максимальной открытости для города, в рамках которой действуют проекты «Открытые лекции» </a:t>
-            </a:r>
-            <a:r>
-              <a:rPr lang="en-US" sz="1200" dirty="0" smtClean="0">
-                <a:latin typeface="Myriad Pro" panose="020B0503030403020204" pitchFamily="34" charset="0"/>
-              </a:rPr>
-              <a:t/>
-            </a:r>
-            <a:br>
-              <a:rPr lang="en-US" sz="1200" dirty="0" smtClean="0">
-                <a:latin typeface="Myriad Pro" panose="020B0503030403020204" pitchFamily="34" charset="0"/>
-              </a:rPr>
-            </a:br>
-            <a:r>
-              <a:rPr lang="ru-RU" sz="1200" dirty="0" smtClean="0">
-                <a:latin typeface="Myriad Pro" panose="020B0503030403020204" pitchFamily="34" charset="0"/>
-              </a:rPr>
-              <a:t>и </a:t>
-            </a:r>
-            <a:r>
-              <a:rPr lang="ru-RU" sz="1200" dirty="0">
-                <a:latin typeface="Myriad Pro" panose="020B0503030403020204" pitchFamily="34" charset="0"/>
-              </a:rPr>
-              <a:t>«Академия Третьего Возраста». </a:t>
+              <a:t>в нотации Гейна-Сарсона. </a:t>
             </a:r>
           </a:p>
         </p:txBody>
@@ -2576,8 +2873,8 @@
         </p:nvSpPr>
         <p:spPr>
           <a:xfrm>
-            <a:off x="671015" y="97949"/>
-            <a:ext cx="8229600" cy="440762"/>
+            <a:off x="724617" y="147583"/>
+            <a:ext cx="8229600" cy="268407"/>
           </a:xfrm>
           <a:prstGeom prst="rect">
             <a:avLst/>
@@ -2596,37 +2893,14 @@
               </a:lnSpc>
             </a:pPr>
             <a:r>
-              <a:rPr lang="ru-RU" sz="1400" dirty="0" smtClean="0">
+              <a:rPr lang="ru-RU" sz="1400" dirty="0">
                 <a:solidFill>
                   <a:schemeClr val="bg1"/>
                 </a:solidFill>
                 <a:latin typeface="Myriad Pro Black" panose="020B0803030403020204" pitchFamily="34" charset="0"/>
               </a:rPr>
-              <a:t>НАЗВАНИЕ</a:t>
+              <a:t>Системотехнический анализ и проектирование</a:t>
             </a:r>
-            <a:br>
-              <a:rPr lang="ru-RU" sz="1400" dirty="0" smtClean="0">
-                <a:solidFill>
-                  <a:schemeClr val="bg1"/>
-                </a:solidFill>
-                <a:latin typeface="Myriad Pro Black" panose="020B0803030403020204" pitchFamily="34" charset="0"/>
-              </a:rPr>
-            </a:br>
-            <a:r>
-              <a:rPr lang="ru-RU" sz="1400" dirty="0" smtClean="0">
-                <a:solidFill>
-                  <a:schemeClr val="bg1"/>
-                </a:solidFill>
-                <a:latin typeface="Myriad Pro Black" panose="020B0803030403020204" pitchFamily="34" charset="0"/>
-              </a:rPr>
-              <a:t>ДОКЛАДА</a:t>
-            </a:r>
-            <a:endParaRPr lang="ru-RU" sz="1400" dirty="0">
-              <a:solidFill>
-                <a:schemeClr val="bg1"/>
-              </a:solidFill>
-              <a:latin typeface="Myriad Pro Black" panose="020B0803030403020204" pitchFamily="34" charset="0"/>
-            </a:endParaRPr>
           </a:p>
         </p:txBody>
       </p:sp>
@@ -2635,18 +2909,991 @@
   <p:clrMapOvr>
     <a:masterClrMapping/>
   </p:clrMapOvr>
-  <p:timing>
-    <p:tnLst>
-      <p:par>
-        <p:cTn id="1" dur="indefinite" restart="never" nodeType="tmRoot"/>
-      </p:par>
-    </p:tnLst>
-  </p:timing>
 </p:sld>
 </file>
 
 <file path=ppt/slides/slide3.xml><?xml version="1.0" encoding="utf-8"?>
-<p:sld xmlns:a="http://schemas.openxmlformats.org/drawingml/2006/main" xmlns:r="http://schemas.openxmlformats.org/officeDocument/2006/relationships" xmlns:p="http://schemas.openxmlformats.org/presentationml/2006/main" showMasterSp="0">
+<p:sld xmlns:a="http://schemas.openxmlformats.org/drawingml/2006/main" xmlns:r="http://schemas.openxmlformats.org/officeDocument/2006/relationships" xmlns:p="http://schemas.openxmlformats.org/presentationml/2006/main">
+  <p:cSld>
+    <p:spTree>
+      <p:nvGrpSpPr>
+        <p:cNvPr id="1" name=""/>
+        <p:cNvGrpSpPr/>
+        <p:nvPr/>
+      </p:nvGrpSpPr>
+      <p:grpSpPr>
+        <a:xfrm>
+          <a:off x="0" y="0"/>
+          <a:ext cx="0" cy="0"/>
+          <a:chOff x="0" y="0"/>
+          <a:chExt cx="0" cy="0"/>
+        </a:xfrm>
+      </p:grpSpPr>
+      <p:sp>
+        <p:nvSpPr>
+          <p:cNvPr id="5" name="TextBox 4">
+            <a:extLst>
+              <a:ext uri="{FF2B5EF4-FFF2-40B4-BE49-F238E27FC236}">
+                <a16:creationId xmlns:a16="http://schemas.microsoft.com/office/drawing/2014/main" id="{B099C040-AED1-1665-1F28-C769C71CA79D}"/>
+              </a:ext>
+            </a:extLst>
+          </p:cNvPr>
+          <p:cNvSpPr txBox="1"/>
+          <p:nvPr/>
+        </p:nvSpPr>
+        <p:spPr>
+          <a:xfrm>
+            <a:off x="1676400" y="4248150"/>
+            <a:ext cx="6248400" cy="646331"/>
+          </a:xfrm>
+          <a:prstGeom prst="rect">
+            <a:avLst/>
+          </a:prstGeom>
+          <a:noFill/>
+        </p:spPr>
+        <p:txBody>
+          <a:bodyPr wrap="square" rtlCol="0">
+            <a:spAutoFit/>
+          </a:bodyPr>
+          <a:lstStyle/>
+          <a:p>
+            <a:pPr algn="ctr"/>
+            <a:r>
+              <a:rPr lang="ru-RU" b="1" dirty="0">
+                <a:latin typeface="Myriad Pro" panose="020B0503030403020204" charset="0"/>
+              </a:rPr>
+              <a:t>Контекстная DFD-диаграмма системы оптимизации расписаний пакетов задач</a:t>
+            </a:r>
+          </a:p>
+        </p:txBody>
+      </p:sp>
+      <p:pic>
+        <p:nvPicPr>
+          <p:cNvPr id="2" name="Рисунок 1">
+            <a:extLst>
+              <a:ext uri="{FF2B5EF4-FFF2-40B4-BE49-F238E27FC236}">
+                <a16:creationId xmlns:a16="http://schemas.microsoft.com/office/drawing/2014/main" id="{36C94A28-894E-4C24-895D-BC0083556D4D}"/>
+              </a:ext>
+            </a:extLst>
+          </p:cNvPr>
+          <p:cNvPicPr>
+            <a:picLocks noChangeAspect="1"/>
+          </p:cNvPicPr>
+          <p:nvPr/>
+        </p:nvPicPr>
+        <p:blipFill>
+          <a:blip r:embed="rId2"/>
+          <a:stretch>
+            <a:fillRect/>
+          </a:stretch>
+        </p:blipFill>
+        <p:spPr>
+          <a:xfrm>
+            <a:off x="457200" y="742950"/>
+            <a:ext cx="8229600" cy="3179084"/>
+          </a:xfrm>
+          <a:prstGeom prst="rect">
+            <a:avLst/>
+          </a:prstGeom>
+        </p:spPr>
+      </p:pic>
+    </p:spTree>
+    <p:extLst>
+      <p:ext uri="{BB962C8B-B14F-4D97-AF65-F5344CB8AC3E}">
+        <p14:creationId xmlns:p14="http://schemas.microsoft.com/office/powerpoint/2010/main" val="2340396588"/>
+      </p:ext>
+    </p:extLst>
+  </p:cSld>
+  <p:clrMapOvr>
+    <a:masterClrMapping/>
+  </p:clrMapOvr>
+</p:sld>
+</file>
+
+<file path=ppt/slides/slide4.xml><?xml version="1.0" encoding="utf-8"?>
+<p:sld xmlns:a="http://schemas.openxmlformats.org/drawingml/2006/main" xmlns:r="http://schemas.openxmlformats.org/officeDocument/2006/relationships" xmlns:p="http://schemas.openxmlformats.org/presentationml/2006/main">
+  <p:cSld>
+    <p:spTree>
+      <p:nvGrpSpPr>
+        <p:cNvPr id="1" name=""/>
+        <p:cNvGrpSpPr/>
+        <p:nvPr/>
+      </p:nvGrpSpPr>
+      <p:grpSpPr>
+        <a:xfrm>
+          <a:off x="0" y="0"/>
+          <a:ext cx="0" cy="0"/>
+          <a:chOff x="0" y="0"/>
+          <a:chExt cx="0" cy="0"/>
+        </a:xfrm>
+      </p:grpSpPr>
+      <p:sp>
+        <p:nvSpPr>
+          <p:cNvPr id="7" name="TextBox 6">
+            <a:extLst>
+              <a:ext uri="{FF2B5EF4-FFF2-40B4-BE49-F238E27FC236}">
+                <a16:creationId xmlns:a16="http://schemas.microsoft.com/office/drawing/2014/main" id="{641154A0-433F-0776-5969-4BCB65B328E9}"/>
+              </a:ext>
+            </a:extLst>
+          </p:cNvPr>
+          <p:cNvSpPr txBox="1"/>
+          <p:nvPr/>
+        </p:nvSpPr>
+        <p:spPr>
+          <a:xfrm>
+            <a:off x="3048000" y="3867150"/>
+            <a:ext cx="3657600" cy="369332"/>
+          </a:xfrm>
+          <a:prstGeom prst="rect">
+            <a:avLst/>
+          </a:prstGeom>
+          <a:noFill/>
+        </p:spPr>
+        <p:txBody>
+          <a:bodyPr wrap="square">
+            <a:spAutoFit/>
+          </a:bodyPr>
+          <a:lstStyle/>
+          <a:p>
+            <a:r>
+              <a:rPr lang="ru-RU" sz="1800" b="1" dirty="0">
+                <a:effectLst/>
+                <a:latin typeface="Myriad Pro" panose="020B0503030403020204" charset="0"/>
+                <a:ea typeface="Calibri" panose="020F0502020204030204" pitchFamily="34" charset="0"/>
+              </a:rPr>
+              <a:t>Декомпозиция </a:t>
+            </a:r>
+            <a:r>
+              <a:rPr lang="en-US" sz="1800" b="1" dirty="0">
+                <a:effectLst/>
+                <a:latin typeface="Myriad Pro" panose="020B0503030403020204" charset="0"/>
+                <a:ea typeface="Calibri" panose="020F0502020204030204" pitchFamily="34" charset="0"/>
+              </a:rPr>
+              <a:t>DFD</a:t>
+            </a:r>
+            <a:r>
+              <a:rPr lang="ru-RU" sz="1800" b="1" dirty="0">
+                <a:effectLst/>
+                <a:latin typeface="Myriad Pro" panose="020B0503030403020204" charset="0"/>
+                <a:ea typeface="Calibri" panose="020F0502020204030204" pitchFamily="34" charset="0"/>
+              </a:rPr>
+              <a:t>-диаграммы</a:t>
+            </a:r>
+            <a:endParaRPr lang="ru-RU" b="1" dirty="0">
+              <a:latin typeface="Myriad Pro" panose="020B0503030403020204" charset="0"/>
+            </a:endParaRPr>
+          </a:p>
+        </p:txBody>
+      </p:sp>
+      <p:pic>
+        <p:nvPicPr>
+          <p:cNvPr id="3" name="Рисунок 2">
+            <a:extLst>
+              <a:ext uri="{FF2B5EF4-FFF2-40B4-BE49-F238E27FC236}">
+                <a16:creationId xmlns:a16="http://schemas.microsoft.com/office/drawing/2014/main" id="{C6D4E325-EFD7-C460-AE0C-6CEE38EC84A2}"/>
+              </a:ext>
+            </a:extLst>
+          </p:cNvPr>
+          <p:cNvPicPr>
+            <a:picLocks noChangeAspect="1"/>
+          </p:cNvPicPr>
+          <p:nvPr/>
+        </p:nvPicPr>
+        <p:blipFill>
+          <a:blip r:embed="rId2"/>
+          <a:stretch>
+            <a:fillRect/>
+          </a:stretch>
+        </p:blipFill>
+        <p:spPr>
+          <a:xfrm>
+            <a:off x="128829" y="1047750"/>
+            <a:ext cx="8886341" cy="2392442"/>
+          </a:xfrm>
+          <a:prstGeom prst="rect">
+            <a:avLst/>
+          </a:prstGeom>
+        </p:spPr>
+      </p:pic>
+    </p:spTree>
+    <p:extLst>
+      <p:ext uri="{BB962C8B-B14F-4D97-AF65-F5344CB8AC3E}">
+        <p14:creationId xmlns:p14="http://schemas.microsoft.com/office/powerpoint/2010/main" val="1423181584"/>
+      </p:ext>
+    </p:extLst>
+  </p:cSld>
+  <p:clrMapOvr>
+    <a:masterClrMapping/>
+  </p:clrMapOvr>
+</p:sld>
+</file>
+
+<file path=ppt/slides/slide5.xml><?xml version="1.0" encoding="utf-8"?>
+<p:sld xmlns:a="http://schemas.openxmlformats.org/drawingml/2006/main" xmlns:r="http://schemas.openxmlformats.org/officeDocument/2006/relationships" xmlns:p="http://schemas.openxmlformats.org/presentationml/2006/main">
+  <p:cSld>
+    <p:spTree>
+      <p:nvGrpSpPr>
+        <p:cNvPr id="1" name=""/>
+        <p:cNvGrpSpPr/>
+        <p:nvPr/>
+      </p:nvGrpSpPr>
+      <p:grpSpPr>
+        <a:xfrm>
+          <a:off x="0" y="0"/>
+          <a:ext cx="0" cy="0"/>
+          <a:chOff x="0" y="0"/>
+          <a:chExt cx="0" cy="0"/>
+        </a:xfrm>
+      </p:grpSpPr>
+      <p:sp>
+        <p:nvSpPr>
+          <p:cNvPr id="2" name="Заголовок 1">
+            <a:extLst>
+              <a:ext uri="{FF2B5EF4-FFF2-40B4-BE49-F238E27FC236}">
+                <a16:creationId xmlns:a16="http://schemas.microsoft.com/office/drawing/2014/main" id="{77BD87F6-D4E0-B26B-47EC-7766779AF8D3}"/>
+              </a:ext>
+            </a:extLst>
+          </p:cNvPr>
+          <p:cNvSpPr>
+            <a:spLocks noGrp="1"/>
+          </p:cNvSpPr>
+          <p:nvPr>
+            <p:ph type="title"/>
+          </p:nvPr>
+        </p:nvSpPr>
+        <p:spPr>
+          <a:xfrm>
+            <a:off x="724617" y="782411"/>
+            <a:ext cx="6555301" cy="1138773"/>
+          </a:xfrm>
+        </p:spPr>
+        <p:txBody>
+          <a:bodyPr/>
+          <a:lstStyle/>
+          <a:p>
+            <a:r>
+              <a:rPr lang="ru-RU" dirty="0"/>
+              <a:t>Функциональная модель IDEF0 </a:t>
+            </a:r>
+          </a:p>
+        </p:txBody>
+      </p:sp>
+      <p:sp>
+        <p:nvSpPr>
+          <p:cNvPr id="4" name="TextBox 3">
+            <a:extLst>
+              <a:ext uri="{FF2B5EF4-FFF2-40B4-BE49-F238E27FC236}">
+                <a16:creationId xmlns:a16="http://schemas.microsoft.com/office/drawing/2014/main" id="{A3CACAEF-FCFC-0BC8-67D2-0C893D62DEC1}"/>
+              </a:ext>
+            </a:extLst>
+          </p:cNvPr>
+          <p:cNvSpPr txBox="1"/>
+          <p:nvPr/>
+        </p:nvSpPr>
+        <p:spPr>
+          <a:xfrm>
+            <a:off x="724617" y="1504950"/>
+            <a:ext cx="7162800" cy="2400209"/>
+          </a:xfrm>
+          <a:prstGeom prst="rect">
+            <a:avLst/>
+          </a:prstGeom>
+          <a:noFill/>
+        </p:spPr>
+        <p:txBody>
+          <a:bodyPr wrap="square">
+            <a:spAutoFit/>
+          </a:bodyPr>
+          <a:lstStyle/>
+          <a:p>
+            <a:pPr algn="just">
+              <a:lnSpc>
+                <a:spcPct val="150000"/>
+              </a:lnSpc>
+              <a:buNone/>
+            </a:pPr>
+            <a:r>
+              <a:rPr lang="ru-RU" sz="1800" dirty="0">
+                <a:effectLst/>
+                <a:latin typeface="Myriad Pro" panose="020B0503030403020204" charset="0"/>
+                <a:ea typeface="Times New Roman" panose="02020603050405020304" pitchFamily="18" charset="0"/>
+                <a:cs typeface="Times New Roman" panose="02020603050405020304" pitchFamily="18" charset="0"/>
+              </a:rPr>
+              <a:t>Функциональная модель системы определяет, что она делает, какие функции выполняет и как они связаны между собой. </a:t>
+            </a:r>
+          </a:p>
+          <a:p>
+            <a:pPr algn="just">
+              <a:buNone/>
+            </a:pPr>
+            <a:endParaRPr lang="ru-RU" dirty="0">
+              <a:latin typeface="Myriad Pro" panose="020B0503030403020204" charset="0"/>
+              <a:ea typeface="Calibri" panose="020F0502020204030204" pitchFamily="34" charset="0"/>
+              <a:cs typeface="Times New Roman" panose="02020603050405020304" pitchFamily="18" charset="0"/>
+            </a:endParaRPr>
+          </a:p>
+          <a:p>
+            <a:pPr algn="just">
+              <a:lnSpc>
+                <a:spcPct val="150000"/>
+              </a:lnSpc>
+              <a:buNone/>
+            </a:pPr>
+            <a:r>
+              <a:rPr lang="ru-RU" sz="1800" dirty="0">
+                <a:effectLst/>
+                <a:latin typeface="Myriad Pro" panose="020B0503030403020204" charset="0"/>
+                <a:ea typeface="Calibri" panose="020F0502020204030204" pitchFamily="34" charset="0"/>
+                <a:cs typeface="Times New Roman" panose="02020603050405020304" pitchFamily="18" charset="0"/>
+              </a:rPr>
+              <a:t>На основе существующих решений, проделанного анализа и сформулированных требований к проекту была разработана функциональная модель в </a:t>
+            </a:r>
+            <a:r>
+              <a:rPr lang="ru-RU" sz="1800" b="1" dirty="0">
+                <a:effectLst/>
+                <a:latin typeface="Myriad Pro" panose="020B0503030403020204" charset="0"/>
+                <a:ea typeface="Calibri" panose="020F0502020204030204" pitchFamily="34" charset="0"/>
+                <a:cs typeface="Times New Roman" panose="02020603050405020304" pitchFamily="18" charset="0"/>
+              </a:rPr>
+              <a:t>методологии IDEF0</a:t>
+            </a:r>
+            <a:r>
+              <a:rPr lang="ru-RU" sz="1800" dirty="0">
+                <a:effectLst/>
+                <a:latin typeface="Myriad Pro" panose="020B0503030403020204" charset="0"/>
+                <a:ea typeface="Calibri" panose="020F0502020204030204" pitchFamily="34" charset="0"/>
+                <a:cs typeface="Times New Roman" panose="02020603050405020304" pitchFamily="18" charset="0"/>
+              </a:rPr>
+              <a:t>.</a:t>
+            </a:r>
+          </a:p>
+        </p:txBody>
+      </p:sp>
+      <p:grpSp>
+        <p:nvGrpSpPr>
+          <p:cNvPr id="5" name="Группа 4">
+            <a:extLst>
+              <a:ext uri="{FF2B5EF4-FFF2-40B4-BE49-F238E27FC236}">
+                <a16:creationId xmlns:a16="http://schemas.microsoft.com/office/drawing/2014/main" id="{A10ADF12-ED3F-0DD5-43F7-2D0853EB6547}"/>
+              </a:ext>
+            </a:extLst>
+          </p:cNvPr>
+          <p:cNvGrpSpPr/>
+          <p:nvPr/>
+        </p:nvGrpSpPr>
+        <p:grpSpPr>
+          <a:xfrm>
+            <a:off x="0" y="-5563"/>
+            <a:ext cx="9144000" cy="574705"/>
+            <a:chOff x="0" y="-5563"/>
+            <a:chExt cx="9144000" cy="574705"/>
+          </a:xfrm>
+        </p:grpSpPr>
+        <p:grpSp>
+          <p:nvGrpSpPr>
+            <p:cNvPr id="6" name="Группа 5">
+              <a:extLst>
+                <a:ext uri="{FF2B5EF4-FFF2-40B4-BE49-F238E27FC236}">
+                  <a16:creationId xmlns:a16="http://schemas.microsoft.com/office/drawing/2014/main" id="{852005BA-E17A-5E2E-DDD0-7B1BD245B727}"/>
+                </a:ext>
+              </a:extLst>
+            </p:cNvPr>
+            <p:cNvGrpSpPr/>
+            <p:nvPr/>
+          </p:nvGrpSpPr>
+          <p:grpSpPr>
+            <a:xfrm>
+              <a:off x="0" y="-5563"/>
+              <a:ext cx="9144000" cy="574705"/>
+              <a:chOff x="-2931" y="-6103"/>
+              <a:chExt cx="12194930" cy="867688"/>
+            </a:xfrm>
+          </p:grpSpPr>
+          <p:sp>
+            <p:nvSpPr>
+              <p:cNvPr id="8" name="Прямоугольник 7">
+                <a:extLst>
+                  <a:ext uri="{FF2B5EF4-FFF2-40B4-BE49-F238E27FC236}">
+                    <a16:creationId xmlns:a16="http://schemas.microsoft.com/office/drawing/2014/main" id="{567BE90F-DFA0-75A3-E7AA-38FC770DE4EE}"/>
+                  </a:ext>
+                </a:extLst>
+              </p:cNvPr>
+              <p:cNvSpPr/>
+              <p:nvPr/>
+            </p:nvSpPr>
+            <p:spPr>
+              <a:xfrm>
+                <a:off x="0" y="-6103"/>
+                <a:ext cx="12191999" cy="867688"/>
+              </a:xfrm>
+              <a:prstGeom prst="rect">
+                <a:avLst/>
+              </a:prstGeom>
+              <a:solidFill>
+                <a:srgbClr val="002060"/>
+              </a:solidFill>
+              <a:ln>
+                <a:noFill/>
+              </a:ln>
+            </p:spPr>
+            <p:style>
+              <a:lnRef idx="2">
+                <a:schemeClr val="accent1">
+                  <a:shade val="50000"/>
+                </a:schemeClr>
+              </a:lnRef>
+              <a:fillRef idx="1">
+                <a:schemeClr val="accent1"/>
+              </a:fillRef>
+              <a:effectRef idx="0">
+                <a:schemeClr val="accent1"/>
+              </a:effectRef>
+              <a:fontRef idx="minor">
+                <a:schemeClr val="lt1"/>
+              </a:fontRef>
+            </p:style>
+            <p:txBody>
+              <a:bodyPr rtlCol="0" anchor="ctr"/>
+              <a:lstStyle/>
+              <a:p>
+                <a:pPr algn="ctr"/>
+                <a:endParaRPr lang="ru-RU" dirty="0"/>
+              </a:p>
+            </p:txBody>
+          </p:sp>
+          <p:sp>
+            <p:nvSpPr>
+              <p:cNvPr id="9" name="Полилиния 13">
+                <a:extLst>
+                  <a:ext uri="{FF2B5EF4-FFF2-40B4-BE49-F238E27FC236}">
+                    <a16:creationId xmlns:a16="http://schemas.microsoft.com/office/drawing/2014/main" id="{DD3CC828-91C0-1CE2-7DBD-94790AEAEE31}"/>
+                  </a:ext>
+                </a:extLst>
+              </p:cNvPr>
+              <p:cNvSpPr/>
+              <p:nvPr/>
+            </p:nvSpPr>
+            <p:spPr>
+              <a:xfrm>
+                <a:off x="-2931" y="-6103"/>
+                <a:ext cx="8638075" cy="867685"/>
+              </a:xfrm>
+              <a:custGeom>
+                <a:avLst/>
+                <a:gdLst>
+                  <a:gd name="connsiteX0" fmla="*/ 0 w 9967865"/>
+                  <a:gd name="connsiteY0" fmla="*/ 0 h 679010"/>
+                  <a:gd name="connsiteX1" fmla="*/ 9967865 w 9967865"/>
+                  <a:gd name="connsiteY1" fmla="*/ 0 h 679010"/>
+                  <a:gd name="connsiteX2" fmla="*/ 7659232 w 9967865"/>
+                  <a:gd name="connsiteY2" fmla="*/ 679010 h 679010"/>
+                  <a:gd name="connsiteX3" fmla="*/ 0 w 9967865"/>
+                  <a:gd name="connsiteY3" fmla="*/ 679010 h 679010"/>
+                  <a:gd name="connsiteX4" fmla="*/ 0 w 9967865"/>
+                  <a:gd name="connsiteY4" fmla="*/ 0 h 679010"/>
+                  <a:gd name="connsiteX0" fmla="*/ 0 w 9967865"/>
+                  <a:gd name="connsiteY0" fmla="*/ 0 h 686788"/>
+                  <a:gd name="connsiteX1" fmla="*/ 9967865 w 9967865"/>
+                  <a:gd name="connsiteY1" fmla="*/ 0 h 686788"/>
+                  <a:gd name="connsiteX2" fmla="*/ 9086239 w 9967865"/>
+                  <a:gd name="connsiteY2" fmla="*/ 686788 h 686788"/>
+                  <a:gd name="connsiteX3" fmla="*/ 0 w 9967865"/>
+                  <a:gd name="connsiteY3" fmla="*/ 679010 h 686788"/>
+                  <a:gd name="connsiteX4" fmla="*/ 0 w 9967865"/>
+                  <a:gd name="connsiteY4" fmla="*/ 0 h 686788"/>
+                  <a:gd name="connsiteX0" fmla="*/ 0 w 9967865"/>
+                  <a:gd name="connsiteY0" fmla="*/ 0 h 750734"/>
+                  <a:gd name="connsiteX1" fmla="*/ 9967865 w 9967865"/>
+                  <a:gd name="connsiteY1" fmla="*/ 0 h 750734"/>
+                  <a:gd name="connsiteX2" fmla="*/ 9086239 w 9967865"/>
+                  <a:gd name="connsiteY2" fmla="*/ 686788 h 750734"/>
+                  <a:gd name="connsiteX3" fmla="*/ 422409 w 9967865"/>
+                  <a:gd name="connsiteY3" fmla="*/ 750734 h 750734"/>
+                  <a:gd name="connsiteX4" fmla="*/ 0 w 9967865"/>
+                  <a:gd name="connsiteY4" fmla="*/ 0 h 750734"/>
+                  <a:gd name="connsiteX0" fmla="*/ 0 w 9967865"/>
+                  <a:gd name="connsiteY0" fmla="*/ 0 h 688791"/>
+                  <a:gd name="connsiteX1" fmla="*/ 9967865 w 9967865"/>
+                  <a:gd name="connsiteY1" fmla="*/ 0 h 688791"/>
+                  <a:gd name="connsiteX2" fmla="*/ 9086239 w 9967865"/>
+                  <a:gd name="connsiteY2" fmla="*/ 686788 h 688791"/>
+                  <a:gd name="connsiteX3" fmla="*/ 4224 w 9967865"/>
+                  <a:gd name="connsiteY3" fmla="*/ 688791 h 688791"/>
+                  <a:gd name="connsiteX4" fmla="*/ 0 w 9967865"/>
+                  <a:gd name="connsiteY4" fmla="*/ 0 h 688791"/>
+                  <a:gd name="connsiteX0" fmla="*/ 0 w 9967865"/>
+                  <a:gd name="connsiteY0" fmla="*/ 0 h 688791"/>
+                  <a:gd name="connsiteX1" fmla="*/ 9967865 w 9967865"/>
+                  <a:gd name="connsiteY1" fmla="*/ 0 h 688791"/>
+                  <a:gd name="connsiteX2" fmla="*/ 9318564 w 9967865"/>
+                  <a:gd name="connsiteY2" fmla="*/ 634624 h 688791"/>
+                  <a:gd name="connsiteX3" fmla="*/ 4224 w 9967865"/>
+                  <a:gd name="connsiteY3" fmla="*/ 688791 h 688791"/>
+                  <a:gd name="connsiteX4" fmla="*/ 0 w 9967865"/>
+                  <a:gd name="connsiteY4" fmla="*/ 0 h 688791"/>
+                  <a:gd name="connsiteX0" fmla="*/ 0 w 9967865"/>
+                  <a:gd name="connsiteY0" fmla="*/ 0 h 688791"/>
+                  <a:gd name="connsiteX1" fmla="*/ 9967865 w 9967865"/>
+                  <a:gd name="connsiteY1" fmla="*/ 0 h 688791"/>
+                  <a:gd name="connsiteX2" fmla="*/ 9001757 w 9967865"/>
+                  <a:gd name="connsiteY2" fmla="*/ 683527 h 688791"/>
+                  <a:gd name="connsiteX3" fmla="*/ 4224 w 9967865"/>
+                  <a:gd name="connsiteY3" fmla="*/ 688791 h 688791"/>
+                  <a:gd name="connsiteX4" fmla="*/ 0 w 9967865"/>
+                  <a:gd name="connsiteY4" fmla="*/ 0 h 688791"/>
+                  <a:gd name="connsiteX0" fmla="*/ 0 w 9967865"/>
+                  <a:gd name="connsiteY0" fmla="*/ 0 h 688791"/>
+                  <a:gd name="connsiteX1" fmla="*/ 9967865 w 9967865"/>
+                  <a:gd name="connsiteY1" fmla="*/ 0 h 688791"/>
+                  <a:gd name="connsiteX2" fmla="*/ 8929948 w 9967865"/>
+                  <a:gd name="connsiteY2" fmla="*/ 686788 h 688791"/>
+                  <a:gd name="connsiteX3" fmla="*/ 4224 w 9967865"/>
+                  <a:gd name="connsiteY3" fmla="*/ 688791 h 688791"/>
+                  <a:gd name="connsiteX4" fmla="*/ 0 w 9967865"/>
+                  <a:gd name="connsiteY4" fmla="*/ 0 h 688791"/>
+                  <a:gd name="connsiteX0" fmla="*/ 0 w 9967865"/>
+                  <a:gd name="connsiteY0" fmla="*/ 0 h 774813"/>
+                  <a:gd name="connsiteX1" fmla="*/ 9967865 w 9967865"/>
+                  <a:gd name="connsiteY1" fmla="*/ 0 h 774813"/>
+                  <a:gd name="connsiteX2" fmla="*/ 9153824 w 9967865"/>
+                  <a:gd name="connsiteY2" fmla="*/ 774813 h 774813"/>
+                  <a:gd name="connsiteX3" fmla="*/ 4224 w 9967865"/>
+                  <a:gd name="connsiteY3" fmla="*/ 688791 h 774813"/>
+                  <a:gd name="connsiteX4" fmla="*/ 0 w 9967865"/>
+                  <a:gd name="connsiteY4" fmla="*/ 0 h 774813"/>
+                  <a:gd name="connsiteX0" fmla="*/ 0 w 9967865"/>
+                  <a:gd name="connsiteY0" fmla="*/ 0 h 688791"/>
+                  <a:gd name="connsiteX1" fmla="*/ 9967865 w 9967865"/>
+                  <a:gd name="connsiteY1" fmla="*/ 0 h 688791"/>
+                  <a:gd name="connsiteX2" fmla="*/ 8824346 w 9967865"/>
+                  <a:gd name="connsiteY2" fmla="*/ 484656 h 688791"/>
+                  <a:gd name="connsiteX3" fmla="*/ 4224 w 9967865"/>
+                  <a:gd name="connsiteY3" fmla="*/ 688791 h 688791"/>
+                  <a:gd name="connsiteX4" fmla="*/ 0 w 9967865"/>
+                  <a:gd name="connsiteY4" fmla="*/ 0 h 688791"/>
+                  <a:gd name="connsiteX0" fmla="*/ 0 w 9967865"/>
+                  <a:gd name="connsiteY0" fmla="*/ 0 h 690048"/>
+                  <a:gd name="connsiteX1" fmla="*/ 9967865 w 9967865"/>
+                  <a:gd name="connsiteY1" fmla="*/ 0 h 690048"/>
+                  <a:gd name="connsiteX2" fmla="*/ 8760984 w 9967865"/>
+                  <a:gd name="connsiteY2" fmla="*/ 690048 h 690048"/>
+                  <a:gd name="connsiteX3" fmla="*/ 4224 w 9967865"/>
+                  <a:gd name="connsiteY3" fmla="*/ 688791 h 690048"/>
+                  <a:gd name="connsiteX4" fmla="*/ 0 w 9967865"/>
+                  <a:gd name="connsiteY4" fmla="*/ 0 h 690048"/>
+                </a:gdLst>
+                <a:ahLst/>
+                <a:cxnLst>
+                  <a:cxn ang="0">
+                    <a:pos x="connsiteX0" y="connsiteY0"/>
+                  </a:cxn>
+                  <a:cxn ang="0">
+                    <a:pos x="connsiteX1" y="connsiteY1"/>
+                  </a:cxn>
+                  <a:cxn ang="0">
+                    <a:pos x="connsiteX2" y="connsiteY2"/>
+                  </a:cxn>
+                  <a:cxn ang="0">
+                    <a:pos x="connsiteX3" y="connsiteY3"/>
+                  </a:cxn>
+                  <a:cxn ang="0">
+                    <a:pos x="connsiteX4" y="connsiteY4"/>
+                  </a:cxn>
+                </a:cxnLst>
+                <a:rect l="l" t="t" r="r" b="b"/>
+                <a:pathLst>
+                  <a:path w="9967865" h="690048">
+                    <a:moveTo>
+                      <a:pt x="0" y="0"/>
+                    </a:moveTo>
+                    <a:lnTo>
+                      <a:pt x="9967865" y="0"/>
+                    </a:lnTo>
+                    <a:lnTo>
+                      <a:pt x="8760984" y="690048"/>
+                    </a:lnTo>
+                    <a:lnTo>
+                      <a:pt x="4224" y="688791"/>
+                    </a:lnTo>
+                    <a:lnTo>
+                      <a:pt x="0" y="0"/>
+                    </a:lnTo>
+                    <a:close/>
+                  </a:path>
+                </a:pathLst>
+              </a:custGeom>
+              <a:solidFill>
+                <a:srgbClr val="0070C0"/>
+              </a:solidFill>
+              <a:ln>
+                <a:noFill/>
+              </a:ln>
+            </p:spPr>
+            <p:style>
+              <a:lnRef idx="2">
+                <a:schemeClr val="accent1">
+                  <a:shade val="50000"/>
+                </a:schemeClr>
+              </a:lnRef>
+              <a:fillRef idx="1">
+                <a:schemeClr val="accent1"/>
+              </a:fillRef>
+              <a:effectRef idx="0">
+                <a:schemeClr val="accent1"/>
+              </a:effectRef>
+              <a:fontRef idx="minor">
+                <a:schemeClr val="lt1"/>
+              </a:fontRef>
+            </p:style>
+            <p:txBody>
+              <a:bodyPr rtlCol="0" anchor="ctr"/>
+              <a:lstStyle/>
+              <a:p>
+                <a:pPr algn="ctr"/>
+                <a:endParaRPr lang="ru-RU" dirty="0"/>
+              </a:p>
+            </p:txBody>
+          </p:sp>
+        </p:grpSp>
+        <p:pic>
+          <p:nvPicPr>
+            <p:cNvPr id="7" name="Рисунок 6">
+              <a:extLst>
+                <a:ext uri="{FF2B5EF4-FFF2-40B4-BE49-F238E27FC236}">
+                  <a16:creationId xmlns:a16="http://schemas.microsoft.com/office/drawing/2014/main" id="{F1AC16F1-9187-19D9-776A-F80BE606B16B}"/>
+                </a:ext>
+              </a:extLst>
+            </p:cNvPr>
+            <p:cNvPicPr>
+              <a:picLocks noChangeAspect="1"/>
+            </p:cNvPicPr>
+            <p:nvPr/>
+          </p:nvPicPr>
+          <p:blipFill>
+            <a:blip r:embed="rId2" cstate="print">
+              <a:extLst>
+                <a:ext uri="{28A0092B-C50C-407E-A947-70E740481C1C}">
+                  <a14:useLocalDpi xmlns:a14="http://schemas.microsoft.com/office/drawing/2010/main" val="0"/>
+                </a:ext>
+              </a:extLst>
+            </a:blip>
+            <a:stretch>
+              <a:fillRect/>
+            </a:stretch>
+          </p:blipFill>
+          <p:spPr>
+            <a:xfrm>
+              <a:off x="7543800" y="91298"/>
+              <a:ext cx="1211316" cy="380979"/>
+            </a:xfrm>
+            <a:prstGeom prst="rect">
+              <a:avLst/>
+            </a:prstGeom>
+          </p:spPr>
+        </p:pic>
+      </p:grpSp>
+      <p:sp>
+        <p:nvSpPr>
+          <p:cNvPr id="10" name="TextBox 9">
+            <a:extLst>
+              <a:ext uri="{FF2B5EF4-FFF2-40B4-BE49-F238E27FC236}">
+                <a16:creationId xmlns:a16="http://schemas.microsoft.com/office/drawing/2014/main" id="{60FC20B4-B303-0211-F038-44F277875EAF}"/>
+              </a:ext>
+            </a:extLst>
+          </p:cNvPr>
+          <p:cNvSpPr txBox="1"/>
+          <p:nvPr/>
+        </p:nvSpPr>
+        <p:spPr>
+          <a:xfrm>
+            <a:off x="724617" y="147583"/>
+            <a:ext cx="8229600" cy="268407"/>
+          </a:xfrm>
+          <a:prstGeom prst="rect">
+            <a:avLst/>
+          </a:prstGeom>
+          <a:noFill/>
+        </p:spPr>
+        <p:txBody>
+          <a:bodyPr wrap="square" rtlCol="0">
+            <a:spAutoFit/>
+          </a:bodyPr>
+          <a:lstStyle/>
+          <a:p>
+            <a:pPr>
+              <a:lnSpc>
+                <a:spcPct val="80000"/>
+              </a:lnSpc>
+            </a:pPr>
+            <a:r>
+              <a:rPr lang="ru-RU" sz="1400" dirty="0">
+                <a:solidFill>
+                  <a:schemeClr val="bg1"/>
+                </a:solidFill>
+                <a:latin typeface="Myriad Pro Black" panose="020B0803030403020204" pitchFamily="34" charset="0"/>
+              </a:rPr>
+              <a:t>Системотехнический анализ и проектирование</a:t>
+            </a:r>
+          </a:p>
+        </p:txBody>
+      </p:sp>
+    </p:spTree>
+    <p:extLst>
+      <p:ext uri="{BB962C8B-B14F-4D97-AF65-F5344CB8AC3E}">
+        <p14:creationId xmlns:p14="http://schemas.microsoft.com/office/powerpoint/2010/main" val="2699385423"/>
+      </p:ext>
+    </p:extLst>
+  </p:cSld>
+  <p:clrMapOvr>
+    <a:masterClrMapping/>
+  </p:clrMapOvr>
+</p:sld>
+</file>
+
+<file path=ppt/slides/slide6.xml><?xml version="1.0" encoding="utf-8"?>
+<p:sld xmlns:a="http://schemas.openxmlformats.org/drawingml/2006/main" xmlns:r="http://schemas.openxmlformats.org/officeDocument/2006/relationships" xmlns:p="http://schemas.openxmlformats.org/presentationml/2006/main">
+  <p:cSld>
+    <p:spTree>
+      <p:nvGrpSpPr>
+        <p:cNvPr id="1" name=""/>
+        <p:cNvGrpSpPr/>
+        <p:nvPr/>
+      </p:nvGrpSpPr>
+      <p:grpSpPr>
+        <a:xfrm>
+          <a:off x="0" y="0"/>
+          <a:ext cx="0" cy="0"/>
+          <a:chOff x="0" y="0"/>
+          <a:chExt cx="0" cy="0"/>
+        </a:xfrm>
+      </p:grpSpPr>
+      <p:pic>
+        <p:nvPicPr>
+          <p:cNvPr id="2" name="Рисунок 1">
+            <a:extLst>
+              <a:ext uri="{FF2B5EF4-FFF2-40B4-BE49-F238E27FC236}">
+                <a16:creationId xmlns:a16="http://schemas.microsoft.com/office/drawing/2014/main" id="{CF823111-549D-15F2-27E9-5231FADAF17E}"/>
+              </a:ext>
+            </a:extLst>
+          </p:cNvPr>
+          <p:cNvPicPr>
+            <a:picLocks noChangeAspect="1"/>
+          </p:cNvPicPr>
+          <p:nvPr/>
+        </p:nvPicPr>
+        <p:blipFill>
+          <a:blip r:embed="rId2"/>
+          <a:stretch>
+            <a:fillRect/>
+          </a:stretch>
+        </p:blipFill>
+        <p:spPr>
+          <a:xfrm>
+            <a:off x="1428750" y="285750"/>
+            <a:ext cx="6286500" cy="3961993"/>
+          </a:xfrm>
+          <a:prstGeom prst="rect">
+            <a:avLst/>
+          </a:prstGeom>
+        </p:spPr>
+      </p:pic>
+      <p:sp>
+        <p:nvSpPr>
+          <p:cNvPr id="4" name="TextBox 3">
+            <a:extLst>
+              <a:ext uri="{FF2B5EF4-FFF2-40B4-BE49-F238E27FC236}">
+                <a16:creationId xmlns:a16="http://schemas.microsoft.com/office/drawing/2014/main" id="{22223CCC-1BCA-8648-B61A-2A34FD08491D}"/>
+              </a:ext>
+            </a:extLst>
+          </p:cNvPr>
+          <p:cNvSpPr txBox="1"/>
+          <p:nvPr/>
+        </p:nvSpPr>
+        <p:spPr>
+          <a:xfrm>
+            <a:off x="609600" y="4171950"/>
+            <a:ext cx="7620000" cy="459869"/>
+          </a:xfrm>
+          <a:prstGeom prst="rect">
+            <a:avLst/>
+          </a:prstGeom>
+          <a:noFill/>
+        </p:spPr>
+        <p:txBody>
+          <a:bodyPr wrap="square">
+            <a:spAutoFit/>
+          </a:bodyPr>
+          <a:lstStyle/>
+          <a:p>
+            <a:pPr indent="450215" algn="ctr">
+              <a:lnSpc>
+                <a:spcPct val="150000"/>
+              </a:lnSpc>
+              <a:buNone/>
+            </a:pPr>
+            <a:r>
+              <a:rPr lang="ru-RU" sz="1800" b="1" dirty="0">
+                <a:effectLst/>
+                <a:latin typeface="Myriad Pro" panose="020B0503030403020204" charset="0"/>
+                <a:ea typeface="Calibri" panose="020F0502020204030204" pitchFamily="34" charset="0"/>
+                <a:cs typeface="Times New Roman" panose="02020603050405020304" pitchFamily="18" charset="0"/>
+              </a:rPr>
+              <a:t>Контекстная диаграмма процесса оптимизации в нотации </a:t>
+            </a:r>
+            <a:r>
+              <a:rPr lang="en-US" sz="1800" b="1" dirty="0">
+                <a:effectLst/>
+                <a:latin typeface="Myriad Pro" panose="020B0503030403020204" charset="0"/>
+                <a:ea typeface="Calibri" panose="020F0502020204030204" pitchFamily="34" charset="0"/>
+                <a:cs typeface="Times New Roman" panose="02020603050405020304" pitchFamily="18" charset="0"/>
+              </a:rPr>
+              <a:t>IDEF</a:t>
+            </a:r>
+            <a:r>
+              <a:rPr lang="ru-RU" sz="1800" b="1" dirty="0">
+                <a:effectLst/>
+                <a:latin typeface="Myriad Pro" panose="020B0503030403020204" charset="0"/>
+                <a:ea typeface="Calibri" panose="020F0502020204030204" pitchFamily="34" charset="0"/>
+                <a:cs typeface="Times New Roman" panose="02020603050405020304" pitchFamily="18" charset="0"/>
+              </a:rPr>
+              <a:t>0</a:t>
+            </a:r>
+          </a:p>
+        </p:txBody>
+      </p:sp>
+    </p:spTree>
+    <p:extLst>
+      <p:ext uri="{BB962C8B-B14F-4D97-AF65-F5344CB8AC3E}">
+        <p14:creationId xmlns:p14="http://schemas.microsoft.com/office/powerpoint/2010/main" val="2415501945"/>
+      </p:ext>
+    </p:extLst>
+  </p:cSld>
+  <p:clrMapOvr>
+    <a:masterClrMapping/>
+  </p:clrMapOvr>
+</p:sld>
+</file>
+
+<file path=ppt/slides/slide7.xml><?xml version="1.0" encoding="utf-8"?>
+<p:sld xmlns:a="http://schemas.openxmlformats.org/drawingml/2006/main" xmlns:r="http://schemas.openxmlformats.org/officeDocument/2006/relationships" xmlns:p="http://schemas.openxmlformats.org/presentationml/2006/main">
+  <p:cSld>
+    <p:spTree>
+      <p:nvGrpSpPr>
+        <p:cNvPr id="1" name=""/>
+        <p:cNvGrpSpPr/>
+        <p:nvPr/>
+      </p:nvGrpSpPr>
+      <p:grpSpPr>
+        <a:xfrm>
+          <a:off x="0" y="0"/>
+          <a:ext cx="0" cy="0"/>
+          <a:chOff x="0" y="0"/>
+          <a:chExt cx="0" cy="0"/>
+        </a:xfrm>
+      </p:grpSpPr>
+      <p:pic>
+        <p:nvPicPr>
+          <p:cNvPr id="2" name="Рисунок 1">
+            <a:extLst>
+              <a:ext uri="{FF2B5EF4-FFF2-40B4-BE49-F238E27FC236}">
+                <a16:creationId xmlns:a16="http://schemas.microsoft.com/office/drawing/2014/main" id="{C31AE35A-ECCA-EF49-F4ED-9ED6DA5731D6}"/>
+              </a:ext>
+            </a:extLst>
+          </p:cNvPr>
+          <p:cNvPicPr>
+            <a:picLocks noChangeAspect="1"/>
+          </p:cNvPicPr>
+          <p:nvPr/>
+        </p:nvPicPr>
+        <p:blipFill>
+          <a:blip r:embed="rId2"/>
+          <a:stretch>
+            <a:fillRect/>
+          </a:stretch>
+        </p:blipFill>
+        <p:spPr>
+          <a:xfrm>
+            <a:off x="152400" y="0"/>
+            <a:ext cx="8839200" cy="4250491"/>
+          </a:xfrm>
+          <a:prstGeom prst="rect">
+            <a:avLst/>
+          </a:prstGeom>
+        </p:spPr>
+      </p:pic>
+      <p:sp>
+        <p:nvSpPr>
+          <p:cNvPr id="4" name="TextBox 3">
+            <a:extLst>
+              <a:ext uri="{FF2B5EF4-FFF2-40B4-BE49-F238E27FC236}">
+                <a16:creationId xmlns:a16="http://schemas.microsoft.com/office/drawing/2014/main" id="{40550B94-D407-FCDA-201C-4F91A90A1CA5}"/>
+              </a:ext>
+            </a:extLst>
+          </p:cNvPr>
+          <p:cNvSpPr txBox="1"/>
+          <p:nvPr/>
+        </p:nvSpPr>
+        <p:spPr>
+          <a:xfrm>
+            <a:off x="1143000" y="4460041"/>
+            <a:ext cx="6705600" cy="369332"/>
+          </a:xfrm>
+          <a:prstGeom prst="rect">
+            <a:avLst/>
+          </a:prstGeom>
+          <a:noFill/>
+        </p:spPr>
+        <p:txBody>
+          <a:bodyPr wrap="square">
+            <a:spAutoFit/>
+          </a:bodyPr>
+          <a:lstStyle/>
+          <a:p>
+            <a:r>
+              <a:rPr lang="ru-RU" sz="1800" b="1" dirty="0">
+                <a:effectLst/>
+                <a:latin typeface="Myriad Pro" panose="020B0503030403020204" charset="0"/>
+                <a:ea typeface="Calibri" panose="020F0502020204030204" pitchFamily="34" charset="0"/>
+              </a:rPr>
+              <a:t>Диаграмма первого уровня декомпозиции в нотации </a:t>
+            </a:r>
+            <a:r>
+              <a:rPr lang="en-US" sz="1800" b="1" dirty="0">
+                <a:effectLst/>
+                <a:latin typeface="Myriad Pro" panose="020B0503030403020204" charset="0"/>
+                <a:ea typeface="Calibri" panose="020F0502020204030204" pitchFamily="34" charset="0"/>
+              </a:rPr>
+              <a:t>IDEF</a:t>
+            </a:r>
+            <a:r>
+              <a:rPr lang="ru-RU" sz="1800" b="1" dirty="0">
+                <a:effectLst/>
+                <a:latin typeface="Myriad Pro" panose="020B0503030403020204" charset="0"/>
+                <a:ea typeface="Calibri" panose="020F0502020204030204" pitchFamily="34" charset="0"/>
+              </a:rPr>
+              <a:t>0</a:t>
+            </a:r>
+            <a:endParaRPr lang="ru-RU" b="1" dirty="0">
+              <a:latin typeface="Myriad Pro" panose="020B0503030403020204" charset="0"/>
+            </a:endParaRPr>
+          </a:p>
+        </p:txBody>
+      </p:sp>
+    </p:spTree>
+    <p:extLst>
+      <p:ext uri="{BB962C8B-B14F-4D97-AF65-F5344CB8AC3E}">
+        <p14:creationId xmlns:p14="http://schemas.microsoft.com/office/powerpoint/2010/main" val="1310706592"/>
+      </p:ext>
+    </p:extLst>
+  </p:cSld>
+  <p:clrMapOvr>
+    <a:masterClrMapping/>
+  </p:clrMapOvr>
+</p:sld>
+</file>
+
+<file path=ppt/slides/slide8.xml><?xml version="1.0" encoding="utf-8"?>
+<p:sld xmlns:a="http://schemas.openxmlformats.org/drawingml/2006/main" xmlns:r="http://schemas.openxmlformats.org/officeDocument/2006/relationships" xmlns:p="http://schemas.openxmlformats.org/presentationml/2006/main">
   <p:cSld>
     <p:spTree>
       <p:nvGrpSpPr>
@@ -2664,327 +3911,987 @@
       </p:grpSpPr>
       <p:grpSp>
         <p:nvGrpSpPr>
-          <p:cNvPr id="8" name="Группа 7"/>
+          <p:cNvPr id="4" name="Группа 3">
+            <a:extLst>
+              <a:ext uri="{FF2B5EF4-FFF2-40B4-BE49-F238E27FC236}">
+                <a16:creationId xmlns:a16="http://schemas.microsoft.com/office/drawing/2014/main" id="{C9F2CADD-8BB4-D647-A08E-9DCCDED3FCFC}"/>
+              </a:ext>
+            </a:extLst>
+          </p:cNvPr>
           <p:cNvGrpSpPr/>
           <p:nvPr/>
         </p:nvGrpSpPr>
         <p:grpSpPr>
           <a:xfrm>
             <a:off x="0" y="-5563"/>
-            <a:ext cx="9144000" cy="5149063"/>
-            <a:chOff x="-2931" y="-6103"/>
-            <a:chExt cx="12194930" cy="867688"/>
+            <a:ext cx="9144000" cy="574705"/>
+            <a:chOff x="0" y="-5563"/>
+            <a:chExt cx="9144000" cy="574705"/>
           </a:xfrm>
         </p:grpSpPr>
-        <p:sp>
-          <p:nvSpPr>
-            <p:cNvPr id="9" name="Прямоугольник 8"/>
-            <p:cNvSpPr/>
+        <p:grpSp>
+          <p:nvGrpSpPr>
+            <p:cNvPr id="5" name="Группа 4">
+              <a:extLst>
+                <a:ext uri="{FF2B5EF4-FFF2-40B4-BE49-F238E27FC236}">
+                  <a16:creationId xmlns:a16="http://schemas.microsoft.com/office/drawing/2014/main" id="{B1FAF83C-EB00-0033-A22D-C0720B9833B2}"/>
+                </a:ext>
+              </a:extLst>
+            </p:cNvPr>
+            <p:cNvGrpSpPr/>
             <p:nvPr/>
-          </p:nvSpPr>
+          </p:nvGrpSpPr>
+          <p:grpSpPr>
+            <a:xfrm>
+              <a:off x="0" y="-5563"/>
+              <a:ext cx="9144000" cy="574705"/>
+              <a:chOff x="-2931" y="-6103"/>
+              <a:chExt cx="12194930" cy="867688"/>
+            </a:xfrm>
+          </p:grpSpPr>
+          <p:sp>
+            <p:nvSpPr>
+              <p:cNvPr id="7" name="Прямоугольник 6">
+                <a:extLst>
+                  <a:ext uri="{FF2B5EF4-FFF2-40B4-BE49-F238E27FC236}">
+                    <a16:creationId xmlns:a16="http://schemas.microsoft.com/office/drawing/2014/main" id="{67113C1D-9E75-6A5D-B4FE-886E023B58AC}"/>
+                  </a:ext>
+                </a:extLst>
+              </p:cNvPr>
+              <p:cNvSpPr/>
+              <p:nvPr/>
+            </p:nvSpPr>
+            <p:spPr>
+              <a:xfrm>
+                <a:off x="0" y="-6103"/>
+                <a:ext cx="12191999" cy="867688"/>
+              </a:xfrm>
+              <a:prstGeom prst="rect">
+                <a:avLst/>
+              </a:prstGeom>
+              <a:solidFill>
+                <a:srgbClr val="002060"/>
+              </a:solidFill>
+              <a:ln>
+                <a:noFill/>
+              </a:ln>
+            </p:spPr>
+            <p:style>
+              <a:lnRef idx="2">
+                <a:schemeClr val="accent1">
+                  <a:shade val="50000"/>
+                </a:schemeClr>
+              </a:lnRef>
+              <a:fillRef idx="1">
+                <a:schemeClr val="accent1"/>
+              </a:fillRef>
+              <a:effectRef idx="0">
+                <a:schemeClr val="accent1"/>
+              </a:effectRef>
+              <a:fontRef idx="minor">
+                <a:schemeClr val="lt1"/>
+              </a:fontRef>
+            </p:style>
+            <p:txBody>
+              <a:bodyPr rtlCol="0" anchor="ctr"/>
+              <a:lstStyle/>
+              <a:p>
+                <a:pPr algn="ctr"/>
+                <a:endParaRPr lang="ru-RU" dirty="0"/>
+              </a:p>
+            </p:txBody>
+          </p:sp>
+          <p:sp>
+            <p:nvSpPr>
+              <p:cNvPr id="8" name="Полилиния 13">
+                <a:extLst>
+                  <a:ext uri="{FF2B5EF4-FFF2-40B4-BE49-F238E27FC236}">
+                    <a16:creationId xmlns:a16="http://schemas.microsoft.com/office/drawing/2014/main" id="{5674930A-51A5-D9BB-3FEE-7199302FE199}"/>
+                  </a:ext>
+                </a:extLst>
+              </p:cNvPr>
+              <p:cNvSpPr/>
+              <p:nvPr/>
+            </p:nvSpPr>
+            <p:spPr>
+              <a:xfrm>
+                <a:off x="-2931" y="-6103"/>
+                <a:ext cx="8638075" cy="867685"/>
+              </a:xfrm>
+              <a:custGeom>
+                <a:avLst/>
+                <a:gdLst>
+                  <a:gd name="connsiteX0" fmla="*/ 0 w 9967865"/>
+                  <a:gd name="connsiteY0" fmla="*/ 0 h 679010"/>
+                  <a:gd name="connsiteX1" fmla="*/ 9967865 w 9967865"/>
+                  <a:gd name="connsiteY1" fmla="*/ 0 h 679010"/>
+                  <a:gd name="connsiteX2" fmla="*/ 7659232 w 9967865"/>
+                  <a:gd name="connsiteY2" fmla="*/ 679010 h 679010"/>
+                  <a:gd name="connsiteX3" fmla="*/ 0 w 9967865"/>
+                  <a:gd name="connsiteY3" fmla="*/ 679010 h 679010"/>
+                  <a:gd name="connsiteX4" fmla="*/ 0 w 9967865"/>
+                  <a:gd name="connsiteY4" fmla="*/ 0 h 679010"/>
+                  <a:gd name="connsiteX0" fmla="*/ 0 w 9967865"/>
+                  <a:gd name="connsiteY0" fmla="*/ 0 h 686788"/>
+                  <a:gd name="connsiteX1" fmla="*/ 9967865 w 9967865"/>
+                  <a:gd name="connsiteY1" fmla="*/ 0 h 686788"/>
+                  <a:gd name="connsiteX2" fmla="*/ 9086239 w 9967865"/>
+                  <a:gd name="connsiteY2" fmla="*/ 686788 h 686788"/>
+                  <a:gd name="connsiteX3" fmla="*/ 0 w 9967865"/>
+                  <a:gd name="connsiteY3" fmla="*/ 679010 h 686788"/>
+                  <a:gd name="connsiteX4" fmla="*/ 0 w 9967865"/>
+                  <a:gd name="connsiteY4" fmla="*/ 0 h 686788"/>
+                  <a:gd name="connsiteX0" fmla="*/ 0 w 9967865"/>
+                  <a:gd name="connsiteY0" fmla="*/ 0 h 750734"/>
+                  <a:gd name="connsiteX1" fmla="*/ 9967865 w 9967865"/>
+                  <a:gd name="connsiteY1" fmla="*/ 0 h 750734"/>
+                  <a:gd name="connsiteX2" fmla="*/ 9086239 w 9967865"/>
+                  <a:gd name="connsiteY2" fmla="*/ 686788 h 750734"/>
+                  <a:gd name="connsiteX3" fmla="*/ 422409 w 9967865"/>
+                  <a:gd name="connsiteY3" fmla="*/ 750734 h 750734"/>
+                  <a:gd name="connsiteX4" fmla="*/ 0 w 9967865"/>
+                  <a:gd name="connsiteY4" fmla="*/ 0 h 750734"/>
+                  <a:gd name="connsiteX0" fmla="*/ 0 w 9967865"/>
+                  <a:gd name="connsiteY0" fmla="*/ 0 h 688791"/>
+                  <a:gd name="connsiteX1" fmla="*/ 9967865 w 9967865"/>
+                  <a:gd name="connsiteY1" fmla="*/ 0 h 688791"/>
+                  <a:gd name="connsiteX2" fmla="*/ 9086239 w 9967865"/>
+                  <a:gd name="connsiteY2" fmla="*/ 686788 h 688791"/>
+                  <a:gd name="connsiteX3" fmla="*/ 4224 w 9967865"/>
+                  <a:gd name="connsiteY3" fmla="*/ 688791 h 688791"/>
+                  <a:gd name="connsiteX4" fmla="*/ 0 w 9967865"/>
+                  <a:gd name="connsiteY4" fmla="*/ 0 h 688791"/>
+                  <a:gd name="connsiteX0" fmla="*/ 0 w 9967865"/>
+                  <a:gd name="connsiteY0" fmla="*/ 0 h 688791"/>
+                  <a:gd name="connsiteX1" fmla="*/ 9967865 w 9967865"/>
+                  <a:gd name="connsiteY1" fmla="*/ 0 h 688791"/>
+                  <a:gd name="connsiteX2" fmla="*/ 9318564 w 9967865"/>
+                  <a:gd name="connsiteY2" fmla="*/ 634624 h 688791"/>
+                  <a:gd name="connsiteX3" fmla="*/ 4224 w 9967865"/>
+                  <a:gd name="connsiteY3" fmla="*/ 688791 h 688791"/>
+                  <a:gd name="connsiteX4" fmla="*/ 0 w 9967865"/>
+                  <a:gd name="connsiteY4" fmla="*/ 0 h 688791"/>
+                  <a:gd name="connsiteX0" fmla="*/ 0 w 9967865"/>
+                  <a:gd name="connsiteY0" fmla="*/ 0 h 688791"/>
+                  <a:gd name="connsiteX1" fmla="*/ 9967865 w 9967865"/>
+                  <a:gd name="connsiteY1" fmla="*/ 0 h 688791"/>
+                  <a:gd name="connsiteX2" fmla="*/ 9001757 w 9967865"/>
+                  <a:gd name="connsiteY2" fmla="*/ 683527 h 688791"/>
+                  <a:gd name="connsiteX3" fmla="*/ 4224 w 9967865"/>
+                  <a:gd name="connsiteY3" fmla="*/ 688791 h 688791"/>
+                  <a:gd name="connsiteX4" fmla="*/ 0 w 9967865"/>
+                  <a:gd name="connsiteY4" fmla="*/ 0 h 688791"/>
+                  <a:gd name="connsiteX0" fmla="*/ 0 w 9967865"/>
+                  <a:gd name="connsiteY0" fmla="*/ 0 h 688791"/>
+                  <a:gd name="connsiteX1" fmla="*/ 9967865 w 9967865"/>
+                  <a:gd name="connsiteY1" fmla="*/ 0 h 688791"/>
+                  <a:gd name="connsiteX2" fmla="*/ 8929948 w 9967865"/>
+                  <a:gd name="connsiteY2" fmla="*/ 686788 h 688791"/>
+                  <a:gd name="connsiteX3" fmla="*/ 4224 w 9967865"/>
+                  <a:gd name="connsiteY3" fmla="*/ 688791 h 688791"/>
+                  <a:gd name="connsiteX4" fmla="*/ 0 w 9967865"/>
+                  <a:gd name="connsiteY4" fmla="*/ 0 h 688791"/>
+                  <a:gd name="connsiteX0" fmla="*/ 0 w 9967865"/>
+                  <a:gd name="connsiteY0" fmla="*/ 0 h 774813"/>
+                  <a:gd name="connsiteX1" fmla="*/ 9967865 w 9967865"/>
+                  <a:gd name="connsiteY1" fmla="*/ 0 h 774813"/>
+                  <a:gd name="connsiteX2" fmla="*/ 9153824 w 9967865"/>
+                  <a:gd name="connsiteY2" fmla="*/ 774813 h 774813"/>
+                  <a:gd name="connsiteX3" fmla="*/ 4224 w 9967865"/>
+                  <a:gd name="connsiteY3" fmla="*/ 688791 h 774813"/>
+                  <a:gd name="connsiteX4" fmla="*/ 0 w 9967865"/>
+                  <a:gd name="connsiteY4" fmla="*/ 0 h 774813"/>
+                  <a:gd name="connsiteX0" fmla="*/ 0 w 9967865"/>
+                  <a:gd name="connsiteY0" fmla="*/ 0 h 688791"/>
+                  <a:gd name="connsiteX1" fmla="*/ 9967865 w 9967865"/>
+                  <a:gd name="connsiteY1" fmla="*/ 0 h 688791"/>
+                  <a:gd name="connsiteX2" fmla="*/ 8824346 w 9967865"/>
+                  <a:gd name="connsiteY2" fmla="*/ 484656 h 688791"/>
+                  <a:gd name="connsiteX3" fmla="*/ 4224 w 9967865"/>
+                  <a:gd name="connsiteY3" fmla="*/ 688791 h 688791"/>
+                  <a:gd name="connsiteX4" fmla="*/ 0 w 9967865"/>
+                  <a:gd name="connsiteY4" fmla="*/ 0 h 688791"/>
+                  <a:gd name="connsiteX0" fmla="*/ 0 w 9967865"/>
+                  <a:gd name="connsiteY0" fmla="*/ 0 h 690048"/>
+                  <a:gd name="connsiteX1" fmla="*/ 9967865 w 9967865"/>
+                  <a:gd name="connsiteY1" fmla="*/ 0 h 690048"/>
+                  <a:gd name="connsiteX2" fmla="*/ 8760984 w 9967865"/>
+                  <a:gd name="connsiteY2" fmla="*/ 690048 h 690048"/>
+                  <a:gd name="connsiteX3" fmla="*/ 4224 w 9967865"/>
+                  <a:gd name="connsiteY3" fmla="*/ 688791 h 690048"/>
+                  <a:gd name="connsiteX4" fmla="*/ 0 w 9967865"/>
+                  <a:gd name="connsiteY4" fmla="*/ 0 h 690048"/>
+                </a:gdLst>
+                <a:ahLst/>
+                <a:cxnLst>
+                  <a:cxn ang="0">
+                    <a:pos x="connsiteX0" y="connsiteY0"/>
+                  </a:cxn>
+                  <a:cxn ang="0">
+                    <a:pos x="connsiteX1" y="connsiteY1"/>
+                  </a:cxn>
+                  <a:cxn ang="0">
+                    <a:pos x="connsiteX2" y="connsiteY2"/>
+                  </a:cxn>
+                  <a:cxn ang="0">
+                    <a:pos x="connsiteX3" y="connsiteY3"/>
+                  </a:cxn>
+                  <a:cxn ang="0">
+                    <a:pos x="connsiteX4" y="connsiteY4"/>
+                  </a:cxn>
+                </a:cxnLst>
+                <a:rect l="l" t="t" r="r" b="b"/>
+                <a:pathLst>
+                  <a:path w="9967865" h="690048">
+                    <a:moveTo>
+                      <a:pt x="0" y="0"/>
+                    </a:moveTo>
+                    <a:lnTo>
+                      <a:pt x="9967865" y="0"/>
+                    </a:lnTo>
+                    <a:lnTo>
+                      <a:pt x="8760984" y="690048"/>
+                    </a:lnTo>
+                    <a:lnTo>
+                      <a:pt x="4224" y="688791"/>
+                    </a:lnTo>
+                    <a:lnTo>
+                      <a:pt x="0" y="0"/>
+                    </a:lnTo>
+                    <a:close/>
+                  </a:path>
+                </a:pathLst>
+              </a:custGeom>
+              <a:solidFill>
+                <a:srgbClr val="0070C0"/>
+              </a:solidFill>
+              <a:ln>
+                <a:noFill/>
+              </a:ln>
+            </p:spPr>
+            <p:style>
+              <a:lnRef idx="2">
+                <a:schemeClr val="accent1">
+                  <a:shade val="50000"/>
+                </a:schemeClr>
+              </a:lnRef>
+              <a:fillRef idx="1">
+                <a:schemeClr val="accent1"/>
+              </a:fillRef>
+              <a:effectRef idx="0">
+                <a:schemeClr val="accent1"/>
+              </a:effectRef>
+              <a:fontRef idx="minor">
+                <a:schemeClr val="lt1"/>
+              </a:fontRef>
+            </p:style>
+            <p:txBody>
+              <a:bodyPr rtlCol="0" anchor="ctr"/>
+              <a:lstStyle/>
+              <a:p>
+                <a:pPr algn="ctr"/>
+                <a:endParaRPr lang="ru-RU" dirty="0"/>
+              </a:p>
+            </p:txBody>
+          </p:sp>
+        </p:grpSp>
+        <p:pic>
+          <p:nvPicPr>
+            <p:cNvPr id="6" name="Рисунок 5">
+              <a:extLst>
+                <a:ext uri="{FF2B5EF4-FFF2-40B4-BE49-F238E27FC236}">
+                  <a16:creationId xmlns:a16="http://schemas.microsoft.com/office/drawing/2014/main" id="{C13B59AF-9C15-F251-1C0C-B245D7B6AB97}"/>
+                </a:ext>
+              </a:extLst>
+            </p:cNvPr>
+            <p:cNvPicPr>
+              <a:picLocks noChangeAspect="1"/>
+            </p:cNvPicPr>
+            <p:nvPr/>
+          </p:nvPicPr>
+          <p:blipFill>
+            <a:blip r:embed="rId2" cstate="print">
+              <a:extLst>
+                <a:ext uri="{28A0092B-C50C-407E-A947-70E740481C1C}">
+                  <a14:useLocalDpi xmlns:a14="http://schemas.microsoft.com/office/drawing/2010/main" val="0"/>
+                </a:ext>
+              </a:extLst>
+            </a:blip>
+            <a:stretch>
+              <a:fillRect/>
+            </a:stretch>
+          </p:blipFill>
           <p:spPr>
             <a:xfrm>
-              <a:off x="0" y="-6103"/>
-              <a:ext cx="12191999" cy="867688"/>
+              <a:off x="7543800" y="91298"/>
+              <a:ext cx="1211316" cy="380979"/>
             </a:xfrm>
             <a:prstGeom prst="rect">
               <a:avLst/>
             </a:prstGeom>
-            <a:solidFill>
-              <a:srgbClr val="002060"/>
-            </a:solidFill>
-            <a:ln>
-              <a:noFill/>
-            </a:ln>
           </p:spPr>
-          <p:style>
-            <a:lnRef idx="2">
-              <a:schemeClr val="accent1">
-                <a:shade val="50000"/>
-              </a:schemeClr>
-            </a:lnRef>
-            <a:fillRef idx="1">
-              <a:schemeClr val="accent1"/>
-            </a:fillRef>
-            <a:effectRef idx="0">
-              <a:schemeClr val="accent1"/>
-            </a:effectRef>
-            <a:fontRef idx="minor">
-              <a:schemeClr val="lt1"/>
-            </a:fontRef>
-          </p:style>
-          <p:txBody>
-            <a:bodyPr rtlCol="0" anchor="ctr"/>
-            <a:lstStyle/>
-            <a:p>
-              <a:pPr algn="ctr"/>
-              <a:endParaRPr lang="ru-RU" dirty="0"/>
-            </a:p>
-          </p:txBody>
-        </p:sp>
-        <p:sp>
-          <p:nvSpPr>
-            <p:cNvPr id="10" name="Полилиния 9"/>
-            <p:cNvSpPr/>
-            <p:nvPr/>
-          </p:nvSpPr>
-          <p:spPr>
-            <a:xfrm>
-              <a:off x="-2931" y="-6103"/>
-              <a:ext cx="8638075" cy="867685"/>
-            </a:xfrm>
-            <a:custGeom>
-              <a:avLst/>
-              <a:gdLst>
-                <a:gd name="connsiteX0" fmla="*/ 0 w 9967865"/>
-                <a:gd name="connsiteY0" fmla="*/ 0 h 679010"/>
-                <a:gd name="connsiteX1" fmla="*/ 9967865 w 9967865"/>
-                <a:gd name="connsiteY1" fmla="*/ 0 h 679010"/>
-                <a:gd name="connsiteX2" fmla="*/ 7659232 w 9967865"/>
-                <a:gd name="connsiteY2" fmla="*/ 679010 h 679010"/>
-                <a:gd name="connsiteX3" fmla="*/ 0 w 9967865"/>
-                <a:gd name="connsiteY3" fmla="*/ 679010 h 679010"/>
-                <a:gd name="connsiteX4" fmla="*/ 0 w 9967865"/>
-                <a:gd name="connsiteY4" fmla="*/ 0 h 679010"/>
-                <a:gd name="connsiteX0" fmla="*/ 0 w 9967865"/>
-                <a:gd name="connsiteY0" fmla="*/ 0 h 686788"/>
-                <a:gd name="connsiteX1" fmla="*/ 9967865 w 9967865"/>
-                <a:gd name="connsiteY1" fmla="*/ 0 h 686788"/>
-                <a:gd name="connsiteX2" fmla="*/ 9086239 w 9967865"/>
-                <a:gd name="connsiteY2" fmla="*/ 686788 h 686788"/>
-                <a:gd name="connsiteX3" fmla="*/ 0 w 9967865"/>
-                <a:gd name="connsiteY3" fmla="*/ 679010 h 686788"/>
-                <a:gd name="connsiteX4" fmla="*/ 0 w 9967865"/>
-                <a:gd name="connsiteY4" fmla="*/ 0 h 686788"/>
-                <a:gd name="connsiteX0" fmla="*/ 0 w 9967865"/>
-                <a:gd name="connsiteY0" fmla="*/ 0 h 750734"/>
-                <a:gd name="connsiteX1" fmla="*/ 9967865 w 9967865"/>
-                <a:gd name="connsiteY1" fmla="*/ 0 h 750734"/>
-                <a:gd name="connsiteX2" fmla="*/ 9086239 w 9967865"/>
-                <a:gd name="connsiteY2" fmla="*/ 686788 h 750734"/>
-                <a:gd name="connsiteX3" fmla="*/ 422409 w 9967865"/>
-                <a:gd name="connsiteY3" fmla="*/ 750734 h 750734"/>
-                <a:gd name="connsiteX4" fmla="*/ 0 w 9967865"/>
-                <a:gd name="connsiteY4" fmla="*/ 0 h 750734"/>
-                <a:gd name="connsiteX0" fmla="*/ 0 w 9967865"/>
-                <a:gd name="connsiteY0" fmla="*/ 0 h 688791"/>
-                <a:gd name="connsiteX1" fmla="*/ 9967865 w 9967865"/>
-                <a:gd name="connsiteY1" fmla="*/ 0 h 688791"/>
-                <a:gd name="connsiteX2" fmla="*/ 9086239 w 9967865"/>
-                <a:gd name="connsiteY2" fmla="*/ 686788 h 688791"/>
-                <a:gd name="connsiteX3" fmla="*/ 4224 w 9967865"/>
-                <a:gd name="connsiteY3" fmla="*/ 688791 h 688791"/>
-                <a:gd name="connsiteX4" fmla="*/ 0 w 9967865"/>
-                <a:gd name="connsiteY4" fmla="*/ 0 h 688791"/>
-                <a:gd name="connsiteX0" fmla="*/ 0 w 9967865"/>
-                <a:gd name="connsiteY0" fmla="*/ 0 h 688791"/>
-                <a:gd name="connsiteX1" fmla="*/ 9967865 w 9967865"/>
-                <a:gd name="connsiteY1" fmla="*/ 0 h 688791"/>
-                <a:gd name="connsiteX2" fmla="*/ 9318564 w 9967865"/>
-                <a:gd name="connsiteY2" fmla="*/ 634624 h 688791"/>
-                <a:gd name="connsiteX3" fmla="*/ 4224 w 9967865"/>
-                <a:gd name="connsiteY3" fmla="*/ 688791 h 688791"/>
-                <a:gd name="connsiteX4" fmla="*/ 0 w 9967865"/>
-                <a:gd name="connsiteY4" fmla="*/ 0 h 688791"/>
-                <a:gd name="connsiteX0" fmla="*/ 0 w 9967865"/>
-                <a:gd name="connsiteY0" fmla="*/ 0 h 688791"/>
-                <a:gd name="connsiteX1" fmla="*/ 9967865 w 9967865"/>
-                <a:gd name="connsiteY1" fmla="*/ 0 h 688791"/>
-                <a:gd name="connsiteX2" fmla="*/ 9001757 w 9967865"/>
-                <a:gd name="connsiteY2" fmla="*/ 683527 h 688791"/>
-                <a:gd name="connsiteX3" fmla="*/ 4224 w 9967865"/>
-                <a:gd name="connsiteY3" fmla="*/ 688791 h 688791"/>
-                <a:gd name="connsiteX4" fmla="*/ 0 w 9967865"/>
-                <a:gd name="connsiteY4" fmla="*/ 0 h 688791"/>
-                <a:gd name="connsiteX0" fmla="*/ 0 w 9967865"/>
-                <a:gd name="connsiteY0" fmla="*/ 0 h 688791"/>
-                <a:gd name="connsiteX1" fmla="*/ 9967865 w 9967865"/>
-                <a:gd name="connsiteY1" fmla="*/ 0 h 688791"/>
-                <a:gd name="connsiteX2" fmla="*/ 8929948 w 9967865"/>
-                <a:gd name="connsiteY2" fmla="*/ 686788 h 688791"/>
-                <a:gd name="connsiteX3" fmla="*/ 4224 w 9967865"/>
-                <a:gd name="connsiteY3" fmla="*/ 688791 h 688791"/>
-                <a:gd name="connsiteX4" fmla="*/ 0 w 9967865"/>
-                <a:gd name="connsiteY4" fmla="*/ 0 h 688791"/>
-                <a:gd name="connsiteX0" fmla="*/ 0 w 9967865"/>
-                <a:gd name="connsiteY0" fmla="*/ 0 h 774813"/>
-                <a:gd name="connsiteX1" fmla="*/ 9967865 w 9967865"/>
-                <a:gd name="connsiteY1" fmla="*/ 0 h 774813"/>
-                <a:gd name="connsiteX2" fmla="*/ 9153824 w 9967865"/>
-                <a:gd name="connsiteY2" fmla="*/ 774813 h 774813"/>
-                <a:gd name="connsiteX3" fmla="*/ 4224 w 9967865"/>
-                <a:gd name="connsiteY3" fmla="*/ 688791 h 774813"/>
-                <a:gd name="connsiteX4" fmla="*/ 0 w 9967865"/>
-                <a:gd name="connsiteY4" fmla="*/ 0 h 774813"/>
-                <a:gd name="connsiteX0" fmla="*/ 0 w 9967865"/>
-                <a:gd name="connsiteY0" fmla="*/ 0 h 688791"/>
-                <a:gd name="connsiteX1" fmla="*/ 9967865 w 9967865"/>
-                <a:gd name="connsiteY1" fmla="*/ 0 h 688791"/>
-                <a:gd name="connsiteX2" fmla="*/ 8824346 w 9967865"/>
-                <a:gd name="connsiteY2" fmla="*/ 484656 h 688791"/>
-                <a:gd name="connsiteX3" fmla="*/ 4224 w 9967865"/>
-                <a:gd name="connsiteY3" fmla="*/ 688791 h 688791"/>
-                <a:gd name="connsiteX4" fmla="*/ 0 w 9967865"/>
-                <a:gd name="connsiteY4" fmla="*/ 0 h 688791"/>
-                <a:gd name="connsiteX0" fmla="*/ 0 w 9967865"/>
-                <a:gd name="connsiteY0" fmla="*/ 0 h 690048"/>
-                <a:gd name="connsiteX1" fmla="*/ 9967865 w 9967865"/>
-                <a:gd name="connsiteY1" fmla="*/ 0 h 690048"/>
-                <a:gd name="connsiteX2" fmla="*/ 8760984 w 9967865"/>
-                <a:gd name="connsiteY2" fmla="*/ 690048 h 690048"/>
-                <a:gd name="connsiteX3" fmla="*/ 4224 w 9967865"/>
-                <a:gd name="connsiteY3" fmla="*/ 688791 h 690048"/>
-                <a:gd name="connsiteX4" fmla="*/ 0 w 9967865"/>
-                <a:gd name="connsiteY4" fmla="*/ 0 h 690048"/>
-              </a:gdLst>
-              <a:ahLst/>
-              <a:cxnLst>
-                <a:cxn ang="0">
-                  <a:pos x="connsiteX0" y="connsiteY0"/>
-                </a:cxn>
-                <a:cxn ang="0">
-                  <a:pos x="connsiteX1" y="connsiteY1"/>
-                </a:cxn>
-                <a:cxn ang="0">
-                  <a:pos x="connsiteX2" y="connsiteY2"/>
-                </a:cxn>
-                <a:cxn ang="0">
-                  <a:pos x="connsiteX3" y="connsiteY3"/>
-                </a:cxn>
-                <a:cxn ang="0">
-                  <a:pos x="connsiteX4" y="connsiteY4"/>
-                </a:cxn>
-              </a:cxnLst>
-              <a:rect l="l" t="t" r="r" b="b"/>
-              <a:pathLst>
-                <a:path w="9967865" h="690048">
-                  <a:moveTo>
-                    <a:pt x="0" y="0"/>
-                  </a:moveTo>
-                  <a:lnTo>
-                    <a:pt x="9967865" y="0"/>
-                  </a:lnTo>
-                  <a:lnTo>
-                    <a:pt x="8760984" y="690048"/>
-                  </a:lnTo>
-                  <a:lnTo>
-                    <a:pt x="4224" y="688791"/>
-                  </a:lnTo>
-                  <a:lnTo>
-                    <a:pt x="0" y="0"/>
-                  </a:lnTo>
-                  <a:close/>
-                </a:path>
-              </a:pathLst>
-            </a:custGeom>
-            <a:solidFill>
-              <a:srgbClr val="0070C0"/>
-            </a:solidFill>
-            <a:ln>
-              <a:noFill/>
-            </a:ln>
-          </p:spPr>
-          <p:style>
-            <a:lnRef idx="2">
-              <a:schemeClr val="accent1">
-                <a:shade val="50000"/>
-              </a:schemeClr>
-            </a:lnRef>
-            <a:fillRef idx="1">
-              <a:schemeClr val="accent1"/>
-            </a:fillRef>
-            <a:effectRef idx="0">
-              <a:schemeClr val="accent1"/>
-            </a:effectRef>
-            <a:fontRef idx="minor">
-              <a:schemeClr val="lt1"/>
-            </a:fontRef>
-          </p:style>
-          <p:txBody>
-            <a:bodyPr rtlCol="0" anchor="ctr"/>
-            <a:lstStyle/>
-            <a:p>
-              <a:pPr algn="ctr"/>
-              <a:endParaRPr lang="ru-RU" dirty="0"/>
-            </a:p>
-          </p:txBody>
-        </p:sp>
+        </p:pic>
       </p:grpSp>
       <p:sp>
         <p:nvSpPr>
-          <p:cNvPr id="11" name="object 3"/>
+          <p:cNvPr id="9" name="TextBox 8">
+            <a:extLst>
+              <a:ext uri="{FF2B5EF4-FFF2-40B4-BE49-F238E27FC236}">
+                <a16:creationId xmlns:a16="http://schemas.microsoft.com/office/drawing/2014/main" id="{D9DEFAC1-8CF3-78E7-7275-9975631B382D}"/>
+              </a:ext>
+            </a:extLst>
+          </p:cNvPr>
           <p:cNvSpPr txBox="1"/>
           <p:nvPr/>
         </p:nvSpPr>
         <p:spPr>
           <a:xfrm>
-            <a:off x="838200" y="1524630"/>
-            <a:ext cx="7543800" cy="1754776"/>
+            <a:off x="724617" y="147583"/>
+            <a:ext cx="8229600" cy="268407"/>
+          </a:xfrm>
+          <a:prstGeom prst="rect">
+            <a:avLst/>
+          </a:prstGeom>
+          <a:noFill/>
+        </p:spPr>
+        <p:txBody>
+          <a:bodyPr wrap="square" rtlCol="0">
+            <a:spAutoFit/>
+          </a:bodyPr>
+          <a:lstStyle/>
+          <a:p>
+            <a:pPr>
+              <a:lnSpc>
+                <a:spcPct val="80000"/>
+              </a:lnSpc>
+            </a:pPr>
+            <a:r>
+              <a:rPr lang="ru-RU" sz="1400" dirty="0">
+                <a:solidFill>
+                  <a:schemeClr val="bg1"/>
+                </a:solidFill>
+                <a:latin typeface="Myriad Pro Black" panose="020B0803030403020204" pitchFamily="34" charset="0"/>
+              </a:rPr>
+              <a:t>Системотехнический анализ и проектирование</a:t>
+            </a:r>
+          </a:p>
+        </p:txBody>
+      </p:sp>
+      <p:sp>
+        <p:nvSpPr>
+          <p:cNvPr id="11" name="Заголовок 10">
+            <a:extLst>
+              <a:ext uri="{FF2B5EF4-FFF2-40B4-BE49-F238E27FC236}">
+                <a16:creationId xmlns:a16="http://schemas.microsoft.com/office/drawing/2014/main" id="{D2792699-05CD-6479-39A4-E3025575EDFA}"/>
+              </a:ext>
+            </a:extLst>
+          </p:cNvPr>
+          <p:cNvSpPr>
+            <a:spLocks noGrp="1"/>
+          </p:cNvSpPr>
+          <p:nvPr>
+            <p:ph type="ctrTitle"/>
+          </p:nvPr>
+        </p:nvSpPr>
+        <p:spPr>
+          <a:xfrm>
+            <a:off x="382920" y="819150"/>
+            <a:ext cx="8534400" cy="553998"/>
+          </a:xfrm>
+        </p:spPr>
+        <p:txBody>
+          <a:bodyPr/>
+          <a:lstStyle/>
+          <a:p>
+            <a:r>
+              <a:rPr lang="ru-RU" sz="3600" b="1" dirty="0"/>
+              <a:t>Обобщённый алгоритм работы</a:t>
+            </a:r>
+          </a:p>
+        </p:txBody>
+      </p:sp>
+      <p:pic>
+        <p:nvPicPr>
+          <p:cNvPr id="15" name="Рисунок 14">
+            <a:extLst>
+              <a:ext uri="{FF2B5EF4-FFF2-40B4-BE49-F238E27FC236}">
+                <a16:creationId xmlns:a16="http://schemas.microsoft.com/office/drawing/2014/main" id="{FFFAA3F1-0FB4-75D0-A8A9-13CFDABE2D2E}"/>
+              </a:ext>
+            </a:extLst>
+          </p:cNvPr>
+          <p:cNvPicPr>
+            <a:picLocks noChangeAspect="1"/>
+          </p:cNvPicPr>
+          <p:nvPr/>
+        </p:nvPicPr>
+        <p:blipFill>
+          <a:blip r:embed="rId3"/>
+          <a:stretch>
+            <a:fillRect/>
+          </a:stretch>
+        </p:blipFill>
+        <p:spPr>
+          <a:xfrm>
+            <a:off x="1524000" y="1504950"/>
+            <a:ext cx="6486525" cy="3115519"/>
           </a:xfrm>
           <a:prstGeom prst="rect">
             <a:avLst/>
           </a:prstGeom>
         </p:spPr>
-        <p:txBody>
-          <a:bodyPr vert="horz" wrap="square" lIns="0" tIns="419100" rIns="0" bIns="0" rtlCol="0" anchor="ctr" anchorCtr="0">
-            <a:spAutoFit/>
-          </a:bodyPr>
-          <a:lstStyle/>
-          <a:p>
-            <a:pPr marR="5080">
-              <a:lnSpc>
-                <a:spcPct val="70000"/>
-              </a:lnSpc>
-            </a:pPr>
-            <a:r>
-              <a:rPr lang="ru-RU" sz="6000" dirty="0" smtClean="0">
-                <a:solidFill>
-                  <a:schemeClr val="bg1"/>
-                </a:solidFill>
-                <a:latin typeface="Myriad Pro Black" panose="020B0803030403020204" pitchFamily="34" charset="0"/>
-                <a:cs typeface="Calibri"/>
-              </a:rPr>
-              <a:t>СПАСИБО</a:t>
-            </a:r>
-            <a:br>
-              <a:rPr lang="ru-RU" sz="6000" dirty="0" smtClean="0">
-                <a:solidFill>
-                  <a:schemeClr val="bg1"/>
-                </a:solidFill>
-                <a:latin typeface="Myriad Pro Black" panose="020B0803030403020204" pitchFamily="34" charset="0"/>
-                <a:cs typeface="Calibri"/>
-              </a:rPr>
-            </a:br>
-            <a:r>
-              <a:rPr lang="ru-RU" sz="6000" dirty="0" smtClean="0">
-                <a:solidFill>
-                  <a:schemeClr val="bg1"/>
-                </a:solidFill>
-                <a:latin typeface="Myriad Pro Black" panose="020B0803030403020204" pitchFamily="34" charset="0"/>
-                <a:cs typeface="Calibri"/>
-              </a:rPr>
-              <a:t>ЗА ВНИМАНИЕ!</a:t>
-            </a:r>
-          </a:p>
-        </p:txBody>
-      </p:sp>
+      </p:pic>
     </p:spTree>
     <p:extLst>
       <p:ext uri="{BB962C8B-B14F-4D97-AF65-F5344CB8AC3E}">
-        <p14:creationId xmlns:p14="http://schemas.microsoft.com/office/powerpoint/2010/main" val="3733878091"/>
+        <p14:creationId xmlns:p14="http://schemas.microsoft.com/office/powerpoint/2010/main" val="3273070316"/>
       </p:ext>
     </p:extLst>
   </p:cSld>
   <p:clrMapOvr>
     <a:masterClrMapping/>
   </p:clrMapOvr>
-  <p:timing>
-    <p:tnLst>
-      <p:par>
-        <p:cTn id="1" dur="indefinite" restart="never" nodeType="tmRoot"/>
-      </p:par>
-    </p:tnLst>
-  </p:timing>
+</p:sld>
+</file>
+
+<file path=ppt/slides/slide9.xml><?xml version="1.0" encoding="utf-8"?>
+<p:sld xmlns:a="http://schemas.openxmlformats.org/drawingml/2006/main" xmlns:r="http://schemas.openxmlformats.org/officeDocument/2006/relationships" xmlns:p="http://schemas.openxmlformats.org/presentationml/2006/main">
+  <p:cSld>
+    <p:spTree>
+      <p:nvGrpSpPr>
+        <p:cNvPr id="1" name=""/>
+        <p:cNvGrpSpPr/>
+        <p:nvPr/>
+      </p:nvGrpSpPr>
+      <p:grpSpPr>
+        <a:xfrm>
+          <a:off x="0" y="0"/>
+          <a:ext cx="0" cy="0"/>
+          <a:chOff x="0" y="0"/>
+          <a:chExt cx="0" cy="0"/>
+        </a:xfrm>
+      </p:grpSpPr>
+      <p:sp>
+        <p:nvSpPr>
+          <p:cNvPr id="2" name="Заголовок 1">
+            <a:extLst>
+              <a:ext uri="{FF2B5EF4-FFF2-40B4-BE49-F238E27FC236}">
+                <a16:creationId xmlns:a16="http://schemas.microsoft.com/office/drawing/2014/main" id="{F8F4CC6D-2A91-03D6-CEC7-C60694B19630}"/>
+              </a:ext>
+            </a:extLst>
+          </p:cNvPr>
+          <p:cNvSpPr>
+            <a:spLocks noGrp="1"/>
+          </p:cNvSpPr>
+          <p:nvPr>
+            <p:ph type="title"/>
+          </p:nvPr>
+        </p:nvSpPr>
+        <p:spPr>
+          <a:xfrm>
+            <a:off x="533400" y="648068"/>
+            <a:ext cx="6252600" cy="569387"/>
+          </a:xfrm>
+        </p:spPr>
+        <p:txBody>
+          <a:bodyPr/>
+          <a:lstStyle/>
+          <a:p>
+            <a:r>
+              <a:rPr lang="ru-RU" dirty="0"/>
+              <a:t>Архитектура системы</a:t>
+            </a:r>
+          </a:p>
+        </p:txBody>
+      </p:sp>
+      <p:sp>
+        <p:nvSpPr>
+          <p:cNvPr id="3" name="Текст 2">
+            <a:extLst>
+              <a:ext uri="{FF2B5EF4-FFF2-40B4-BE49-F238E27FC236}">
+                <a16:creationId xmlns:a16="http://schemas.microsoft.com/office/drawing/2014/main" id="{0AAA3DCA-BC45-0F6A-F934-D00979FCA7FB}"/>
+              </a:ext>
+            </a:extLst>
+          </p:cNvPr>
+          <p:cNvSpPr>
+            <a:spLocks noGrp="1"/>
+          </p:cNvSpPr>
+          <p:nvPr>
+            <p:ph type="body" idx="1"/>
+          </p:nvPr>
+        </p:nvSpPr>
+        <p:spPr>
+          <a:xfrm>
+            <a:off x="533400" y="1428750"/>
+            <a:ext cx="5868243" cy="3323987"/>
+          </a:xfrm>
+        </p:spPr>
+        <p:txBody>
+          <a:bodyPr/>
+          <a:lstStyle/>
+          <a:p>
+            <a:pPr lvl="0"/>
+            <a:r>
+              <a:rPr lang="ru-RU" sz="1800" dirty="0"/>
+              <a:t>1) Представление: </a:t>
+            </a:r>
+            <a:r>
+              <a:rPr lang="ru-RU" sz="1800" b="0" dirty="0"/>
+              <a:t>интерфейс пользователя. Отображение экранных форм и информации. Отрисовка диаграммы;</a:t>
+            </a:r>
+          </a:p>
+          <a:p>
+            <a:pPr lvl="0"/>
+            <a:endParaRPr lang="ru-RU" sz="1800" dirty="0"/>
+          </a:p>
+          <a:p>
+            <a:pPr lvl="0"/>
+            <a:r>
+              <a:rPr lang="ru-RU" sz="1800" dirty="0"/>
+              <a:t>2) Логика</a:t>
+            </a:r>
+            <a:r>
+              <a:rPr lang="ru-RU" sz="1800" b="0" dirty="0"/>
+              <a:t>: управление жизненным циклом программы, связь между слоями. Работа со структурами входных и выходных данных, а также математическими объектами </a:t>
+            </a:r>
+            <a:r>
+              <a:rPr lang="en-US" sz="1800" b="0" dirty="0"/>
+              <a:t>API</a:t>
+            </a:r>
+            <a:r>
+              <a:rPr lang="ru-RU" sz="1800" b="0" dirty="0"/>
+              <a:t>;</a:t>
+            </a:r>
+          </a:p>
+          <a:p>
+            <a:pPr lvl="0"/>
+            <a:endParaRPr lang="ru-RU" sz="1800" dirty="0"/>
+          </a:p>
+          <a:p>
+            <a:pPr lvl="0"/>
+            <a:r>
+              <a:rPr lang="ru-RU" sz="1800" dirty="0"/>
+              <a:t>3) Данные: </a:t>
+            </a:r>
+            <a:r>
+              <a:rPr lang="ru-RU" sz="1800" b="0" dirty="0"/>
+              <a:t>вычислительный модуль, основан на CPLEX. Принимает объект модели и выполняет математические расчёты. Возвращает результаты оптимизации.</a:t>
+            </a:r>
+          </a:p>
+          <a:p>
+            <a:endParaRPr lang="ru-RU" sz="1800" b="0" dirty="0">
+              <a:latin typeface="Myriad Pro" panose="020B0503030403020204" charset="0"/>
+            </a:endParaRPr>
+          </a:p>
+        </p:txBody>
+      </p:sp>
+      <p:pic>
+        <p:nvPicPr>
+          <p:cNvPr id="5" name="Рисунок 4">
+            <a:extLst>
+              <a:ext uri="{FF2B5EF4-FFF2-40B4-BE49-F238E27FC236}">
+                <a16:creationId xmlns:a16="http://schemas.microsoft.com/office/drawing/2014/main" id="{4261E5DE-7564-D5E4-4432-9F906ADC5D01}"/>
+              </a:ext>
+            </a:extLst>
+          </p:cNvPr>
+          <p:cNvPicPr>
+            <a:picLocks noChangeAspect="1"/>
+          </p:cNvPicPr>
+          <p:nvPr/>
+        </p:nvPicPr>
+        <p:blipFill>
+          <a:blip r:embed="rId2"/>
+          <a:stretch>
+            <a:fillRect/>
+          </a:stretch>
+        </p:blipFill>
+        <p:spPr>
+          <a:xfrm>
+            <a:off x="6658382" y="968535"/>
+            <a:ext cx="2105461" cy="3206429"/>
+          </a:xfrm>
+          <a:prstGeom prst="rect">
+            <a:avLst/>
+          </a:prstGeom>
+        </p:spPr>
+      </p:pic>
+      <p:grpSp>
+        <p:nvGrpSpPr>
+          <p:cNvPr id="6" name="Группа 5">
+            <a:extLst>
+              <a:ext uri="{FF2B5EF4-FFF2-40B4-BE49-F238E27FC236}">
+                <a16:creationId xmlns:a16="http://schemas.microsoft.com/office/drawing/2014/main" id="{4A347707-3D10-5F1F-D96F-A2FCBEF79DC4}"/>
+              </a:ext>
+            </a:extLst>
+          </p:cNvPr>
+          <p:cNvGrpSpPr/>
+          <p:nvPr/>
+        </p:nvGrpSpPr>
+        <p:grpSpPr>
+          <a:xfrm>
+            <a:off x="0" y="-5563"/>
+            <a:ext cx="9144000" cy="574705"/>
+            <a:chOff x="0" y="-5563"/>
+            <a:chExt cx="9144000" cy="574705"/>
+          </a:xfrm>
+        </p:grpSpPr>
+        <p:grpSp>
+          <p:nvGrpSpPr>
+            <p:cNvPr id="7" name="Группа 6">
+              <a:extLst>
+                <a:ext uri="{FF2B5EF4-FFF2-40B4-BE49-F238E27FC236}">
+                  <a16:creationId xmlns:a16="http://schemas.microsoft.com/office/drawing/2014/main" id="{F1EF1BCD-2F4F-54F9-F180-AC8A6CC2204E}"/>
+                </a:ext>
+              </a:extLst>
+            </p:cNvPr>
+            <p:cNvGrpSpPr/>
+            <p:nvPr/>
+          </p:nvGrpSpPr>
+          <p:grpSpPr>
+            <a:xfrm>
+              <a:off x="0" y="-5563"/>
+              <a:ext cx="9144000" cy="574705"/>
+              <a:chOff x="-2931" y="-6103"/>
+              <a:chExt cx="12194930" cy="867688"/>
+            </a:xfrm>
+          </p:grpSpPr>
+          <p:sp>
+            <p:nvSpPr>
+              <p:cNvPr id="9" name="Прямоугольник 8">
+                <a:extLst>
+                  <a:ext uri="{FF2B5EF4-FFF2-40B4-BE49-F238E27FC236}">
+                    <a16:creationId xmlns:a16="http://schemas.microsoft.com/office/drawing/2014/main" id="{B0567BB9-EAB2-0FC8-1195-A484F13FB27F}"/>
+                  </a:ext>
+                </a:extLst>
+              </p:cNvPr>
+              <p:cNvSpPr/>
+              <p:nvPr/>
+            </p:nvSpPr>
+            <p:spPr>
+              <a:xfrm>
+                <a:off x="0" y="-6103"/>
+                <a:ext cx="12191999" cy="867688"/>
+              </a:xfrm>
+              <a:prstGeom prst="rect">
+                <a:avLst/>
+              </a:prstGeom>
+              <a:solidFill>
+                <a:srgbClr val="002060"/>
+              </a:solidFill>
+              <a:ln>
+                <a:noFill/>
+              </a:ln>
+            </p:spPr>
+            <p:style>
+              <a:lnRef idx="2">
+                <a:schemeClr val="accent1">
+                  <a:shade val="50000"/>
+                </a:schemeClr>
+              </a:lnRef>
+              <a:fillRef idx="1">
+                <a:schemeClr val="accent1"/>
+              </a:fillRef>
+              <a:effectRef idx="0">
+                <a:schemeClr val="accent1"/>
+              </a:effectRef>
+              <a:fontRef idx="minor">
+                <a:schemeClr val="lt1"/>
+              </a:fontRef>
+            </p:style>
+            <p:txBody>
+              <a:bodyPr rtlCol="0" anchor="ctr"/>
+              <a:lstStyle/>
+              <a:p>
+                <a:pPr algn="ctr"/>
+                <a:endParaRPr lang="ru-RU" dirty="0"/>
+              </a:p>
+            </p:txBody>
+          </p:sp>
+          <p:sp>
+            <p:nvSpPr>
+              <p:cNvPr id="10" name="Полилиния 13">
+                <a:extLst>
+                  <a:ext uri="{FF2B5EF4-FFF2-40B4-BE49-F238E27FC236}">
+                    <a16:creationId xmlns:a16="http://schemas.microsoft.com/office/drawing/2014/main" id="{38ED77F5-5116-B7A3-AE59-2621488CADFF}"/>
+                  </a:ext>
+                </a:extLst>
+              </p:cNvPr>
+              <p:cNvSpPr/>
+              <p:nvPr/>
+            </p:nvSpPr>
+            <p:spPr>
+              <a:xfrm>
+                <a:off x="-2931" y="-6103"/>
+                <a:ext cx="8638075" cy="867685"/>
+              </a:xfrm>
+              <a:custGeom>
+                <a:avLst/>
+                <a:gdLst>
+                  <a:gd name="connsiteX0" fmla="*/ 0 w 9967865"/>
+                  <a:gd name="connsiteY0" fmla="*/ 0 h 679010"/>
+                  <a:gd name="connsiteX1" fmla="*/ 9967865 w 9967865"/>
+                  <a:gd name="connsiteY1" fmla="*/ 0 h 679010"/>
+                  <a:gd name="connsiteX2" fmla="*/ 7659232 w 9967865"/>
+                  <a:gd name="connsiteY2" fmla="*/ 679010 h 679010"/>
+                  <a:gd name="connsiteX3" fmla="*/ 0 w 9967865"/>
+                  <a:gd name="connsiteY3" fmla="*/ 679010 h 679010"/>
+                  <a:gd name="connsiteX4" fmla="*/ 0 w 9967865"/>
+                  <a:gd name="connsiteY4" fmla="*/ 0 h 679010"/>
+                  <a:gd name="connsiteX0" fmla="*/ 0 w 9967865"/>
+                  <a:gd name="connsiteY0" fmla="*/ 0 h 686788"/>
+                  <a:gd name="connsiteX1" fmla="*/ 9967865 w 9967865"/>
+                  <a:gd name="connsiteY1" fmla="*/ 0 h 686788"/>
+                  <a:gd name="connsiteX2" fmla="*/ 9086239 w 9967865"/>
+                  <a:gd name="connsiteY2" fmla="*/ 686788 h 686788"/>
+                  <a:gd name="connsiteX3" fmla="*/ 0 w 9967865"/>
+                  <a:gd name="connsiteY3" fmla="*/ 679010 h 686788"/>
+                  <a:gd name="connsiteX4" fmla="*/ 0 w 9967865"/>
+                  <a:gd name="connsiteY4" fmla="*/ 0 h 686788"/>
+                  <a:gd name="connsiteX0" fmla="*/ 0 w 9967865"/>
+                  <a:gd name="connsiteY0" fmla="*/ 0 h 750734"/>
+                  <a:gd name="connsiteX1" fmla="*/ 9967865 w 9967865"/>
+                  <a:gd name="connsiteY1" fmla="*/ 0 h 750734"/>
+                  <a:gd name="connsiteX2" fmla="*/ 9086239 w 9967865"/>
+                  <a:gd name="connsiteY2" fmla="*/ 686788 h 750734"/>
+                  <a:gd name="connsiteX3" fmla="*/ 422409 w 9967865"/>
+                  <a:gd name="connsiteY3" fmla="*/ 750734 h 750734"/>
+                  <a:gd name="connsiteX4" fmla="*/ 0 w 9967865"/>
+                  <a:gd name="connsiteY4" fmla="*/ 0 h 750734"/>
+                  <a:gd name="connsiteX0" fmla="*/ 0 w 9967865"/>
+                  <a:gd name="connsiteY0" fmla="*/ 0 h 688791"/>
+                  <a:gd name="connsiteX1" fmla="*/ 9967865 w 9967865"/>
+                  <a:gd name="connsiteY1" fmla="*/ 0 h 688791"/>
+                  <a:gd name="connsiteX2" fmla="*/ 9086239 w 9967865"/>
+                  <a:gd name="connsiteY2" fmla="*/ 686788 h 688791"/>
+                  <a:gd name="connsiteX3" fmla="*/ 4224 w 9967865"/>
+                  <a:gd name="connsiteY3" fmla="*/ 688791 h 688791"/>
+                  <a:gd name="connsiteX4" fmla="*/ 0 w 9967865"/>
+                  <a:gd name="connsiteY4" fmla="*/ 0 h 688791"/>
+                  <a:gd name="connsiteX0" fmla="*/ 0 w 9967865"/>
+                  <a:gd name="connsiteY0" fmla="*/ 0 h 688791"/>
+                  <a:gd name="connsiteX1" fmla="*/ 9967865 w 9967865"/>
+                  <a:gd name="connsiteY1" fmla="*/ 0 h 688791"/>
+                  <a:gd name="connsiteX2" fmla="*/ 9318564 w 9967865"/>
+                  <a:gd name="connsiteY2" fmla="*/ 634624 h 688791"/>
+                  <a:gd name="connsiteX3" fmla="*/ 4224 w 9967865"/>
+                  <a:gd name="connsiteY3" fmla="*/ 688791 h 688791"/>
+                  <a:gd name="connsiteX4" fmla="*/ 0 w 9967865"/>
+                  <a:gd name="connsiteY4" fmla="*/ 0 h 688791"/>
+                  <a:gd name="connsiteX0" fmla="*/ 0 w 9967865"/>
+                  <a:gd name="connsiteY0" fmla="*/ 0 h 688791"/>
+                  <a:gd name="connsiteX1" fmla="*/ 9967865 w 9967865"/>
+                  <a:gd name="connsiteY1" fmla="*/ 0 h 688791"/>
+                  <a:gd name="connsiteX2" fmla="*/ 9001757 w 9967865"/>
+                  <a:gd name="connsiteY2" fmla="*/ 683527 h 688791"/>
+                  <a:gd name="connsiteX3" fmla="*/ 4224 w 9967865"/>
+                  <a:gd name="connsiteY3" fmla="*/ 688791 h 688791"/>
+                  <a:gd name="connsiteX4" fmla="*/ 0 w 9967865"/>
+                  <a:gd name="connsiteY4" fmla="*/ 0 h 688791"/>
+                  <a:gd name="connsiteX0" fmla="*/ 0 w 9967865"/>
+                  <a:gd name="connsiteY0" fmla="*/ 0 h 688791"/>
+                  <a:gd name="connsiteX1" fmla="*/ 9967865 w 9967865"/>
+                  <a:gd name="connsiteY1" fmla="*/ 0 h 688791"/>
+                  <a:gd name="connsiteX2" fmla="*/ 8929948 w 9967865"/>
+                  <a:gd name="connsiteY2" fmla="*/ 686788 h 688791"/>
+                  <a:gd name="connsiteX3" fmla="*/ 4224 w 9967865"/>
+                  <a:gd name="connsiteY3" fmla="*/ 688791 h 688791"/>
+                  <a:gd name="connsiteX4" fmla="*/ 0 w 9967865"/>
+                  <a:gd name="connsiteY4" fmla="*/ 0 h 688791"/>
+                  <a:gd name="connsiteX0" fmla="*/ 0 w 9967865"/>
+                  <a:gd name="connsiteY0" fmla="*/ 0 h 774813"/>
+                  <a:gd name="connsiteX1" fmla="*/ 9967865 w 9967865"/>
+                  <a:gd name="connsiteY1" fmla="*/ 0 h 774813"/>
+                  <a:gd name="connsiteX2" fmla="*/ 9153824 w 9967865"/>
+                  <a:gd name="connsiteY2" fmla="*/ 774813 h 774813"/>
+                  <a:gd name="connsiteX3" fmla="*/ 4224 w 9967865"/>
+                  <a:gd name="connsiteY3" fmla="*/ 688791 h 774813"/>
+                  <a:gd name="connsiteX4" fmla="*/ 0 w 9967865"/>
+                  <a:gd name="connsiteY4" fmla="*/ 0 h 774813"/>
+                  <a:gd name="connsiteX0" fmla="*/ 0 w 9967865"/>
+                  <a:gd name="connsiteY0" fmla="*/ 0 h 688791"/>
+                  <a:gd name="connsiteX1" fmla="*/ 9967865 w 9967865"/>
+                  <a:gd name="connsiteY1" fmla="*/ 0 h 688791"/>
+                  <a:gd name="connsiteX2" fmla="*/ 8824346 w 9967865"/>
+                  <a:gd name="connsiteY2" fmla="*/ 484656 h 688791"/>
+                  <a:gd name="connsiteX3" fmla="*/ 4224 w 9967865"/>
+                  <a:gd name="connsiteY3" fmla="*/ 688791 h 688791"/>
+                  <a:gd name="connsiteX4" fmla="*/ 0 w 9967865"/>
+                  <a:gd name="connsiteY4" fmla="*/ 0 h 688791"/>
+                  <a:gd name="connsiteX0" fmla="*/ 0 w 9967865"/>
+                  <a:gd name="connsiteY0" fmla="*/ 0 h 690048"/>
+                  <a:gd name="connsiteX1" fmla="*/ 9967865 w 9967865"/>
+                  <a:gd name="connsiteY1" fmla="*/ 0 h 690048"/>
+                  <a:gd name="connsiteX2" fmla="*/ 8760984 w 9967865"/>
+                  <a:gd name="connsiteY2" fmla="*/ 690048 h 690048"/>
+                  <a:gd name="connsiteX3" fmla="*/ 4224 w 9967865"/>
+                  <a:gd name="connsiteY3" fmla="*/ 688791 h 690048"/>
+                  <a:gd name="connsiteX4" fmla="*/ 0 w 9967865"/>
+                  <a:gd name="connsiteY4" fmla="*/ 0 h 690048"/>
+                </a:gdLst>
+                <a:ahLst/>
+                <a:cxnLst>
+                  <a:cxn ang="0">
+                    <a:pos x="connsiteX0" y="connsiteY0"/>
+                  </a:cxn>
+                  <a:cxn ang="0">
+                    <a:pos x="connsiteX1" y="connsiteY1"/>
+                  </a:cxn>
+                  <a:cxn ang="0">
+                    <a:pos x="connsiteX2" y="connsiteY2"/>
+                  </a:cxn>
+                  <a:cxn ang="0">
+                    <a:pos x="connsiteX3" y="connsiteY3"/>
+                  </a:cxn>
+                  <a:cxn ang="0">
+                    <a:pos x="connsiteX4" y="connsiteY4"/>
+                  </a:cxn>
+                </a:cxnLst>
+                <a:rect l="l" t="t" r="r" b="b"/>
+                <a:pathLst>
+                  <a:path w="9967865" h="690048">
+                    <a:moveTo>
+                      <a:pt x="0" y="0"/>
+                    </a:moveTo>
+                    <a:lnTo>
+                      <a:pt x="9967865" y="0"/>
+                    </a:lnTo>
+                    <a:lnTo>
+                      <a:pt x="8760984" y="690048"/>
+                    </a:lnTo>
+                    <a:lnTo>
+                      <a:pt x="4224" y="688791"/>
+                    </a:lnTo>
+                    <a:lnTo>
+                      <a:pt x="0" y="0"/>
+                    </a:lnTo>
+                    <a:close/>
+                  </a:path>
+                </a:pathLst>
+              </a:custGeom>
+              <a:solidFill>
+                <a:srgbClr val="0070C0"/>
+              </a:solidFill>
+              <a:ln>
+                <a:noFill/>
+              </a:ln>
+            </p:spPr>
+            <p:style>
+              <a:lnRef idx="2">
+                <a:schemeClr val="accent1">
+                  <a:shade val="50000"/>
+                </a:schemeClr>
+              </a:lnRef>
+              <a:fillRef idx="1">
+                <a:schemeClr val="accent1"/>
+              </a:fillRef>
+              <a:effectRef idx="0">
+                <a:schemeClr val="accent1"/>
+              </a:effectRef>
+              <a:fontRef idx="minor">
+                <a:schemeClr val="lt1"/>
+              </a:fontRef>
+            </p:style>
+            <p:txBody>
+              <a:bodyPr rtlCol="0" anchor="ctr"/>
+              <a:lstStyle/>
+              <a:p>
+                <a:pPr algn="ctr"/>
+                <a:endParaRPr lang="ru-RU" dirty="0"/>
+              </a:p>
+            </p:txBody>
+          </p:sp>
+        </p:grpSp>
+        <p:pic>
+          <p:nvPicPr>
+            <p:cNvPr id="8" name="Рисунок 7">
+              <a:extLst>
+                <a:ext uri="{FF2B5EF4-FFF2-40B4-BE49-F238E27FC236}">
+                  <a16:creationId xmlns:a16="http://schemas.microsoft.com/office/drawing/2014/main" id="{578D5C0F-F9FB-0642-2795-8B69D1BA8ED4}"/>
+                </a:ext>
+              </a:extLst>
+            </p:cNvPr>
+            <p:cNvPicPr>
+              <a:picLocks noChangeAspect="1"/>
+            </p:cNvPicPr>
+            <p:nvPr/>
+          </p:nvPicPr>
+          <p:blipFill>
+            <a:blip r:embed="rId3" cstate="print">
+              <a:extLst>
+                <a:ext uri="{28A0092B-C50C-407E-A947-70E740481C1C}">
+                  <a14:useLocalDpi xmlns:a14="http://schemas.microsoft.com/office/drawing/2010/main" val="0"/>
+                </a:ext>
+              </a:extLst>
+            </a:blip>
+            <a:stretch>
+              <a:fillRect/>
+            </a:stretch>
+          </p:blipFill>
+          <p:spPr>
+            <a:xfrm>
+              <a:off x="7543800" y="91298"/>
+              <a:ext cx="1211316" cy="380979"/>
+            </a:xfrm>
+            <a:prstGeom prst="rect">
+              <a:avLst/>
+            </a:prstGeom>
+          </p:spPr>
+        </p:pic>
+      </p:grpSp>
+      <p:sp>
+        <p:nvSpPr>
+          <p:cNvPr id="11" name="TextBox 10">
+            <a:extLst>
+              <a:ext uri="{FF2B5EF4-FFF2-40B4-BE49-F238E27FC236}">
+                <a16:creationId xmlns:a16="http://schemas.microsoft.com/office/drawing/2014/main" id="{BF8B4ED8-0826-7FAF-8038-8FEA45398A51}"/>
+              </a:ext>
+            </a:extLst>
+          </p:cNvPr>
+          <p:cNvSpPr txBox="1"/>
+          <p:nvPr/>
+        </p:nvSpPr>
+        <p:spPr>
+          <a:xfrm>
+            <a:off x="724617" y="147583"/>
+            <a:ext cx="8229600" cy="268407"/>
+          </a:xfrm>
+          <a:prstGeom prst="rect">
+            <a:avLst/>
+          </a:prstGeom>
+          <a:noFill/>
+        </p:spPr>
+        <p:txBody>
+          <a:bodyPr wrap="square" rtlCol="0">
+            <a:spAutoFit/>
+          </a:bodyPr>
+          <a:lstStyle/>
+          <a:p>
+            <a:pPr>
+              <a:lnSpc>
+                <a:spcPct val="80000"/>
+              </a:lnSpc>
+            </a:pPr>
+            <a:r>
+              <a:rPr lang="ru-RU" sz="1400" dirty="0">
+                <a:solidFill>
+                  <a:schemeClr val="bg1"/>
+                </a:solidFill>
+                <a:latin typeface="Myriad Pro Black" panose="020B0803030403020204" pitchFamily="34" charset="0"/>
+              </a:rPr>
+              <a:t>Системотехнический анализ и проектирование</a:t>
+            </a:r>
+          </a:p>
+        </p:txBody>
+      </p:sp>
+    </p:spTree>
+    <p:extLst>
+      <p:ext uri="{BB962C8B-B14F-4D97-AF65-F5344CB8AC3E}">
+        <p14:creationId xmlns:p14="http://schemas.microsoft.com/office/powerpoint/2010/main" val="1317744477"/>
+      </p:ext>
+    </p:extLst>
+  </p:cSld>
+  <p:clrMapOvr>
+    <a:masterClrMapping/>
+  </p:clrMapOvr>
 </p:sld>
 </file>
 

--- a/8 семестр/ПпЦП/Итоговая презентация.pptx
+++ b/8 семестр/ПпЦП/Итоговая презентация.pptx
@@ -5,7 +5,7 @@
     <p:sldMasterId id="2147483648" r:id="rId1"/>
   </p:sldMasterIdLst>
   <p:notesMasterIdLst>
-    <p:notesMasterId r:id="rId13"/>
+    <p:notesMasterId r:id="rId18"/>
   </p:notesMasterIdLst>
   <p:sldIdLst>
     <p:sldId id="256" r:id="rId2"/>
@@ -16,30 +16,39 @@
     <p:sldId id="382" r:id="rId7"/>
     <p:sldId id="383" r:id="rId8"/>
     <p:sldId id="384" r:id="rId9"/>
-    <p:sldId id="385" r:id="rId10"/>
-    <p:sldId id="386" r:id="rId11"/>
-    <p:sldId id="378" r:id="rId12"/>
+    <p:sldId id="387" r:id="rId10"/>
+    <p:sldId id="385" r:id="rId11"/>
+    <p:sldId id="386" r:id="rId12"/>
+    <p:sldId id="388" r:id="rId13"/>
+    <p:sldId id="391" r:id="rId14"/>
+    <p:sldId id="389" r:id="rId15"/>
+    <p:sldId id="390" r:id="rId16"/>
+    <p:sldId id="378" r:id="rId17"/>
   </p:sldIdLst>
   <p:sldSz cx="9144000" cy="5143500" type="screen16x9"/>
   <p:notesSz cx="9144000" cy="5143500"/>
   <p:embeddedFontLst>
     <p:embeddedFont>
+      <p:font typeface="Cambria Math" panose="02040503050406030204" pitchFamily="18" charset="0"/>
+      <p:regular r:id="rId19"/>
+    </p:embeddedFont>
+    <p:embeddedFont>
       <p:font typeface="Century Gothic" panose="020B0502020202020204" pitchFamily="34" charset="0"/>
-      <p:regular r:id="rId14"/>
-      <p:bold r:id="rId15"/>
-      <p:italic r:id="rId16"/>
-      <p:boldItalic r:id="rId17"/>
+      <p:regular r:id="rId20"/>
+      <p:bold r:id="rId21"/>
+      <p:italic r:id="rId22"/>
+      <p:boldItalic r:id="rId23"/>
     </p:embeddedFont>
     <p:embeddedFont>
       <p:font typeface="Myriad Pro" panose="020B0503030403020204" charset="0"/>
-      <p:regular r:id="rId18"/>
-      <p:bold r:id="rId19"/>
-      <p:italic r:id="rId20"/>
-      <p:boldItalic r:id="rId21"/>
+      <p:regular r:id="rId24"/>
+      <p:bold r:id="rId25"/>
+      <p:italic r:id="rId26"/>
+      <p:boldItalic r:id="rId27"/>
     </p:embeddedFont>
     <p:embeddedFont>
       <p:font typeface="Myriad Pro Black" panose="020B0803030403020204" charset="0"/>
-      <p:bold r:id="rId22"/>
+      <p:bold r:id="rId28"/>
     </p:embeddedFont>
   </p:embeddedFontLst>
   <p:defaultTextStyle>
@@ -238,7 +247,7 @@
           <a:p>
             <a:fld id="{8F540C1F-0032-431C-8FAB-96526BBF0541}" type="datetimeFigureOut">
               <a:rPr lang="ru-RU" smtClean="0"/>
-              <a:t>01.06.2026</a:t>
+              <a:t>04.06.2026</a:t>
             </a:fld>
             <a:endParaRPr lang="ru-RU"/>
           </a:p>
@@ -654,7 +663,7 @@
           <a:p>
             <a:fld id="{1D8BD707-D9CF-40AE-B4C6-C98DA3205C09}" type="datetimeFigureOut">
               <a:rPr lang="en-US"/>
-              <a:t>6/1/2026</a:t>
+              <a:t>6/4/2026</a:t>
             </a:fld>
             <a:endParaRPr lang="en-US"/>
           </a:p>
@@ -831,7 +840,7 @@
           <a:p>
             <a:fld id="{1D8BD707-D9CF-40AE-B4C6-C98DA3205C09}" type="datetimeFigureOut">
               <a:rPr lang="en-US"/>
-              <a:t>6/1/2026</a:t>
+              <a:t>6/4/2026</a:t>
             </a:fld>
             <a:endParaRPr lang="en-US"/>
           </a:p>
@@ -1057,7 +1066,7 @@
           <a:p>
             <a:fld id="{1D8BD707-D9CF-40AE-B4C6-C98DA3205C09}" type="datetimeFigureOut">
               <a:rPr lang="en-US"/>
-              <a:t>6/1/2026</a:t>
+              <a:t>6/4/2026</a:t>
             </a:fld>
             <a:endParaRPr lang="en-US"/>
           </a:p>
@@ -1205,7 +1214,7 @@
           <a:p>
             <a:fld id="{1D8BD707-D9CF-40AE-B4C6-C98DA3205C09}" type="datetimeFigureOut">
               <a:rPr lang="en-US"/>
-              <a:t>6/1/2026</a:t>
+              <a:t>6/4/2026</a:t>
             </a:fld>
             <a:endParaRPr lang="en-US"/>
           </a:p>
@@ -1324,7 +1333,7 @@
           <a:p>
             <a:fld id="{1D8BD707-D9CF-40AE-B4C6-C98DA3205C09}" type="datetimeFigureOut">
               <a:rPr lang="en-US"/>
-              <a:t>6/1/2026</a:t>
+              <a:t>6/4/2026</a:t>
             </a:fld>
             <a:endParaRPr lang="en-US"/>
           </a:p>
@@ -1546,7 +1555,7 @@
           <a:p>
             <a:fld id="{1D8BD707-D9CF-40AE-B4C6-C98DA3205C09}" type="datetimeFigureOut">
               <a:rPr lang="en-US"/>
-              <a:t>6/1/2026</a:t>
+              <a:t>6/4/2026</a:t>
             </a:fld>
             <a:endParaRPr lang="en-US"/>
           </a:p>
@@ -2044,6 +2053,570 @@
           <a:chExt cx="0" cy="0"/>
         </a:xfrm>
       </p:grpSpPr>
+      <p:sp>
+        <p:nvSpPr>
+          <p:cNvPr id="2" name="Заголовок 1">
+            <a:extLst>
+              <a:ext uri="{FF2B5EF4-FFF2-40B4-BE49-F238E27FC236}">
+                <a16:creationId xmlns:a16="http://schemas.microsoft.com/office/drawing/2014/main" id="{F8F4CC6D-2A91-03D6-CEC7-C60694B19630}"/>
+              </a:ext>
+            </a:extLst>
+          </p:cNvPr>
+          <p:cNvSpPr>
+            <a:spLocks noGrp="1"/>
+          </p:cNvSpPr>
+          <p:nvPr>
+            <p:ph type="title"/>
+          </p:nvPr>
+        </p:nvSpPr>
+        <p:spPr>
+          <a:xfrm>
+            <a:off x="533400" y="764154"/>
+            <a:ext cx="6252600" cy="492443"/>
+          </a:xfrm>
+        </p:spPr>
+        <p:txBody>
+          <a:bodyPr/>
+          <a:lstStyle/>
+          <a:p>
+            <a:r>
+              <a:rPr lang="ru-RU" sz="3200" dirty="0">
+                <a:latin typeface="Myriad Pro Black" panose="020B0803030403020204" charset="0"/>
+              </a:rPr>
+              <a:t>Архитектура системы</a:t>
+            </a:r>
+          </a:p>
+        </p:txBody>
+      </p:sp>
+      <p:sp>
+        <p:nvSpPr>
+          <p:cNvPr id="3" name="Текст 2">
+            <a:extLst>
+              <a:ext uri="{FF2B5EF4-FFF2-40B4-BE49-F238E27FC236}">
+                <a16:creationId xmlns:a16="http://schemas.microsoft.com/office/drawing/2014/main" id="{0AAA3DCA-BC45-0F6A-F934-D00979FCA7FB}"/>
+              </a:ext>
+            </a:extLst>
+          </p:cNvPr>
+          <p:cNvSpPr>
+            <a:spLocks noGrp="1"/>
+          </p:cNvSpPr>
+          <p:nvPr>
+            <p:ph type="body" idx="1"/>
+          </p:nvPr>
+        </p:nvSpPr>
+        <p:spPr>
+          <a:xfrm>
+            <a:off x="533400" y="1451609"/>
+            <a:ext cx="5868243" cy="2893100"/>
+          </a:xfrm>
+        </p:spPr>
+        <p:txBody>
+          <a:bodyPr/>
+          <a:lstStyle/>
+          <a:p>
+            <a:pPr lvl="0"/>
+            <a:r>
+              <a:rPr lang="ru-RU" sz="1700" dirty="0">
+                <a:latin typeface="Myriad Pro" panose="020B0503030403020204" charset="0"/>
+              </a:rPr>
+              <a:t>1) Представление: </a:t>
+            </a:r>
+            <a:r>
+              <a:rPr lang="ru-RU" sz="1700" b="0" dirty="0">
+                <a:latin typeface="Myriad Pro" panose="020B0503030403020204" charset="0"/>
+              </a:rPr>
+              <a:t>интерфейс пользователя. Отображение экранных форм и информации. Отрисовка диаграммы;</a:t>
+            </a:r>
+          </a:p>
+          <a:p>
+            <a:pPr lvl="0"/>
+            <a:endParaRPr lang="ru-RU" sz="1700" dirty="0">
+              <a:latin typeface="Myriad Pro" panose="020B0503030403020204" charset="0"/>
+            </a:endParaRPr>
+          </a:p>
+          <a:p>
+            <a:pPr lvl="0"/>
+            <a:r>
+              <a:rPr lang="ru-RU" sz="1700" dirty="0">
+                <a:latin typeface="Myriad Pro" panose="020B0503030403020204" charset="0"/>
+              </a:rPr>
+              <a:t>2) Логика</a:t>
+            </a:r>
+            <a:r>
+              <a:rPr lang="ru-RU" sz="1700" b="0" dirty="0">
+                <a:latin typeface="Myriad Pro" panose="020B0503030403020204" charset="0"/>
+              </a:rPr>
+              <a:t>: управление жизненным циклом программы, связь между слоями. Работа со структурами входных и выходных данных, а также математическими объектами </a:t>
+            </a:r>
+            <a:r>
+              <a:rPr lang="en-US" sz="1700" b="0" dirty="0">
+                <a:latin typeface="Myriad Pro" panose="020B0503030403020204" charset="0"/>
+              </a:rPr>
+              <a:t>API</a:t>
+            </a:r>
+            <a:r>
+              <a:rPr lang="ru-RU" sz="1700" b="0" dirty="0">
+                <a:latin typeface="Myriad Pro" panose="020B0503030403020204" charset="0"/>
+              </a:rPr>
+              <a:t>;</a:t>
+            </a:r>
+          </a:p>
+          <a:p>
+            <a:pPr lvl="0"/>
+            <a:endParaRPr lang="ru-RU" sz="1700" dirty="0">
+              <a:latin typeface="Myriad Pro" panose="020B0503030403020204" charset="0"/>
+            </a:endParaRPr>
+          </a:p>
+          <a:p>
+            <a:pPr lvl="0"/>
+            <a:r>
+              <a:rPr lang="ru-RU" sz="1700" dirty="0">
+                <a:latin typeface="Myriad Pro" panose="020B0503030403020204" charset="0"/>
+              </a:rPr>
+              <a:t>3) Данные: </a:t>
+            </a:r>
+            <a:r>
+              <a:rPr lang="ru-RU" sz="1700" b="0" dirty="0">
+                <a:latin typeface="Myriad Pro" panose="020B0503030403020204" charset="0"/>
+              </a:rPr>
+              <a:t>вычислительный модуль, основан на CPLEX. Принимает объект модели и выполняет математические расчёты. Возвращает результаты оптимизации.</a:t>
+            </a:r>
+          </a:p>
+          <a:p>
+            <a:endParaRPr lang="ru-RU" sz="1800" b="0" dirty="0">
+              <a:latin typeface="Myriad Pro" panose="020B0503030403020204" charset="0"/>
+            </a:endParaRPr>
+          </a:p>
+        </p:txBody>
+      </p:sp>
+      <p:pic>
+        <p:nvPicPr>
+          <p:cNvPr id="5" name="Рисунок 4">
+            <a:extLst>
+              <a:ext uri="{FF2B5EF4-FFF2-40B4-BE49-F238E27FC236}">
+                <a16:creationId xmlns:a16="http://schemas.microsoft.com/office/drawing/2014/main" id="{4261E5DE-7564-D5E4-4432-9F906ADC5D01}"/>
+              </a:ext>
+            </a:extLst>
+          </p:cNvPr>
+          <p:cNvPicPr>
+            <a:picLocks noChangeAspect="1"/>
+          </p:cNvPicPr>
+          <p:nvPr/>
+        </p:nvPicPr>
+        <p:blipFill>
+          <a:blip r:embed="rId2"/>
+          <a:stretch>
+            <a:fillRect/>
+          </a:stretch>
+        </p:blipFill>
+        <p:spPr>
+          <a:xfrm>
+            <a:off x="6664895" y="968535"/>
+            <a:ext cx="2105461" cy="3206429"/>
+          </a:xfrm>
+          <a:prstGeom prst="rect">
+            <a:avLst/>
+          </a:prstGeom>
+        </p:spPr>
+      </p:pic>
+      <p:grpSp>
+        <p:nvGrpSpPr>
+          <p:cNvPr id="6" name="Группа 5">
+            <a:extLst>
+              <a:ext uri="{FF2B5EF4-FFF2-40B4-BE49-F238E27FC236}">
+                <a16:creationId xmlns:a16="http://schemas.microsoft.com/office/drawing/2014/main" id="{4A347707-3D10-5F1F-D96F-A2FCBEF79DC4}"/>
+              </a:ext>
+            </a:extLst>
+          </p:cNvPr>
+          <p:cNvGrpSpPr/>
+          <p:nvPr/>
+        </p:nvGrpSpPr>
+        <p:grpSpPr>
+          <a:xfrm>
+            <a:off x="0" y="-5563"/>
+            <a:ext cx="9144000" cy="574705"/>
+            <a:chOff x="0" y="-5563"/>
+            <a:chExt cx="9144000" cy="574705"/>
+          </a:xfrm>
+        </p:grpSpPr>
+        <p:grpSp>
+          <p:nvGrpSpPr>
+            <p:cNvPr id="7" name="Группа 6">
+              <a:extLst>
+                <a:ext uri="{FF2B5EF4-FFF2-40B4-BE49-F238E27FC236}">
+                  <a16:creationId xmlns:a16="http://schemas.microsoft.com/office/drawing/2014/main" id="{F1EF1BCD-2F4F-54F9-F180-AC8A6CC2204E}"/>
+                </a:ext>
+              </a:extLst>
+            </p:cNvPr>
+            <p:cNvGrpSpPr/>
+            <p:nvPr/>
+          </p:nvGrpSpPr>
+          <p:grpSpPr>
+            <a:xfrm>
+              <a:off x="0" y="-5563"/>
+              <a:ext cx="9144000" cy="574705"/>
+              <a:chOff x="-2931" y="-6103"/>
+              <a:chExt cx="12194930" cy="867688"/>
+            </a:xfrm>
+          </p:grpSpPr>
+          <p:sp>
+            <p:nvSpPr>
+              <p:cNvPr id="9" name="Прямоугольник 8">
+                <a:extLst>
+                  <a:ext uri="{FF2B5EF4-FFF2-40B4-BE49-F238E27FC236}">
+                    <a16:creationId xmlns:a16="http://schemas.microsoft.com/office/drawing/2014/main" id="{B0567BB9-EAB2-0FC8-1195-A484F13FB27F}"/>
+                  </a:ext>
+                </a:extLst>
+              </p:cNvPr>
+              <p:cNvSpPr/>
+              <p:nvPr/>
+            </p:nvSpPr>
+            <p:spPr>
+              <a:xfrm>
+                <a:off x="0" y="-6103"/>
+                <a:ext cx="12191999" cy="867688"/>
+              </a:xfrm>
+              <a:prstGeom prst="rect">
+                <a:avLst/>
+              </a:prstGeom>
+              <a:solidFill>
+                <a:srgbClr val="002060"/>
+              </a:solidFill>
+              <a:ln>
+                <a:noFill/>
+              </a:ln>
+            </p:spPr>
+            <p:style>
+              <a:lnRef idx="2">
+                <a:schemeClr val="accent1">
+                  <a:shade val="50000"/>
+                </a:schemeClr>
+              </a:lnRef>
+              <a:fillRef idx="1">
+                <a:schemeClr val="accent1"/>
+              </a:fillRef>
+              <a:effectRef idx="0">
+                <a:schemeClr val="accent1"/>
+              </a:effectRef>
+              <a:fontRef idx="minor">
+                <a:schemeClr val="lt1"/>
+              </a:fontRef>
+            </p:style>
+            <p:txBody>
+              <a:bodyPr rtlCol="0" anchor="ctr"/>
+              <a:lstStyle/>
+              <a:p>
+                <a:pPr algn="ctr"/>
+                <a:endParaRPr lang="ru-RU" dirty="0"/>
+              </a:p>
+            </p:txBody>
+          </p:sp>
+          <p:sp>
+            <p:nvSpPr>
+              <p:cNvPr id="10" name="Полилиния 13">
+                <a:extLst>
+                  <a:ext uri="{FF2B5EF4-FFF2-40B4-BE49-F238E27FC236}">
+                    <a16:creationId xmlns:a16="http://schemas.microsoft.com/office/drawing/2014/main" id="{38ED77F5-5116-B7A3-AE59-2621488CADFF}"/>
+                  </a:ext>
+                </a:extLst>
+              </p:cNvPr>
+              <p:cNvSpPr/>
+              <p:nvPr/>
+            </p:nvSpPr>
+            <p:spPr>
+              <a:xfrm>
+                <a:off x="-2931" y="-6103"/>
+                <a:ext cx="8638075" cy="867685"/>
+              </a:xfrm>
+              <a:custGeom>
+                <a:avLst/>
+                <a:gdLst>
+                  <a:gd name="connsiteX0" fmla="*/ 0 w 9967865"/>
+                  <a:gd name="connsiteY0" fmla="*/ 0 h 679010"/>
+                  <a:gd name="connsiteX1" fmla="*/ 9967865 w 9967865"/>
+                  <a:gd name="connsiteY1" fmla="*/ 0 h 679010"/>
+                  <a:gd name="connsiteX2" fmla="*/ 7659232 w 9967865"/>
+                  <a:gd name="connsiteY2" fmla="*/ 679010 h 679010"/>
+                  <a:gd name="connsiteX3" fmla="*/ 0 w 9967865"/>
+                  <a:gd name="connsiteY3" fmla="*/ 679010 h 679010"/>
+                  <a:gd name="connsiteX4" fmla="*/ 0 w 9967865"/>
+                  <a:gd name="connsiteY4" fmla="*/ 0 h 679010"/>
+                  <a:gd name="connsiteX0" fmla="*/ 0 w 9967865"/>
+                  <a:gd name="connsiteY0" fmla="*/ 0 h 686788"/>
+                  <a:gd name="connsiteX1" fmla="*/ 9967865 w 9967865"/>
+                  <a:gd name="connsiteY1" fmla="*/ 0 h 686788"/>
+                  <a:gd name="connsiteX2" fmla="*/ 9086239 w 9967865"/>
+                  <a:gd name="connsiteY2" fmla="*/ 686788 h 686788"/>
+                  <a:gd name="connsiteX3" fmla="*/ 0 w 9967865"/>
+                  <a:gd name="connsiteY3" fmla="*/ 679010 h 686788"/>
+                  <a:gd name="connsiteX4" fmla="*/ 0 w 9967865"/>
+                  <a:gd name="connsiteY4" fmla="*/ 0 h 686788"/>
+                  <a:gd name="connsiteX0" fmla="*/ 0 w 9967865"/>
+                  <a:gd name="connsiteY0" fmla="*/ 0 h 750734"/>
+                  <a:gd name="connsiteX1" fmla="*/ 9967865 w 9967865"/>
+                  <a:gd name="connsiteY1" fmla="*/ 0 h 750734"/>
+                  <a:gd name="connsiteX2" fmla="*/ 9086239 w 9967865"/>
+                  <a:gd name="connsiteY2" fmla="*/ 686788 h 750734"/>
+                  <a:gd name="connsiteX3" fmla="*/ 422409 w 9967865"/>
+                  <a:gd name="connsiteY3" fmla="*/ 750734 h 750734"/>
+                  <a:gd name="connsiteX4" fmla="*/ 0 w 9967865"/>
+                  <a:gd name="connsiteY4" fmla="*/ 0 h 750734"/>
+                  <a:gd name="connsiteX0" fmla="*/ 0 w 9967865"/>
+                  <a:gd name="connsiteY0" fmla="*/ 0 h 688791"/>
+                  <a:gd name="connsiteX1" fmla="*/ 9967865 w 9967865"/>
+                  <a:gd name="connsiteY1" fmla="*/ 0 h 688791"/>
+                  <a:gd name="connsiteX2" fmla="*/ 9086239 w 9967865"/>
+                  <a:gd name="connsiteY2" fmla="*/ 686788 h 688791"/>
+                  <a:gd name="connsiteX3" fmla="*/ 4224 w 9967865"/>
+                  <a:gd name="connsiteY3" fmla="*/ 688791 h 688791"/>
+                  <a:gd name="connsiteX4" fmla="*/ 0 w 9967865"/>
+                  <a:gd name="connsiteY4" fmla="*/ 0 h 688791"/>
+                  <a:gd name="connsiteX0" fmla="*/ 0 w 9967865"/>
+                  <a:gd name="connsiteY0" fmla="*/ 0 h 688791"/>
+                  <a:gd name="connsiteX1" fmla="*/ 9967865 w 9967865"/>
+                  <a:gd name="connsiteY1" fmla="*/ 0 h 688791"/>
+                  <a:gd name="connsiteX2" fmla="*/ 9318564 w 9967865"/>
+                  <a:gd name="connsiteY2" fmla="*/ 634624 h 688791"/>
+                  <a:gd name="connsiteX3" fmla="*/ 4224 w 9967865"/>
+                  <a:gd name="connsiteY3" fmla="*/ 688791 h 688791"/>
+                  <a:gd name="connsiteX4" fmla="*/ 0 w 9967865"/>
+                  <a:gd name="connsiteY4" fmla="*/ 0 h 688791"/>
+                  <a:gd name="connsiteX0" fmla="*/ 0 w 9967865"/>
+                  <a:gd name="connsiteY0" fmla="*/ 0 h 688791"/>
+                  <a:gd name="connsiteX1" fmla="*/ 9967865 w 9967865"/>
+                  <a:gd name="connsiteY1" fmla="*/ 0 h 688791"/>
+                  <a:gd name="connsiteX2" fmla="*/ 9001757 w 9967865"/>
+                  <a:gd name="connsiteY2" fmla="*/ 683527 h 688791"/>
+                  <a:gd name="connsiteX3" fmla="*/ 4224 w 9967865"/>
+                  <a:gd name="connsiteY3" fmla="*/ 688791 h 688791"/>
+                  <a:gd name="connsiteX4" fmla="*/ 0 w 9967865"/>
+                  <a:gd name="connsiteY4" fmla="*/ 0 h 688791"/>
+                  <a:gd name="connsiteX0" fmla="*/ 0 w 9967865"/>
+                  <a:gd name="connsiteY0" fmla="*/ 0 h 688791"/>
+                  <a:gd name="connsiteX1" fmla="*/ 9967865 w 9967865"/>
+                  <a:gd name="connsiteY1" fmla="*/ 0 h 688791"/>
+                  <a:gd name="connsiteX2" fmla="*/ 8929948 w 9967865"/>
+                  <a:gd name="connsiteY2" fmla="*/ 686788 h 688791"/>
+                  <a:gd name="connsiteX3" fmla="*/ 4224 w 9967865"/>
+                  <a:gd name="connsiteY3" fmla="*/ 688791 h 688791"/>
+                  <a:gd name="connsiteX4" fmla="*/ 0 w 9967865"/>
+                  <a:gd name="connsiteY4" fmla="*/ 0 h 688791"/>
+                  <a:gd name="connsiteX0" fmla="*/ 0 w 9967865"/>
+                  <a:gd name="connsiteY0" fmla="*/ 0 h 774813"/>
+                  <a:gd name="connsiteX1" fmla="*/ 9967865 w 9967865"/>
+                  <a:gd name="connsiteY1" fmla="*/ 0 h 774813"/>
+                  <a:gd name="connsiteX2" fmla="*/ 9153824 w 9967865"/>
+                  <a:gd name="connsiteY2" fmla="*/ 774813 h 774813"/>
+                  <a:gd name="connsiteX3" fmla="*/ 4224 w 9967865"/>
+                  <a:gd name="connsiteY3" fmla="*/ 688791 h 774813"/>
+                  <a:gd name="connsiteX4" fmla="*/ 0 w 9967865"/>
+                  <a:gd name="connsiteY4" fmla="*/ 0 h 774813"/>
+                  <a:gd name="connsiteX0" fmla="*/ 0 w 9967865"/>
+                  <a:gd name="connsiteY0" fmla="*/ 0 h 688791"/>
+                  <a:gd name="connsiteX1" fmla="*/ 9967865 w 9967865"/>
+                  <a:gd name="connsiteY1" fmla="*/ 0 h 688791"/>
+                  <a:gd name="connsiteX2" fmla="*/ 8824346 w 9967865"/>
+                  <a:gd name="connsiteY2" fmla="*/ 484656 h 688791"/>
+                  <a:gd name="connsiteX3" fmla="*/ 4224 w 9967865"/>
+                  <a:gd name="connsiteY3" fmla="*/ 688791 h 688791"/>
+                  <a:gd name="connsiteX4" fmla="*/ 0 w 9967865"/>
+                  <a:gd name="connsiteY4" fmla="*/ 0 h 688791"/>
+                  <a:gd name="connsiteX0" fmla="*/ 0 w 9967865"/>
+                  <a:gd name="connsiteY0" fmla="*/ 0 h 690048"/>
+                  <a:gd name="connsiteX1" fmla="*/ 9967865 w 9967865"/>
+                  <a:gd name="connsiteY1" fmla="*/ 0 h 690048"/>
+                  <a:gd name="connsiteX2" fmla="*/ 8760984 w 9967865"/>
+                  <a:gd name="connsiteY2" fmla="*/ 690048 h 690048"/>
+                  <a:gd name="connsiteX3" fmla="*/ 4224 w 9967865"/>
+                  <a:gd name="connsiteY3" fmla="*/ 688791 h 690048"/>
+                  <a:gd name="connsiteX4" fmla="*/ 0 w 9967865"/>
+                  <a:gd name="connsiteY4" fmla="*/ 0 h 690048"/>
+                </a:gdLst>
+                <a:ahLst/>
+                <a:cxnLst>
+                  <a:cxn ang="0">
+                    <a:pos x="connsiteX0" y="connsiteY0"/>
+                  </a:cxn>
+                  <a:cxn ang="0">
+                    <a:pos x="connsiteX1" y="connsiteY1"/>
+                  </a:cxn>
+                  <a:cxn ang="0">
+                    <a:pos x="connsiteX2" y="connsiteY2"/>
+                  </a:cxn>
+                  <a:cxn ang="0">
+                    <a:pos x="connsiteX3" y="connsiteY3"/>
+                  </a:cxn>
+                  <a:cxn ang="0">
+                    <a:pos x="connsiteX4" y="connsiteY4"/>
+                  </a:cxn>
+                </a:cxnLst>
+                <a:rect l="l" t="t" r="r" b="b"/>
+                <a:pathLst>
+                  <a:path w="9967865" h="690048">
+                    <a:moveTo>
+                      <a:pt x="0" y="0"/>
+                    </a:moveTo>
+                    <a:lnTo>
+                      <a:pt x="9967865" y="0"/>
+                    </a:lnTo>
+                    <a:lnTo>
+                      <a:pt x="8760984" y="690048"/>
+                    </a:lnTo>
+                    <a:lnTo>
+                      <a:pt x="4224" y="688791"/>
+                    </a:lnTo>
+                    <a:lnTo>
+                      <a:pt x="0" y="0"/>
+                    </a:lnTo>
+                    <a:close/>
+                  </a:path>
+                </a:pathLst>
+              </a:custGeom>
+              <a:solidFill>
+                <a:srgbClr val="0070C0"/>
+              </a:solidFill>
+              <a:ln>
+                <a:noFill/>
+              </a:ln>
+            </p:spPr>
+            <p:style>
+              <a:lnRef idx="2">
+                <a:schemeClr val="accent1">
+                  <a:shade val="50000"/>
+                </a:schemeClr>
+              </a:lnRef>
+              <a:fillRef idx="1">
+                <a:schemeClr val="accent1"/>
+              </a:fillRef>
+              <a:effectRef idx="0">
+                <a:schemeClr val="accent1"/>
+              </a:effectRef>
+              <a:fontRef idx="minor">
+                <a:schemeClr val="lt1"/>
+              </a:fontRef>
+            </p:style>
+            <p:txBody>
+              <a:bodyPr rtlCol="0" anchor="ctr"/>
+              <a:lstStyle/>
+              <a:p>
+                <a:pPr algn="ctr"/>
+                <a:endParaRPr lang="ru-RU" dirty="0"/>
+              </a:p>
+            </p:txBody>
+          </p:sp>
+        </p:grpSp>
+        <p:pic>
+          <p:nvPicPr>
+            <p:cNvPr id="8" name="Рисунок 7">
+              <a:extLst>
+                <a:ext uri="{FF2B5EF4-FFF2-40B4-BE49-F238E27FC236}">
+                  <a16:creationId xmlns:a16="http://schemas.microsoft.com/office/drawing/2014/main" id="{578D5C0F-F9FB-0642-2795-8B69D1BA8ED4}"/>
+                </a:ext>
+              </a:extLst>
+            </p:cNvPr>
+            <p:cNvPicPr>
+              <a:picLocks noChangeAspect="1"/>
+            </p:cNvPicPr>
+            <p:nvPr/>
+          </p:nvPicPr>
+          <p:blipFill>
+            <a:blip r:embed="rId3" cstate="print">
+              <a:extLst>
+                <a:ext uri="{28A0092B-C50C-407E-A947-70E740481C1C}">
+                  <a14:useLocalDpi xmlns:a14="http://schemas.microsoft.com/office/drawing/2010/main" val="0"/>
+                </a:ext>
+              </a:extLst>
+            </a:blip>
+            <a:stretch>
+              <a:fillRect/>
+            </a:stretch>
+          </p:blipFill>
+          <p:spPr>
+            <a:xfrm>
+              <a:off x="7543800" y="91298"/>
+              <a:ext cx="1211316" cy="380979"/>
+            </a:xfrm>
+            <a:prstGeom prst="rect">
+              <a:avLst/>
+            </a:prstGeom>
+          </p:spPr>
+        </p:pic>
+      </p:grpSp>
+      <p:sp>
+        <p:nvSpPr>
+          <p:cNvPr id="11" name="TextBox 10">
+            <a:extLst>
+              <a:ext uri="{FF2B5EF4-FFF2-40B4-BE49-F238E27FC236}">
+                <a16:creationId xmlns:a16="http://schemas.microsoft.com/office/drawing/2014/main" id="{BF8B4ED8-0826-7FAF-8038-8FEA45398A51}"/>
+              </a:ext>
+            </a:extLst>
+          </p:cNvPr>
+          <p:cNvSpPr txBox="1"/>
+          <p:nvPr/>
+        </p:nvSpPr>
+        <p:spPr>
+          <a:xfrm>
+            <a:off x="724617" y="147583"/>
+            <a:ext cx="8229600" cy="268407"/>
+          </a:xfrm>
+          <a:prstGeom prst="rect">
+            <a:avLst/>
+          </a:prstGeom>
+          <a:noFill/>
+        </p:spPr>
+        <p:txBody>
+          <a:bodyPr wrap="square" rtlCol="0">
+            <a:spAutoFit/>
+          </a:bodyPr>
+          <a:lstStyle/>
+          <a:p>
+            <a:pPr>
+              <a:lnSpc>
+                <a:spcPct val="80000"/>
+              </a:lnSpc>
+            </a:pPr>
+            <a:r>
+              <a:rPr lang="ru-RU" sz="1400" dirty="0">
+                <a:solidFill>
+                  <a:schemeClr val="bg1"/>
+                </a:solidFill>
+                <a:latin typeface="Myriad Pro Black" panose="020B0803030403020204" pitchFamily="34" charset="0"/>
+              </a:rPr>
+              <a:t>Системотехнический анализ и проектирование</a:t>
+            </a:r>
+          </a:p>
+        </p:txBody>
+      </p:sp>
+    </p:spTree>
+    <p:extLst>
+      <p:ext uri="{BB962C8B-B14F-4D97-AF65-F5344CB8AC3E}">
+        <p14:creationId xmlns:p14="http://schemas.microsoft.com/office/powerpoint/2010/main" val="1317744477"/>
+      </p:ext>
+    </p:extLst>
+  </p:cSld>
+  <p:clrMapOvr>
+    <a:masterClrMapping/>
+  </p:clrMapOvr>
+</p:sld>
+</file>
+
+<file path=ppt/slides/slide11.xml><?xml version="1.0" encoding="utf-8"?>
+<p:sld xmlns:a="http://schemas.openxmlformats.org/drawingml/2006/main" xmlns:r="http://schemas.openxmlformats.org/officeDocument/2006/relationships" xmlns:p="http://schemas.openxmlformats.org/presentationml/2006/main">
+  <p:cSld>
+    <p:spTree>
+      <p:nvGrpSpPr>
+        <p:cNvPr id="1" name=""/>
+        <p:cNvGrpSpPr/>
+        <p:nvPr/>
+      </p:nvGrpSpPr>
+      <p:grpSpPr>
+        <a:xfrm>
+          <a:off x="0" y="0"/>
+          <a:ext cx="0" cy="0"/>
+          <a:chOff x="0" y="0"/>
+          <a:chExt cx="0" cy="0"/>
+        </a:xfrm>
+      </p:grpSpPr>
       <p:pic>
         <p:nvPicPr>
           <p:cNvPr id="2" name="Рисунок 1">
@@ -2103,10 +2676,14 @@
           <a:lstStyle/>
           <a:p>
             <a:r>
-              <a:rPr lang="ru-RU" sz="2400" b="1" dirty="0"/>
+              <a:rPr lang="ru-RU" sz="2400" b="1" dirty="0">
+                <a:latin typeface="Myriad Pro Black" panose="020B0803030403020204" charset="0"/>
+              </a:rPr>
               <a:t>Алгоритм работы системы с учётом уровней архитектуры</a:t>
             </a:r>
-            <a:endParaRPr lang="en-US" sz="2400" b="1" dirty="0"/>
+            <a:endParaRPr lang="en-US" sz="2400" b="1" dirty="0">
+              <a:latin typeface="Myriad Pro Black" panose="020B0803030403020204" charset="0"/>
+            </a:endParaRPr>
           </a:p>
           <a:p>
             <a:endParaRPr lang="en-US" sz="2000" b="1" dirty="0"/>
@@ -2143,7 +2720,2219 @@
 </p:sld>
 </file>
 
-<file path=ppt/slides/slide11.xml><?xml version="1.0" encoding="utf-8"?>
+<file path=ppt/slides/slide12.xml><?xml version="1.0" encoding="utf-8"?>
+<p:sld xmlns:a="http://schemas.openxmlformats.org/drawingml/2006/main" xmlns:r="http://schemas.openxmlformats.org/officeDocument/2006/relationships" xmlns:p="http://schemas.openxmlformats.org/presentationml/2006/main">
+  <p:cSld>
+    <p:spTree>
+      <p:nvGrpSpPr>
+        <p:cNvPr id="1" name=""/>
+        <p:cNvGrpSpPr/>
+        <p:nvPr/>
+      </p:nvGrpSpPr>
+      <p:grpSpPr>
+        <a:xfrm>
+          <a:off x="0" y="0"/>
+          <a:ext cx="0" cy="0"/>
+          <a:chOff x="0" y="0"/>
+          <a:chExt cx="0" cy="0"/>
+        </a:xfrm>
+      </p:grpSpPr>
+      <p:sp>
+        <p:nvSpPr>
+          <p:cNvPr id="3" name="Текст 2">
+            <a:extLst>
+              <a:ext uri="{FF2B5EF4-FFF2-40B4-BE49-F238E27FC236}">
+                <a16:creationId xmlns:a16="http://schemas.microsoft.com/office/drawing/2014/main" id="{C071DC37-19A0-B2F7-3A6C-0ABBFB528D34}"/>
+              </a:ext>
+            </a:extLst>
+          </p:cNvPr>
+          <p:cNvSpPr>
+            <a:spLocks noGrp="1"/>
+          </p:cNvSpPr>
+          <p:nvPr>
+            <p:ph type="body" idx="1"/>
+          </p:nvPr>
+        </p:nvSpPr>
+        <p:spPr>
+          <a:xfrm>
+            <a:off x="457200" y="828924"/>
+            <a:ext cx="6742983" cy="492443"/>
+          </a:xfrm>
+        </p:spPr>
+        <p:txBody>
+          <a:bodyPr/>
+          <a:lstStyle/>
+          <a:p>
+            <a:r>
+              <a:rPr lang="ru-RU" sz="3200" dirty="0">
+                <a:latin typeface="Myriad Pro Black" panose="020B0803030403020204" charset="0"/>
+              </a:rPr>
+              <a:t>Структура входных данных</a:t>
+            </a:r>
+          </a:p>
+        </p:txBody>
+      </p:sp>
+      <p:grpSp>
+        <p:nvGrpSpPr>
+          <p:cNvPr id="4" name="Группа 3">
+            <a:extLst>
+              <a:ext uri="{FF2B5EF4-FFF2-40B4-BE49-F238E27FC236}">
+                <a16:creationId xmlns:a16="http://schemas.microsoft.com/office/drawing/2014/main" id="{96058866-FF40-D36F-1961-5A0E8CD745C0}"/>
+              </a:ext>
+            </a:extLst>
+          </p:cNvPr>
+          <p:cNvGrpSpPr/>
+          <p:nvPr/>
+        </p:nvGrpSpPr>
+        <p:grpSpPr>
+          <a:xfrm>
+            <a:off x="0" y="-5563"/>
+            <a:ext cx="9144000" cy="574705"/>
+            <a:chOff x="0" y="-5563"/>
+            <a:chExt cx="9144000" cy="574705"/>
+          </a:xfrm>
+        </p:grpSpPr>
+        <p:grpSp>
+          <p:nvGrpSpPr>
+            <p:cNvPr id="5" name="Группа 4">
+              <a:extLst>
+                <a:ext uri="{FF2B5EF4-FFF2-40B4-BE49-F238E27FC236}">
+                  <a16:creationId xmlns:a16="http://schemas.microsoft.com/office/drawing/2014/main" id="{A4D52366-337F-1330-53FB-02A538A3F9AE}"/>
+                </a:ext>
+              </a:extLst>
+            </p:cNvPr>
+            <p:cNvGrpSpPr/>
+            <p:nvPr/>
+          </p:nvGrpSpPr>
+          <p:grpSpPr>
+            <a:xfrm>
+              <a:off x="0" y="-5563"/>
+              <a:ext cx="9144000" cy="574705"/>
+              <a:chOff x="-2931" y="-6103"/>
+              <a:chExt cx="12194930" cy="867688"/>
+            </a:xfrm>
+          </p:grpSpPr>
+          <p:sp>
+            <p:nvSpPr>
+              <p:cNvPr id="7" name="Прямоугольник 6">
+                <a:extLst>
+                  <a:ext uri="{FF2B5EF4-FFF2-40B4-BE49-F238E27FC236}">
+                    <a16:creationId xmlns:a16="http://schemas.microsoft.com/office/drawing/2014/main" id="{E69D457C-85AE-69CB-49C2-D3A4D0098550}"/>
+                  </a:ext>
+                </a:extLst>
+              </p:cNvPr>
+              <p:cNvSpPr/>
+              <p:nvPr/>
+            </p:nvSpPr>
+            <p:spPr>
+              <a:xfrm>
+                <a:off x="0" y="-6103"/>
+                <a:ext cx="12191999" cy="867688"/>
+              </a:xfrm>
+              <a:prstGeom prst="rect">
+                <a:avLst/>
+              </a:prstGeom>
+              <a:solidFill>
+                <a:srgbClr val="002060"/>
+              </a:solidFill>
+              <a:ln>
+                <a:noFill/>
+              </a:ln>
+            </p:spPr>
+            <p:style>
+              <a:lnRef idx="2">
+                <a:schemeClr val="accent1">
+                  <a:shade val="50000"/>
+                </a:schemeClr>
+              </a:lnRef>
+              <a:fillRef idx="1">
+                <a:schemeClr val="accent1"/>
+              </a:fillRef>
+              <a:effectRef idx="0">
+                <a:schemeClr val="accent1"/>
+              </a:effectRef>
+              <a:fontRef idx="minor">
+                <a:schemeClr val="lt1"/>
+              </a:fontRef>
+            </p:style>
+            <p:txBody>
+              <a:bodyPr rtlCol="0" anchor="ctr"/>
+              <a:lstStyle/>
+              <a:p>
+                <a:pPr algn="ctr"/>
+                <a:endParaRPr lang="ru-RU" dirty="0"/>
+              </a:p>
+            </p:txBody>
+          </p:sp>
+          <p:sp>
+            <p:nvSpPr>
+              <p:cNvPr id="8" name="Полилиния 13">
+                <a:extLst>
+                  <a:ext uri="{FF2B5EF4-FFF2-40B4-BE49-F238E27FC236}">
+                    <a16:creationId xmlns:a16="http://schemas.microsoft.com/office/drawing/2014/main" id="{C9668713-1D85-27C9-E243-8608C6716D09}"/>
+                  </a:ext>
+                </a:extLst>
+              </p:cNvPr>
+              <p:cNvSpPr/>
+              <p:nvPr/>
+            </p:nvSpPr>
+            <p:spPr>
+              <a:xfrm>
+                <a:off x="-2931" y="-6103"/>
+                <a:ext cx="8638075" cy="867685"/>
+              </a:xfrm>
+              <a:custGeom>
+                <a:avLst/>
+                <a:gdLst>
+                  <a:gd name="connsiteX0" fmla="*/ 0 w 9967865"/>
+                  <a:gd name="connsiteY0" fmla="*/ 0 h 679010"/>
+                  <a:gd name="connsiteX1" fmla="*/ 9967865 w 9967865"/>
+                  <a:gd name="connsiteY1" fmla="*/ 0 h 679010"/>
+                  <a:gd name="connsiteX2" fmla="*/ 7659232 w 9967865"/>
+                  <a:gd name="connsiteY2" fmla="*/ 679010 h 679010"/>
+                  <a:gd name="connsiteX3" fmla="*/ 0 w 9967865"/>
+                  <a:gd name="connsiteY3" fmla="*/ 679010 h 679010"/>
+                  <a:gd name="connsiteX4" fmla="*/ 0 w 9967865"/>
+                  <a:gd name="connsiteY4" fmla="*/ 0 h 679010"/>
+                  <a:gd name="connsiteX0" fmla="*/ 0 w 9967865"/>
+                  <a:gd name="connsiteY0" fmla="*/ 0 h 686788"/>
+                  <a:gd name="connsiteX1" fmla="*/ 9967865 w 9967865"/>
+                  <a:gd name="connsiteY1" fmla="*/ 0 h 686788"/>
+                  <a:gd name="connsiteX2" fmla="*/ 9086239 w 9967865"/>
+                  <a:gd name="connsiteY2" fmla="*/ 686788 h 686788"/>
+                  <a:gd name="connsiteX3" fmla="*/ 0 w 9967865"/>
+                  <a:gd name="connsiteY3" fmla="*/ 679010 h 686788"/>
+                  <a:gd name="connsiteX4" fmla="*/ 0 w 9967865"/>
+                  <a:gd name="connsiteY4" fmla="*/ 0 h 686788"/>
+                  <a:gd name="connsiteX0" fmla="*/ 0 w 9967865"/>
+                  <a:gd name="connsiteY0" fmla="*/ 0 h 750734"/>
+                  <a:gd name="connsiteX1" fmla="*/ 9967865 w 9967865"/>
+                  <a:gd name="connsiteY1" fmla="*/ 0 h 750734"/>
+                  <a:gd name="connsiteX2" fmla="*/ 9086239 w 9967865"/>
+                  <a:gd name="connsiteY2" fmla="*/ 686788 h 750734"/>
+                  <a:gd name="connsiteX3" fmla="*/ 422409 w 9967865"/>
+                  <a:gd name="connsiteY3" fmla="*/ 750734 h 750734"/>
+                  <a:gd name="connsiteX4" fmla="*/ 0 w 9967865"/>
+                  <a:gd name="connsiteY4" fmla="*/ 0 h 750734"/>
+                  <a:gd name="connsiteX0" fmla="*/ 0 w 9967865"/>
+                  <a:gd name="connsiteY0" fmla="*/ 0 h 688791"/>
+                  <a:gd name="connsiteX1" fmla="*/ 9967865 w 9967865"/>
+                  <a:gd name="connsiteY1" fmla="*/ 0 h 688791"/>
+                  <a:gd name="connsiteX2" fmla="*/ 9086239 w 9967865"/>
+                  <a:gd name="connsiteY2" fmla="*/ 686788 h 688791"/>
+                  <a:gd name="connsiteX3" fmla="*/ 4224 w 9967865"/>
+                  <a:gd name="connsiteY3" fmla="*/ 688791 h 688791"/>
+                  <a:gd name="connsiteX4" fmla="*/ 0 w 9967865"/>
+                  <a:gd name="connsiteY4" fmla="*/ 0 h 688791"/>
+                  <a:gd name="connsiteX0" fmla="*/ 0 w 9967865"/>
+                  <a:gd name="connsiteY0" fmla="*/ 0 h 688791"/>
+                  <a:gd name="connsiteX1" fmla="*/ 9967865 w 9967865"/>
+                  <a:gd name="connsiteY1" fmla="*/ 0 h 688791"/>
+                  <a:gd name="connsiteX2" fmla="*/ 9318564 w 9967865"/>
+                  <a:gd name="connsiteY2" fmla="*/ 634624 h 688791"/>
+                  <a:gd name="connsiteX3" fmla="*/ 4224 w 9967865"/>
+                  <a:gd name="connsiteY3" fmla="*/ 688791 h 688791"/>
+                  <a:gd name="connsiteX4" fmla="*/ 0 w 9967865"/>
+                  <a:gd name="connsiteY4" fmla="*/ 0 h 688791"/>
+                  <a:gd name="connsiteX0" fmla="*/ 0 w 9967865"/>
+                  <a:gd name="connsiteY0" fmla="*/ 0 h 688791"/>
+                  <a:gd name="connsiteX1" fmla="*/ 9967865 w 9967865"/>
+                  <a:gd name="connsiteY1" fmla="*/ 0 h 688791"/>
+                  <a:gd name="connsiteX2" fmla="*/ 9001757 w 9967865"/>
+                  <a:gd name="connsiteY2" fmla="*/ 683527 h 688791"/>
+                  <a:gd name="connsiteX3" fmla="*/ 4224 w 9967865"/>
+                  <a:gd name="connsiteY3" fmla="*/ 688791 h 688791"/>
+                  <a:gd name="connsiteX4" fmla="*/ 0 w 9967865"/>
+                  <a:gd name="connsiteY4" fmla="*/ 0 h 688791"/>
+                  <a:gd name="connsiteX0" fmla="*/ 0 w 9967865"/>
+                  <a:gd name="connsiteY0" fmla="*/ 0 h 688791"/>
+                  <a:gd name="connsiteX1" fmla="*/ 9967865 w 9967865"/>
+                  <a:gd name="connsiteY1" fmla="*/ 0 h 688791"/>
+                  <a:gd name="connsiteX2" fmla="*/ 8929948 w 9967865"/>
+                  <a:gd name="connsiteY2" fmla="*/ 686788 h 688791"/>
+                  <a:gd name="connsiteX3" fmla="*/ 4224 w 9967865"/>
+                  <a:gd name="connsiteY3" fmla="*/ 688791 h 688791"/>
+                  <a:gd name="connsiteX4" fmla="*/ 0 w 9967865"/>
+                  <a:gd name="connsiteY4" fmla="*/ 0 h 688791"/>
+                  <a:gd name="connsiteX0" fmla="*/ 0 w 9967865"/>
+                  <a:gd name="connsiteY0" fmla="*/ 0 h 774813"/>
+                  <a:gd name="connsiteX1" fmla="*/ 9967865 w 9967865"/>
+                  <a:gd name="connsiteY1" fmla="*/ 0 h 774813"/>
+                  <a:gd name="connsiteX2" fmla="*/ 9153824 w 9967865"/>
+                  <a:gd name="connsiteY2" fmla="*/ 774813 h 774813"/>
+                  <a:gd name="connsiteX3" fmla="*/ 4224 w 9967865"/>
+                  <a:gd name="connsiteY3" fmla="*/ 688791 h 774813"/>
+                  <a:gd name="connsiteX4" fmla="*/ 0 w 9967865"/>
+                  <a:gd name="connsiteY4" fmla="*/ 0 h 774813"/>
+                  <a:gd name="connsiteX0" fmla="*/ 0 w 9967865"/>
+                  <a:gd name="connsiteY0" fmla="*/ 0 h 688791"/>
+                  <a:gd name="connsiteX1" fmla="*/ 9967865 w 9967865"/>
+                  <a:gd name="connsiteY1" fmla="*/ 0 h 688791"/>
+                  <a:gd name="connsiteX2" fmla="*/ 8824346 w 9967865"/>
+                  <a:gd name="connsiteY2" fmla="*/ 484656 h 688791"/>
+                  <a:gd name="connsiteX3" fmla="*/ 4224 w 9967865"/>
+                  <a:gd name="connsiteY3" fmla="*/ 688791 h 688791"/>
+                  <a:gd name="connsiteX4" fmla="*/ 0 w 9967865"/>
+                  <a:gd name="connsiteY4" fmla="*/ 0 h 688791"/>
+                  <a:gd name="connsiteX0" fmla="*/ 0 w 9967865"/>
+                  <a:gd name="connsiteY0" fmla="*/ 0 h 690048"/>
+                  <a:gd name="connsiteX1" fmla="*/ 9967865 w 9967865"/>
+                  <a:gd name="connsiteY1" fmla="*/ 0 h 690048"/>
+                  <a:gd name="connsiteX2" fmla="*/ 8760984 w 9967865"/>
+                  <a:gd name="connsiteY2" fmla="*/ 690048 h 690048"/>
+                  <a:gd name="connsiteX3" fmla="*/ 4224 w 9967865"/>
+                  <a:gd name="connsiteY3" fmla="*/ 688791 h 690048"/>
+                  <a:gd name="connsiteX4" fmla="*/ 0 w 9967865"/>
+                  <a:gd name="connsiteY4" fmla="*/ 0 h 690048"/>
+                </a:gdLst>
+                <a:ahLst/>
+                <a:cxnLst>
+                  <a:cxn ang="0">
+                    <a:pos x="connsiteX0" y="connsiteY0"/>
+                  </a:cxn>
+                  <a:cxn ang="0">
+                    <a:pos x="connsiteX1" y="connsiteY1"/>
+                  </a:cxn>
+                  <a:cxn ang="0">
+                    <a:pos x="connsiteX2" y="connsiteY2"/>
+                  </a:cxn>
+                  <a:cxn ang="0">
+                    <a:pos x="connsiteX3" y="connsiteY3"/>
+                  </a:cxn>
+                  <a:cxn ang="0">
+                    <a:pos x="connsiteX4" y="connsiteY4"/>
+                  </a:cxn>
+                </a:cxnLst>
+                <a:rect l="l" t="t" r="r" b="b"/>
+                <a:pathLst>
+                  <a:path w="9967865" h="690048">
+                    <a:moveTo>
+                      <a:pt x="0" y="0"/>
+                    </a:moveTo>
+                    <a:lnTo>
+                      <a:pt x="9967865" y="0"/>
+                    </a:lnTo>
+                    <a:lnTo>
+                      <a:pt x="8760984" y="690048"/>
+                    </a:lnTo>
+                    <a:lnTo>
+                      <a:pt x="4224" y="688791"/>
+                    </a:lnTo>
+                    <a:lnTo>
+                      <a:pt x="0" y="0"/>
+                    </a:lnTo>
+                    <a:close/>
+                  </a:path>
+                </a:pathLst>
+              </a:custGeom>
+              <a:solidFill>
+                <a:srgbClr val="0070C0"/>
+              </a:solidFill>
+              <a:ln>
+                <a:noFill/>
+              </a:ln>
+            </p:spPr>
+            <p:style>
+              <a:lnRef idx="2">
+                <a:schemeClr val="accent1">
+                  <a:shade val="50000"/>
+                </a:schemeClr>
+              </a:lnRef>
+              <a:fillRef idx="1">
+                <a:schemeClr val="accent1"/>
+              </a:fillRef>
+              <a:effectRef idx="0">
+                <a:schemeClr val="accent1"/>
+              </a:effectRef>
+              <a:fontRef idx="minor">
+                <a:schemeClr val="lt1"/>
+              </a:fontRef>
+            </p:style>
+            <p:txBody>
+              <a:bodyPr rtlCol="0" anchor="ctr"/>
+              <a:lstStyle/>
+              <a:p>
+                <a:pPr algn="ctr"/>
+                <a:endParaRPr lang="ru-RU" dirty="0"/>
+              </a:p>
+            </p:txBody>
+          </p:sp>
+        </p:grpSp>
+        <p:pic>
+          <p:nvPicPr>
+            <p:cNvPr id="6" name="Рисунок 5">
+              <a:extLst>
+                <a:ext uri="{FF2B5EF4-FFF2-40B4-BE49-F238E27FC236}">
+                  <a16:creationId xmlns:a16="http://schemas.microsoft.com/office/drawing/2014/main" id="{8D59E92B-3392-F9CB-D3D7-7B5849F6FF18}"/>
+                </a:ext>
+              </a:extLst>
+            </p:cNvPr>
+            <p:cNvPicPr>
+              <a:picLocks noChangeAspect="1"/>
+            </p:cNvPicPr>
+            <p:nvPr/>
+          </p:nvPicPr>
+          <p:blipFill>
+            <a:blip r:embed="rId2" cstate="print">
+              <a:extLst>
+                <a:ext uri="{28A0092B-C50C-407E-A947-70E740481C1C}">
+                  <a14:useLocalDpi xmlns:a14="http://schemas.microsoft.com/office/drawing/2010/main" val="0"/>
+                </a:ext>
+              </a:extLst>
+            </a:blip>
+            <a:stretch>
+              <a:fillRect/>
+            </a:stretch>
+          </p:blipFill>
+          <p:spPr>
+            <a:xfrm>
+              <a:off x="7543800" y="91298"/>
+              <a:ext cx="1211316" cy="380979"/>
+            </a:xfrm>
+            <a:prstGeom prst="rect">
+              <a:avLst/>
+            </a:prstGeom>
+          </p:spPr>
+        </p:pic>
+      </p:grpSp>
+      <p:sp>
+        <p:nvSpPr>
+          <p:cNvPr id="9" name="TextBox 8">
+            <a:extLst>
+              <a:ext uri="{FF2B5EF4-FFF2-40B4-BE49-F238E27FC236}">
+                <a16:creationId xmlns:a16="http://schemas.microsoft.com/office/drawing/2014/main" id="{C3CB34BE-4B0E-C452-C127-4E6EA9E85F68}"/>
+              </a:ext>
+            </a:extLst>
+          </p:cNvPr>
+          <p:cNvSpPr txBox="1"/>
+          <p:nvPr/>
+        </p:nvSpPr>
+        <p:spPr>
+          <a:xfrm>
+            <a:off x="724617" y="147583"/>
+            <a:ext cx="8229600" cy="268407"/>
+          </a:xfrm>
+          <a:prstGeom prst="rect">
+            <a:avLst/>
+          </a:prstGeom>
+          <a:noFill/>
+        </p:spPr>
+        <p:txBody>
+          <a:bodyPr wrap="square" rtlCol="0">
+            <a:spAutoFit/>
+          </a:bodyPr>
+          <a:lstStyle/>
+          <a:p>
+            <a:pPr>
+              <a:lnSpc>
+                <a:spcPct val="80000"/>
+              </a:lnSpc>
+            </a:pPr>
+            <a:r>
+              <a:rPr lang="ru-RU" sz="1400" dirty="0">
+                <a:solidFill>
+                  <a:schemeClr val="bg1"/>
+                </a:solidFill>
+                <a:latin typeface="Myriad Pro Black" panose="020B0803030403020204" pitchFamily="34" charset="0"/>
+              </a:rPr>
+              <a:t>Системотехнический анализ и проектирование</a:t>
+            </a:r>
+          </a:p>
+        </p:txBody>
+      </p:sp>
+      <p:pic>
+        <p:nvPicPr>
+          <p:cNvPr id="12" name="Рисунок 11">
+            <a:extLst>
+              <a:ext uri="{FF2B5EF4-FFF2-40B4-BE49-F238E27FC236}">
+                <a16:creationId xmlns:a16="http://schemas.microsoft.com/office/drawing/2014/main" id="{AA9183F9-3B62-0183-0C08-94B111928F92}"/>
+              </a:ext>
+            </a:extLst>
+          </p:cNvPr>
+          <p:cNvPicPr>
+            <a:picLocks noChangeAspect="1"/>
+          </p:cNvPicPr>
+          <p:nvPr/>
+        </p:nvPicPr>
+        <p:blipFill>
+          <a:blip r:embed="rId3"/>
+          <a:stretch>
+            <a:fillRect/>
+          </a:stretch>
+        </p:blipFill>
+        <p:spPr>
+          <a:xfrm>
+            <a:off x="584330" y="1504950"/>
+            <a:ext cx="5080130" cy="3276600"/>
+          </a:xfrm>
+          <a:prstGeom prst="rect">
+            <a:avLst/>
+          </a:prstGeom>
+        </p:spPr>
+      </p:pic>
+      <p:sp>
+        <p:nvSpPr>
+          <p:cNvPr id="13" name="TextBox 12">
+            <a:extLst>
+              <a:ext uri="{FF2B5EF4-FFF2-40B4-BE49-F238E27FC236}">
+                <a16:creationId xmlns:a16="http://schemas.microsoft.com/office/drawing/2014/main" id="{E2865A07-45A4-C5F5-7FDE-11E1E9BACB29}"/>
+              </a:ext>
+            </a:extLst>
+          </p:cNvPr>
+          <p:cNvSpPr txBox="1"/>
+          <p:nvPr/>
+        </p:nvSpPr>
+        <p:spPr>
+          <a:xfrm>
+            <a:off x="5767714" y="1491863"/>
+            <a:ext cx="3186503" cy="3416320"/>
+          </a:xfrm>
+          <a:prstGeom prst="rect">
+            <a:avLst/>
+          </a:prstGeom>
+          <a:noFill/>
+        </p:spPr>
+        <p:txBody>
+          <a:bodyPr wrap="square" rtlCol="0">
+            <a:spAutoFit/>
+          </a:bodyPr>
+          <a:lstStyle/>
+          <a:p>
+            <a:pPr marL="285750" indent="-285750">
+              <a:buFont typeface="Arial" panose="020B0604020202020204" pitchFamily="34" charset="0"/>
+              <a:buChar char="•"/>
+            </a:pPr>
+            <a:r>
+              <a:rPr lang="ru-RU" dirty="0"/>
+              <a:t>Сколько приборов в конвейере?</a:t>
+            </a:r>
+          </a:p>
+          <a:p>
+            <a:pPr marL="285750" indent="-285750">
+              <a:buFont typeface="Arial" panose="020B0604020202020204" pitchFamily="34" charset="0"/>
+              <a:buChar char="•"/>
+            </a:pPr>
+            <a:r>
+              <a:rPr lang="ru-RU" dirty="0"/>
+              <a:t>Сколько задач нужно выполнить и к скольки типам они принадлежат?</a:t>
+            </a:r>
+          </a:p>
+          <a:p>
+            <a:pPr marL="285750" indent="-285750">
+              <a:buFont typeface="Arial" panose="020B0604020202020204" pitchFamily="34" charset="0"/>
+              <a:buChar char="•"/>
+            </a:pPr>
+            <a:r>
+              <a:rPr lang="ru-RU" dirty="0"/>
+              <a:t>Как часто и как долго нужно проводить ПТО?</a:t>
+            </a:r>
+          </a:p>
+          <a:p>
+            <a:pPr marL="285750" indent="-285750">
+              <a:buFont typeface="Arial" panose="020B0604020202020204" pitchFamily="34" charset="0"/>
+              <a:buChar char="•"/>
+            </a:pPr>
+            <a:r>
+              <a:rPr lang="ru-RU" dirty="0"/>
+              <a:t>Сколько длится переналадка приборов с одного типа заданий на второй?</a:t>
+            </a:r>
+          </a:p>
+          <a:p>
+            <a:pPr marL="285750" indent="-285750">
+              <a:buFont typeface="Arial" panose="020B0604020202020204" pitchFamily="34" charset="0"/>
+              <a:buChar char="•"/>
+            </a:pPr>
+            <a:endParaRPr lang="ru-RU" dirty="0"/>
+          </a:p>
+        </p:txBody>
+      </p:sp>
+    </p:spTree>
+    <p:extLst>
+      <p:ext uri="{BB962C8B-B14F-4D97-AF65-F5344CB8AC3E}">
+        <p14:creationId xmlns:p14="http://schemas.microsoft.com/office/powerpoint/2010/main" val="1589827112"/>
+      </p:ext>
+    </p:extLst>
+  </p:cSld>
+  <p:clrMapOvr>
+    <a:masterClrMapping/>
+  </p:clrMapOvr>
+</p:sld>
+</file>
+
+<file path=ppt/slides/slide13.xml><?xml version="1.0" encoding="utf-8"?>
+<p:sld xmlns:a="http://schemas.openxmlformats.org/drawingml/2006/main" xmlns:r="http://schemas.openxmlformats.org/officeDocument/2006/relationships" xmlns:p="http://schemas.openxmlformats.org/presentationml/2006/main">
+  <p:cSld>
+    <p:spTree>
+      <p:nvGrpSpPr>
+        <p:cNvPr id="1" name=""/>
+        <p:cNvGrpSpPr/>
+        <p:nvPr/>
+      </p:nvGrpSpPr>
+      <p:grpSpPr>
+        <a:xfrm>
+          <a:off x="0" y="0"/>
+          <a:ext cx="0" cy="0"/>
+          <a:chOff x="0" y="0"/>
+          <a:chExt cx="0" cy="0"/>
+        </a:xfrm>
+      </p:grpSpPr>
+      <p:sp>
+        <p:nvSpPr>
+          <p:cNvPr id="2" name="Заголовок 1">
+            <a:extLst>
+              <a:ext uri="{FF2B5EF4-FFF2-40B4-BE49-F238E27FC236}">
+                <a16:creationId xmlns:a16="http://schemas.microsoft.com/office/drawing/2014/main" id="{47CC3CE6-817A-A4BE-1B8F-67F4CDFDDB16}"/>
+              </a:ext>
+            </a:extLst>
+          </p:cNvPr>
+          <p:cNvSpPr>
+            <a:spLocks noGrp="1"/>
+          </p:cNvSpPr>
+          <p:nvPr>
+            <p:ph type="title"/>
+          </p:nvPr>
+        </p:nvSpPr>
+        <p:spPr>
+          <a:xfrm>
+            <a:off x="1882142" y="1181350"/>
+            <a:ext cx="4579620" cy="492443"/>
+          </a:xfrm>
+        </p:spPr>
+        <p:txBody>
+          <a:bodyPr/>
+          <a:lstStyle/>
+          <a:p>
+            <a:r>
+              <a:rPr lang="ru-RU" sz="3200" dirty="0">
+                <a:latin typeface="Myriad Pro" panose="020B0503030403020204" charset="0"/>
+              </a:rPr>
+              <a:t>Критерий оптимизации</a:t>
+            </a:r>
+          </a:p>
+        </p:txBody>
+      </p:sp>
+      <p:cxnSp>
+        <p:nvCxnSpPr>
+          <p:cNvPr id="5" name="Прямая со стрелкой 4">
+            <a:extLst>
+              <a:ext uri="{FF2B5EF4-FFF2-40B4-BE49-F238E27FC236}">
+                <a16:creationId xmlns:a16="http://schemas.microsoft.com/office/drawing/2014/main" id="{46E50619-D66D-09A9-030C-EE940CCC8C1A}"/>
+              </a:ext>
+            </a:extLst>
+          </p:cNvPr>
+          <p:cNvCxnSpPr>
+            <a:cxnSpLocks/>
+          </p:cNvCxnSpPr>
+          <p:nvPr/>
+        </p:nvCxnSpPr>
+        <p:spPr>
+          <a:xfrm flipH="1">
+            <a:off x="2514600" y="1727835"/>
+            <a:ext cx="1066800" cy="530210"/>
+          </a:xfrm>
+          <a:prstGeom prst="straightConnector1">
+            <a:avLst/>
+          </a:prstGeom>
+          <a:ln>
+            <a:tailEnd type="triangle"/>
+          </a:ln>
+        </p:spPr>
+        <p:style>
+          <a:lnRef idx="1">
+            <a:schemeClr val="dk1"/>
+          </a:lnRef>
+          <a:fillRef idx="0">
+            <a:schemeClr val="dk1"/>
+          </a:fillRef>
+          <a:effectRef idx="0">
+            <a:schemeClr val="dk1"/>
+          </a:effectRef>
+          <a:fontRef idx="minor">
+            <a:schemeClr val="tx1"/>
+          </a:fontRef>
+        </p:style>
+      </p:cxnSp>
+      <p:grpSp>
+        <p:nvGrpSpPr>
+          <p:cNvPr id="8" name="Группа 7">
+            <a:extLst>
+              <a:ext uri="{FF2B5EF4-FFF2-40B4-BE49-F238E27FC236}">
+                <a16:creationId xmlns:a16="http://schemas.microsoft.com/office/drawing/2014/main" id="{A0624C59-3E61-5EDC-5A76-B971F383C0CE}"/>
+              </a:ext>
+            </a:extLst>
+          </p:cNvPr>
+          <p:cNvGrpSpPr/>
+          <p:nvPr/>
+        </p:nvGrpSpPr>
+        <p:grpSpPr>
+          <a:xfrm>
+            <a:off x="0" y="-5563"/>
+            <a:ext cx="9144000" cy="574705"/>
+            <a:chOff x="0" y="-5563"/>
+            <a:chExt cx="9144000" cy="574705"/>
+          </a:xfrm>
+        </p:grpSpPr>
+        <p:grpSp>
+          <p:nvGrpSpPr>
+            <p:cNvPr id="9" name="Группа 8">
+              <a:extLst>
+                <a:ext uri="{FF2B5EF4-FFF2-40B4-BE49-F238E27FC236}">
+                  <a16:creationId xmlns:a16="http://schemas.microsoft.com/office/drawing/2014/main" id="{1CD76051-01B0-61FC-2E8E-B45504964F6F}"/>
+                </a:ext>
+              </a:extLst>
+            </p:cNvPr>
+            <p:cNvGrpSpPr/>
+            <p:nvPr/>
+          </p:nvGrpSpPr>
+          <p:grpSpPr>
+            <a:xfrm>
+              <a:off x="0" y="-5563"/>
+              <a:ext cx="9144000" cy="574705"/>
+              <a:chOff x="-2931" y="-6103"/>
+              <a:chExt cx="12194930" cy="867688"/>
+            </a:xfrm>
+          </p:grpSpPr>
+          <p:sp>
+            <p:nvSpPr>
+              <p:cNvPr id="11" name="Прямоугольник 10">
+                <a:extLst>
+                  <a:ext uri="{FF2B5EF4-FFF2-40B4-BE49-F238E27FC236}">
+                    <a16:creationId xmlns:a16="http://schemas.microsoft.com/office/drawing/2014/main" id="{135D9F56-46FE-62C4-25B3-0D0CB2B984CC}"/>
+                  </a:ext>
+                </a:extLst>
+              </p:cNvPr>
+              <p:cNvSpPr/>
+              <p:nvPr/>
+            </p:nvSpPr>
+            <p:spPr>
+              <a:xfrm>
+                <a:off x="0" y="-6103"/>
+                <a:ext cx="12191999" cy="867688"/>
+              </a:xfrm>
+              <a:prstGeom prst="rect">
+                <a:avLst/>
+              </a:prstGeom>
+              <a:solidFill>
+                <a:srgbClr val="002060"/>
+              </a:solidFill>
+              <a:ln>
+                <a:noFill/>
+              </a:ln>
+            </p:spPr>
+            <p:style>
+              <a:lnRef idx="2">
+                <a:schemeClr val="accent1">
+                  <a:shade val="50000"/>
+                </a:schemeClr>
+              </a:lnRef>
+              <a:fillRef idx="1">
+                <a:schemeClr val="accent1"/>
+              </a:fillRef>
+              <a:effectRef idx="0">
+                <a:schemeClr val="accent1"/>
+              </a:effectRef>
+              <a:fontRef idx="minor">
+                <a:schemeClr val="lt1"/>
+              </a:fontRef>
+            </p:style>
+            <p:txBody>
+              <a:bodyPr rtlCol="0" anchor="ctr"/>
+              <a:lstStyle/>
+              <a:p>
+                <a:pPr algn="ctr"/>
+                <a:endParaRPr lang="ru-RU" dirty="0"/>
+              </a:p>
+            </p:txBody>
+          </p:sp>
+          <p:sp>
+            <p:nvSpPr>
+              <p:cNvPr id="12" name="Полилиния 13">
+                <a:extLst>
+                  <a:ext uri="{FF2B5EF4-FFF2-40B4-BE49-F238E27FC236}">
+                    <a16:creationId xmlns:a16="http://schemas.microsoft.com/office/drawing/2014/main" id="{78F4C937-5E0A-5EE1-0C42-8C91042D50FE}"/>
+                  </a:ext>
+                </a:extLst>
+              </p:cNvPr>
+              <p:cNvSpPr/>
+              <p:nvPr/>
+            </p:nvSpPr>
+            <p:spPr>
+              <a:xfrm>
+                <a:off x="-2931" y="-6103"/>
+                <a:ext cx="8638075" cy="867685"/>
+              </a:xfrm>
+              <a:custGeom>
+                <a:avLst/>
+                <a:gdLst>
+                  <a:gd name="connsiteX0" fmla="*/ 0 w 9967865"/>
+                  <a:gd name="connsiteY0" fmla="*/ 0 h 679010"/>
+                  <a:gd name="connsiteX1" fmla="*/ 9967865 w 9967865"/>
+                  <a:gd name="connsiteY1" fmla="*/ 0 h 679010"/>
+                  <a:gd name="connsiteX2" fmla="*/ 7659232 w 9967865"/>
+                  <a:gd name="connsiteY2" fmla="*/ 679010 h 679010"/>
+                  <a:gd name="connsiteX3" fmla="*/ 0 w 9967865"/>
+                  <a:gd name="connsiteY3" fmla="*/ 679010 h 679010"/>
+                  <a:gd name="connsiteX4" fmla="*/ 0 w 9967865"/>
+                  <a:gd name="connsiteY4" fmla="*/ 0 h 679010"/>
+                  <a:gd name="connsiteX0" fmla="*/ 0 w 9967865"/>
+                  <a:gd name="connsiteY0" fmla="*/ 0 h 686788"/>
+                  <a:gd name="connsiteX1" fmla="*/ 9967865 w 9967865"/>
+                  <a:gd name="connsiteY1" fmla="*/ 0 h 686788"/>
+                  <a:gd name="connsiteX2" fmla="*/ 9086239 w 9967865"/>
+                  <a:gd name="connsiteY2" fmla="*/ 686788 h 686788"/>
+                  <a:gd name="connsiteX3" fmla="*/ 0 w 9967865"/>
+                  <a:gd name="connsiteY3" fmla="*/ 679010 h 686788"/>
+                  <a:gd name="connsiteX4" fmla="*/ 0 w 9967865"/>
+                  <a:gd name="connsiteY4" fmla="*/ 0 h 686788"/>
+                  <a:gd name="connsiteX0" fmla="*/ 0 w 9967865"/>
+                  <a:gd name="connsiteY0" fmla="*/ 0 h 750734"/>
+                  <a:gd name="connsiteX1" fmla="*/ 9967865 w 9967865"/>
+                  <a:gd name="connsiteY1" fmla="*/ 0 h 750734"/>
+                  <a:gd name="connsiteX2" fmla="*/ 9086239 w 9967865"/>
+                  <a:gd name="connsiteY2" fmla="*/ 686788 h 750734"/>
+                  <a:gd name="connsiteX3" fmla="*/ 422409 w 9967865"/>
+                  <a:gd name="connsiteY3" fmla="*/ 750734 h 750734"/>
+                  <a:gd name="connsiteX4" fmla="*/ 0 w 9967865"/>
+                  <a:gd name="connsiteY4" fmla="*/ 0 h 750734"/>
+                  <a:gd name="connsiteX0" fmla="*/ 0 w 9967865"/>
+                  <a:gd name="connsiteY0" fmla="*/ 0 h 688791"/>
+                  <a:gd name="connsiteX1" fmla="*/ 9967865 w 9967865"/>
+                  <a:gd name="connsiteY1" fmla="*/ 0 h 688791"/>
+                  <a:gd name="connsiteX2" fmla="*/ 9086239 w 9967865"/>
+                  <a:gd name="connsiteY2" fmla="*/ 686788 h 688791"/>
+                  <a:gd name="connsiteX3" fmla="*/ 4224 w 9967865"/>
+                  <a:gd name="connsiteY3" fmla="*/ 688791 h 688791"/>
+                  <a:gd name="connsiteX4" fmla="*/ 0 w 9967865"/>
+                  <a:gd name="connsiteY4" fmla="*/ 0 h 688791"/>
+                  <a:gd name="connsiteX0" fmla="*/ 0 w 9967865"/>
+                  <a:gd name="connsiteY0" fmla="*/ 0 h 688791"/>
+                  <a:gd name="connsiteX1" fmla="*/ 9967865 w 9967865"/>
+                  <a:gd name="connsiteY1" fmla="*/ 0 h 688791"/>
+                  <a:gd name="connsiteX2" fmla="*/ 9318564 w 9967865"/>
+                  <a:gd name="connsiteY2" fmla="*/ 634624 h 688791"/>
+                  <a:gd name="connsiteX3" fmla="*/ 4224 w 9967865"/>
+                  <a:gd name="connsiteY3" fmla="*/ 688791 h 688791"/>
+                  <a:gd name="connsiteX4" fmla="*/ 0 w 9967865"/>
+                  <a:gd name="connsiteY4" fmla="*/ 0 h 688791"/>
+                  <a:gd name="connsiteX0" fmla="*/ 0 w 9967865"/>
+                  <a:gd name="connsiteY0" fmla="*/ 0 h 688791"/>
+                  <a:gd name="connsiteX1" fmla="*/ 9967865 w 9967865"/>
+                  <a:gd name="connsiteY1" fmla="*/ 0 h 688791"/>
+                  <a:gd name="connsiteX2" fmla="*/ 9001757 w 9967865"/>
+                  <a:gd name="connsiteY2" fmla="*/ 683527 h 688791"/>
+                  <a:gd name="connsiteX3" fmla="*/ 4224 w 9967865"/>
+                  <a:gd name="connsiteY3" fmla="*/ 688791 h 688791"/>
+                  <a:gd name="connsiteX4" fmla="*/ 0 w 9967865"/>
+                  <a:gd name="connsiteY4" fmla="*/ 0 h 688791"/>
+                  <a:gd name="connsiteX0" fmla="*/ 0 w 9967865"/>
+                  <a:gd name="connsiteY0" fmla="*/ 0 h 688791"/>
+                  <a:gd name="connsiteX1" fmla="*/ 9967865 w 9967865"/>
+                  <a:gd name="connsiteY1" fmla="*/ 0 h 688791"/>
+                  <a:gd name="connsiteX2" fmla="*/ 8929948 w 9967865"/>
+                  <a:gd name="connsiteY2" fmla="*/ 686788 h 688791"/>
+                  <a:gd name="connsiteX3" fmla="*/ 4224 w 9967865"/>
+                  <a:gd name="connsiteY3" fmla="*/ 688791 h 688791"/>
+                  <a:gd name="connsiteX4" fmla="*/ 0 w 9967865"/>
+                  <a:gd name="connsiteY4" fmla="*/ 0 h 688791"/>
+                  <a:gd name="connsiteX0" fmla="*/ 0 w 9967865"/>
+                  <a:gd name="connsiteY0" fmla="*/ 0 h 774813"/>
+                  <a:gd name="connsiteX1" fmla="*/ 9967865 w 9967865"/>
+                  <a:gd name="connsiteY1" fmla="*/ 0 h 774813"/>
+                  <a:gd name="connsiteX2" fmla="*/ 9153824 w 9967865"/>
+                  <a:gd name="connsiteY2" fmla="*/ 774813 h 774813"/>
+                  <a:gd name="connsiteX3" fmla="*/ 4224 w 9967865"/>
+                  <a:gd name="connsiteY3" fmla="*/ 688791 h 774813"/>
+                  <a:gd name="connsiteX4" fmla="*/ 0 w 9967865"/>
+                  <a:gd name="connsiteY4" fmla="*/ 0 h 774813"/>
+                  <a:gd name="connsiteX0" fmla="*/ 0 w 9967865"/>
+                  <a:gd name="connsiteY0" fmla="*/ 0 h 688791"/>
+                  <a:gd name="connsiteX1" fmla="*/ 9967865 w 9967865"/>
+                  <a:gd name="connsiteY1" fmla="*/ 0 h 688791"/>
+                  <a:gd name="connsiteX2" fmla="*/ 8824346 w 9967865"/>
+                  <a:gd name="connsiteY2" fmla="*/ 484656 h 688791"/>
+                  <a:gd name="connsiteX3" fmla="*/ 4224 w 9967865"/>
+                  <a:gd name="connsiteY3" fmla="*/ 688791 h 688791"/>
+                  <a:gd name="connsiteX4" fmla="*/ 0 w 9967865"/>
+                  <a:gd name="connsiteY4" fmla="*/ 0 h 688791"/>
+                  <a:gd name="connsiteX0" fmla="*/ 0 w 9967865"/>
+                  <a:gd name="connsiteY0" fmla="*/ 0 h 690048"/>
+                  <a:gd name="connsiteX1" fmla="*/ 9967865 w 9967865"/>
+                  <a:gd name="connsiteY1" fmla="*/ 0 h 690048"/>
+                  <a:gd name="connsiteX2" fmla="*/ 8760984 w 9967865"/>
+                  <a:gd name="connsiteY2" fmla="*/ 690048 h 690048"/>
+                  <a:gd name="connsiteX3" fmla="*/ 4224 w 9967865"/>
+                  <a:gd name="connsiteY3" fmla="*/ 688791 h 690048"/>
+                  <a:gd name="connsiteX4" fmla="*/ 0 w 9967865"/>
+                  <a:gd name="connsiteY4" fmla="*/ 0 h 690048"/>
+                </a:gdLst>
+                <a:ahLst/>
+                <a:cxnLst>
+                  <a:cxn ang="0">
+                    <a:pos x="connsiteX0" y="connsiteY0"/>
+                  </a:cxn>
+                  <a:cxn ang="0">
+                    <a:pos x="connsiteX1" y="connsiteY1"/>
+                  </a:cxn>
+                  <a:cxn ang="0">
+                    <a:pos x="connsiteX2" y="connsiteY2"/>
+                  </a:cxn>
+                  <a:cxn ang="0">
+                    <a:pos x="connsiteX3" y="connsiteY3"/>
+                  </a:cxn>
+                  <a:cxn ang="0">
+                    <a:pos x="connsiteX4" y="connsiteY4"/>
+                  </a:cxn>
+                </a:cxnLst>
+                <a:rect l="l" t="t" r="r" b="b"/>
+                <a:pathLst>
+                  <a:path w="9967865" h="690048">
+                    <a:moveTo>
+                      <a:pt x="0" y="0"/>
+                    </a:moveTo>
+                    <a:lnTo>
+                      <a:pt x="9967865" y="0"/>
+                    </a:lnTo>
+                    <a:lnTo>
+                      <a:pt x="8760984" y="690048"/>
+                    </a:lnTo>
+                    <a:lnTo>
+                      <a:pt x="4224" y="688791"/>
+                    </a:lnTo>
+                    <a:lnTo>
+                      <a:pt x="0" y="0"/>
+                    </a:lnTo>
+                    <a:close/>
+                  </a:path>
+                </a:pathLst>
+              </a:custGeom>
+              <a:solidFill>
+                <a:srgbClr val="0070C0"/>
+              </a:solidFill>
+              <a:ln>
+                <a:noFill/>
+              </a:ln>
+            </p:spPr>
+            <p:style>
+              <a:lnRef idx="2">
+                <a:schemeClr val="accent1">
+                  <a:shade val="50000"/>
+                </a:schemeClr>
+              </a:lnRef>
+              <a:fillRef idx="1">
+                <a:schemeClr val="accent1"/>
+              </a:fillRef>
+              <a:effectRef idx="0">
+                <a:schemeClr val="accent1"/>
+              </a:effectRef>
+              <a:fontRef idx="minor">
+                <a:schemeClr val="lt1"/>
+              </a:fontRef>
+            </p:style>
+            <p:txBody>
+              <a:bodyPr rtlCol="0" anchor="ctr"/>
+              <a:lstStyle/>
+              <a:p>
+                <a:pPr algn="ctr"/>
+                <a:endParaRPr lang="ru-RU" dirty="0"/>
+              </a:p>
+            </p:txBody>
+          </p:sp>
+        </p:grpSp>
+        <p:pic>
+          <p:nvPicPr>
+            <p:cNvPr id="10" name="Рисунок 9">
+              <a:extLst>
+                <a:ext uri="{FF2B5EF4-FFF2-40B4-BE49-F238E27FC236}">
+                  <a16:creationId xmlns:a16="http://schemas.microsoft.com/office/drawing/2014/main" id="{2D79C2DC-19FA-68B9-2435-83CCDE2630C0}"/>
+                </a:ext>
+              </a:extLst>
+            </p:cNvPr>
+            <p:cNvPicPr>
+              <a:picLocks noChangeAspect="1"/>
+            </p:cNvPicPr>
+            <p:nvPr/>
+          </p:nvPicPr>
+          <p:blipFill>
+            <a:blip r:embed="rId2" cstate="print">
+              <a:extLst>
+                <a:ext uri="{28A0092B-C50C-407E-A947-70E740481C1C}">
+                  <a14:useLocalDpi xmlns:a14="http://schemas.microsoft.com/office/drawing/2010/main" val="0"/>
+                </a:ext>
+              </a:extLst>
+            </a:blip>
+            <a:stretch>
+              <a:fillRect/>
+            </a:stretch>
+          </p:blipFill>
+          <p:spPr>
+            <a:xfrm>
+              <a:off x="7543800" y="91298"/>
+              <a:ext cx="1211316" cy="380979"/>
+            </a:xfrm>
+            <a:prstGeom prst="rect">
+              <a:avLst/>
+            </a:prstGeom>
+          </p:spPr>
+        </p:pic>
+      </p:grpSp>
+      <p:sp>
+        <p:nvSpPr>
+          <p:cNvPr id="13" name="TextBox 12">
+            <a:extLst>
+              <a:ext uri="{FF2B5EF4-FFF2-40B4-BE49-F238E27FC236}">
+                <a16:creationId xmlns:a16="http://schemas.microsoft.com/office/drawing/2014/main" id="{DE1FBE8F-94AC-12CC-8EDA-92F65DC09A92}"/>
+              </a:ext>
+            </a:extLst>
+          </p:cNvPr>
+          <p:cNvSpPr txBox="1"/>
+          <p:nvPr/>
+        </p:nvSpPr>
+        <p:spPr>
+          <a:xfrm>
+            <a:off x="724617" y="147583"/>
+            <a:ext cx="8229600" cy="268407"/>
+          </a:xfrm>
+          <a:prstGeom prst="rect">
+            <a:avLst/>
+          </a:prstGeom>
+          <a:noFill/>
+        </p:spPr>
+        <p:txBody>
+          <a:bodyPr wrap="square" rtlCol="0">
+            <a:spAutoFit/>
+          </a:bodyPr>
+          <a:lstStyle/>
+          <a:p>
+            <a:pPr>
+              <a:lnSpc>
+                <a:spcPct val="80000"/>
+              </a:lnSpc>
+            </a:pPr>
+            <a:r>
+              <a:rPr lang="ru-RU" sz="1400" dirty="0">
+                <a:solidFill>
+                  <a:schemeClr val="bg1"/>
+                </a:solidFill>
+                <a:latin typeface="Myriad Pro Black" panose="020B0803030403020204" pitchFamily="34" charset="0"/>
+              </a:rPr>
+              <a:t>Системотехнический анализ и проектирование</a:t>
+            </a:r>
+          </a:p>
+        </p:txBody>
+      </p:sp>
+      <mc:AlternateContent xmlns:mc="http://schemas.openxmlformats.org/markup-compatibility/2006">
+        <mc:Choice xmlns:a14="http://schemas.microsoft.com/office/drawing/2010/main" Requires="a14">
+          <p:sp>
+            <p:nvSpPr>
+              <p:cNvPr id="14" name="Заголовок 1">
+                <a:extLst>
+                  <a:ext uri="{FF2B5EF4-FFF2-40B4-BE49-F238E27FC236}">
+                    <a16:creationId xmlns:a16="http://schemas.microsoft.com/office/drawing/2014/main" id="{31F71CED-234C-4671-7B17-1843C061F50A}"/>
+                  </a:ext>
+                </a:extLst>
+              </p:cNvPr>
+              <p:cNvSpPr txBox="1">
+                <a:spLocks/>
+              </p:cNvSpPr>
+              <p:nvPr/>
+            </p:nvSpPr>
+            <p:spPr>
+              <a:xfrm>
+                <a:off x="1684020" y="2325528"/>
+                <a:ext cx="1341120" cy="492443"/>
+              </a:xfrm>
+              <a:prstGeom prst="rect">
+                <a:avLst/>
+              </a:prstGeom>
+            </p:spPr>
+            <p:txBody>
+              <a:bodyPr wrap="square" lIns="0" tIns="0" rIns="0" bIns="0">
+                <a:spAutoFit/>
+              </a:bodyPr>
+              <a:lstStyle>
+                <a:lvl1pPr>
+                  <a:defRPr sz="3700" b="1" i="0">
+                    <a:solidFill>
+                      <a:srgbClr val="292929"/>
+                    </a:solidFill>
+                    <a:latin typeface="Calibri"/>
+                    <a:ea typeface="+mj-ea"/>
+                    <a:cs typeface="Calibri"/>
+                  </a:defRPr>
+                </a:lvl1pPr>
+              </a:lstStyle>
+              <a:p>
+                <a14:m>
+                  <m:oMathPara xmlns:m="http://schemas.openxmlformats.org/officeDocument/2006/math">
+                    <m:oMathParaPr>
+                      <m:jc m:val="centerGroup"/>
+                    </m:oMathParaPr>
+                    <m:oMath xmlns:m="http://schemas.openxmlformats.org/officeDocument/2006/math">
+                      <m:sSub>
+                        <m:sSubPr>
+                          <m:ctrlPr>
+                            <a:rPr lang="en-US" sz="3200" b="0" i="1" kern="0" smtClean="0">
+                              <a:latin typeface="Cambria Math" panose="02040503050406030204" pitchFamily="18" charset="0"/>
+                            </a:rPr>
+                          </m:ctrlPr>
+                        </m:sSubPr>
+                        <m:e>
+                          <m:r>
+                            <a:rPr lang="en-US" sz="3200" b="0" i="1" kern="0" smtClean="0">
+                              <a:latin typeface="Cambria Math" panose="02040503050406030204" pitchFamily="18" charset="0"/>
+                            </a:rPr>
+                            <m:t>𝐶</m:t>
+                          </m:r>
+                        </m:e>
+                        <m:sub>
+                          <m:r>
+                            <a:rPr lang="en-US" sz="3200" b="0" i="1" kern="0" smtClean="0">
+                              <a:latin typeface="Cambria Math" panose="02040503050406030204" pitchFamily="18" charset="0"/>
+                            </a:rPr>
+                            <m:t>𝑚𝑎𝑥</m:t>
+                          </m:r>
+                        </m:sub>
+                      </m:sSub>
+                    </m:oMath>
+                  </m:oMathPara>
+                </a14:m>
+                <a:endParaRPr lang="ru-RU" sz="3200" b="0" kern="0" dirty="0"/>
+              </a:p>
+            </p:txBody>
+          </p:sp>
+        </mc:Choice>
+        <mc:Fallback>
+          <p:sp>
+            <p:nvSpPr>
+              <p:cNvPr id="14" name="Заголовок 1">
+                <a:extLst>
+                  <a:ext uri="{FF2B5EF4-FFF2-40B4-BE49-F238E27FC236}">
+                    <a16:creationId xmlns:a16="http://schemas.microsoft.com/office/drawing/2014/main" id="{31F71CED-234C-4671-7B17-1843C061F50A}"/>
+                  </a:ext>
+                </a:extLst>
+              </p:cNvPr>
+              <p:cNvSpPr txBox="1">
+                <a:spLocks noRot="1" noChangeAspect="1" noMove="1" noResize="1" noEditPoints="1" noAdjustHandles="1" noChangeArrowheads="1" noChangeShapeType="1" noTextEdit="1"/>
+              </p:cNvSpPr>
+              <p:nvPr/>
+            </p:nvSpPr>
+            <p:spPr>
+              <a:xfrm>
+                <a:off x="1684020" y="2325528"/>
+                <a:ext cx="1341120" cy="492443"/>
+              </a:xfrm>
+              <a:prstGeom prst="rect">
+                <a:avLst/>
+              </a:prstGeom>
+              <a:blipFill>
+                <a:blip r:embed="rId3"/>
+                <a:stretch>
+                  <a:fillRect/>
+                </a:stretch>
+              </a:blipFill>
+            </p:spPr>
+            <p:txBody>
+              <a:bodyPr/>
+              <a:lstStyle/>
+              <a:p>
+                <a:r>
+                  <a:rPr lang="ru-RU">
+                    <a:noFill/>
+                  </a:rPr>
+                  <a:t> </a:t>
+                </a:r>
+              </a:p>
+            </p:txBody>
+          </p:sp>
+        </mc:Fallback>
+      </mc:AlternateContent>
+      <mc:AlternateContent xmlns:mc="http://schemas.openxmlformats.org/markup-compatibility/2006">
+        <mc:Choice xmlns:a14="http://schemas.microsoft.com/office/drawing/2010/main" Requires="a14">
+          <p:sp>
+            <p:nvSpPr>
+              <p:cNvPr id="16" name="Заголовок 1">
+                <a:extLst>
+                  <a:ext uri="{FF2B5EF4-FFF2-40B4-BE49-F238E27FC236}">
+                    <a16:creationId xmlns:a16="http://schemas.microsoft.com/office/drawing/2014/main" id="{CBBAA9C4-4A6C-DF10-9263-AFAAD65B71A8}"/>
+                  </a:ext>
+                </a:extLst>
+              </p:cNvPr>
+              <p:cNvSpPr txBox="1">
+                <a:spLocks/>
+              </p:cNvSpPr>
+              <p:nvPr/>
+            </p:nvSpPr>
+            <p:spPr>
+              <a:xfrm>
+                <a:off x="5448302" y="2326956"/>
+                <a:ext cx="1341120" cy="492443"/>
+              </a:xfrm>
+              <a:prstGeom prst="rect">
+                <a:avLst/>
+              </a:prstGeom>
+            </p:spPr>
+            <p:txBody>
+              <a:bodyPr wrap="square" lIns="0" tIns="0" rIns="0" bIns="0">
+                <a:spAutoFit/>
+              </a:bodyPr>
+              <a:lstStyle>
+                <a:lvl1pPr>
+                  <a:defRPr sz="3700" b="1" i="0">
+                    <a:solidFill>
+                      <a:srgbClr val="292929"/>
+                    </a:solidFill>
+                    <a:latin typeface="Calibri"/>
+                    <a:ea typeface="+mj-ea"/>
+                    <a:cs typeface="Calibri"/>
+                  </a:defRPr>
+                </a:lvl1pPr>
+              </a:lstStyle>
+              <a:p>
+                <a14:m>
+                  <m:oMathPara xmlns:m="http://schemas.openxmlformats.org/officeDocument/2006/math">
+                    <m:oMathParaPr>
+                      <m:jc m:val="centerGroup"/>
+                    </m:oMathParaPr>
+                    <m:oMath xmlns:m="http://schemas.openxmlformats.org/officeDocument/2006/math">
+                      <m:r>
+                        <a:rPr lang="en-US" sz="3200" b="0" i="1" kern="0" smtClean="0">
+                          <a:latin typeface="Cambria Math" panose="02040503050406030204" pitchFamily="18" charset="0"/>
+                        </a:rPr>
+                        <m:t>𝐺</m:t>
+                      </m:r>
+                    </m:oMath>
+                  </m:oMathPara>
+                </a14:m>
+                <a:endParaRPr lang="ru-RU" sz="3200" b="0" kern="0" dirty="0"/>
+              </a:p>
+            </p:txBody>
+          </p:sp>
+        </mc:Choice>
+        <mc:Fallback>
+          <p:sp>
+            <p:nvSpPr>
+              <p:cNvPr id="16" name="Заголовок 1">
+                <a:extLst>
+                  <a:ext uri="{FF2B5EF4-FFF2-40B4-BE49-F238E27FC236}">
+                    <a16:creationId xmlns:a16="http://schemas.microsoft.com/office/drawing/2014/main" id="{CBBAA9C4-4A6C-DF10-9263-AFAAD65B71A8}"/>
+                  </a:ext>
+                </a:extLst>
+              </p:cNvPr>
+              <p:cNvSpPr txBox="1">
+                <a:spLocks noRot="1" noChangeAspect="1" noMove="1" noResize="1" noEditPoints="1" noAdjustHandles="1" noChangeArrowheads="1" noChangeShapeType="1" noTextEdit="1"/>
+              </p:cNvSpPr>
+              <p:nvPr/>
+            </p:nvSpPr>
+            <p:spPr>
+              <a:xfrm>
+                <a:off x="5448302" y="2326956"/>
+                <a:ext cx="1341120" cy="492443"/>
+              </a:xfrm>
+              <a:prstGeom prst="rect">
+                <a:avLst/>
+              </a:prstGeom>
+              <a:blipFill>
+                <a:blip r:embed="rId4"/>
+                <a:stretch>
+                  <a:fillRect/>
+                </a:stretch>
+              </a:blipFill>
+            </p:spPr>
+            <p:txBody>
+              <a:bodyPr/>
+              <a:lstStyle/>
+              <a:p>
+                <a:r>
+                  <a:rPr lang="ru-RU">
+                    <a:noFill/>
+                  </a:rPr>
+                  <a:t> </a:t>
+                </a:r>
+              </a:p>
+            </p:txBody>
+          </p:sp>
+        </mc:Fallback>
+      </mc:AlternateContent>
+      <p:cxnSp>
+        <p:nvCxnSpPr>
+          <p:cNvPr id="19" name="Прямая со стрелкой 18">
+            <a:extLst>
+              <a:ext uri="{FF2B5EF4-FFF2-40B4-BE49-F238E27FC236}">
+                <a16:creationId xmlns:a16="http://schemas.microsoft.com/office/drawing/2014/main" id="{BE770338-2692-5544-72E8-59991470F39C}"/>
+              </a:ext>
+            </a:extLst>
+          </p:cNvPr>
+          <p:cNvCxnSpPr>
+            <a:cxnSpLocks/>
+          </p:cNvCxnSpPr>
+          <p:nvPr/>
+        </p:nvCxnSpPr>
+        <p:spPr>
+          <a:xfrm>
+            <a:off x="4648200" y="1699880"/>
+            <a:ext cx="1226820" cy="558165"/>
+          </a:xfrm>
+          <a:prstGeom prst="straightConnector1">
+            <a:avLst/>
+          </a:prstGeom>
+          <a:ln>
+            <a:tailEnd type="triangle"/>
+          </a:ln>
+        </p:spPr>
+        <p:style>
+          <a:lnRef idx="1">
+            <a:schemeClr val="dk1"/>
+          </a:lnRef>
+          <a:fillRef idx="0">
+            <a:schemeClr val="dk1"/>
+          </a:fillRef>
+          <a:effectRef idx="0">
+            <a:schemeClr val="dk1"/>
+          </a:effectRef>
+          <a:fontRef idx="minor">
+            <a:schemeClr val="tx1"/>
+          </a:fontRef>
+        </p:style>
+      </p:cxnSp>
+      <p:sp>
+        <p:nvSpPr>
+          <p:cNvPr id="33" name="Заголовок 1">
+            <a:extLst>
+              <a:ext uri="{FF2B5EF4-FFF2-40B4-BE49-F238E27FC236}">
+                <a16:creationId xmlns:a16="http://schemas.microsoft.com/office/drawing/2014/main" id="{6ACDA45A-95FC-BC4E-A410-68B0C90F0559}"/>
+              </a:ext>
+            </a:extLst>
+          </p:cNvPr>
+          <p:cNvSpPr txBox="1">
+            <a:spLocks/>
+          </p:cNvSpPr>
+          <p:nvPr/>
+        </p:nvSpPr>
+        <p:spPr>
+          <a:xfrm>
+            <a:off x="571500" y="3060847"/>
+            <a:ext cx="3886200" cy="553998"/>
+          </a:xfrm>
+          <a:prstGeom prst="rect">
+            <a:avLst/>
+          </a:prstGeom>
+        </p:spPr>
+        <p:txBody>
+          <a:bodyPr wrap="square" lIns="0" tIns="0" rIns="0" bIns="0">
+            <a:spAutoFit/>
+          </a:bodyPr>
+          <a:lstStyle>
+            <a:lvl1pPr>
+              <a:defRPr sz="3700" b="1" i="0">
+                <a:solidFill>
+                  <a:srgbClr val="292929"/>
+                </a:solidFill>
+                <a:latin typeface="Calibri"/>
+                <a:ea typeface="+mj-ea"/>
+                <a:cs typeface="Calibri"/>
+              </a:defRPr>
+            </a:lvl1pPr>
+          </a:lstStyle>
+          <a:p>
+            <a:pPr algn="ctr"/>
+            <a:r>
+              <a:rPr lang="ru-RU" sz="1800" b="0" kern="0" dirty="0">
+                <a:latin typeface="Myriad Pro" panose="020B0503030403020204" charset="0"/>
+              </a:rPr>
+              <a:t>Оптимизация общего времени обработки заданий на конвейере</a:t>
+            </a:r>
+          </a:p>
+        </p:txBody>
+      </p:sp>
+      <p:sp>
+        <p:nvSpPr>
+          <p:cNvPr id="34" name="Заголовок 1">
+            <a:extLst>
+              <a:ext uri="{FF2B5EF4-FFF2-40B4-BE49-F238E27FC236}">
+                <a16:creationId xmlns:a16="http://schemas.microsoft.com/office/drawing/2014/main" id="{A2B4976A-8906-B175-E66C-5723E63C27B3}"/>
+              </a:ext>
+            </a:extLst>
+          </p:cNvPr>
+          <p:cNvSpPr txBox="1">
+            <a:spLocks/>
+          </p:cNvSpPr>
+          <p:nvPr/>
+        </p:nvSpPr>
+        <p:spPr>
+          <a:xfrm>
+            <a:off x="4457700" y="3060847"/>
+            <a:ext cx="3886200" cy="830997"/>
+          </a:xfrm>
+          <a:prstGeom prst="rect">
+            <a:avLst/>
+          </a:prstGeom>
+        </p:spPr>
+        <p:txBody>
+          <a:bodyPr wrap="square" lIns="0" tIns="0" rIns="0" bIns="0">
+            <a:spAutoFit/>
+          </a:bodyPr>
+          <a:lstStyle>
+            <a:lvl1pPr>
+              <a:defRPr sz="3700" b="1" i="0">
+                <a:solidFill>
+                  <a:srgbClr val="292929"/>
+                </a:solidFill>
+                <a:latin typeface="Calibri"/>
+                <a:ea typeface="+mj-ea"/>
+                <a:cs typeface="Calibri"/>
+              </a:defRPr>
+            </a:lvl1pPr>
+          </a:lstStyle>
+          <a:p>
+            <a:pPr algn="ctr"/>
+            <a:r>
+              <a:rPr lang="ru-RU" sz="1800" b="0" kern="0" dirty="0">
+                <a:latin typeface="Myriad Pro" panose="020B0503030403020204" charset="0"/>
+              </a:rPr>
+              <a:t>Оптимизация суммарного времени </a:t>
+            </a:r>
+            <a:r>
+              <a:rPr lang="ru-RU" sz="1800" kern="0" dirty="0">
+                <a:latin typeface="Myriad Pro" panose="020B0503030403020204" charset="0"/>
+              </a:rPr>
+              <a:t>запаздывания</a:t>
+            </a:r>
+            <a:r>
+              <a:rPr lang="ru-RU" sz="1800" b="0" kern="0" dirty="0">
+                <a:latin typeface="Myriad Pro" panose="020B0503030403020204" charset="0"/>
+              </a:rPr>
+              <a:t> заданий на приборах конвейера</a:t>
+            </a:r>
+          </a:p>
+        </p:txBody>
+      </p:sp>
+    </p:spTree>
+    <p:extLst>
+      <p:ext uri="{BB962C8B-B14F-4D97-AF65-F5344CB8AC3E}">
+        <p14:creationId xmlns:p14="http://schemas.microsoft.com/office/powerpoint/2010/main" val="1352675099"/>
+      </p:ext>
+    </p:extLst>
+  </p:cSld>
+  <p:clrMapOvr>
+    <a:masterClrMapping/>
+  </p:clrMapOvr>
+</p:sld>
+</file>
+
+<file path=ppt/slides/slide14.xml><?xml version="1.0" encoding="utf-8"?>
+<p:sld xmlns:a="http://schemas.openxmlformats.org/drawingml/2006/main" xmlns:r="http://schemas.openxmlformats.org/officeDocument/2006/relationships" xmlns:p="http://schemas.openxmlformats.org/presentationml/2006/main">
+  <p:cSld>
+    <p:spTree>
+      <p:nvGrpSpPr>
+        <p:cNvPr id="1" name=""/>
+        <p:cNvGrpSpPr/>
+        <p:nvPr/>
+      </p:nvGrpSpPr>
+      <p:grpSpPr>
+        <a:xfrm>
+          <a:off x="0" y="0"/>
+          <a:ext cx="0" cy="0"/>
+          <a:chOff x="0" y="0"/>
+          <a:chExt cx="0" cy="0"/>
+        </a:xfrm>
+      </p:grpSpPr>
+      <p:pic>
+        <p:nvPicPr>
+          <p:cNvPr id="3" name="Рисунок 2">
+            <a:extLst>
+              <a:ext uri="{FF2B5EF4-FFF2-40B4-BE49-F238E27FC236}">
+                <a16:creationId xmlns:a16="http://schemas.microsoft.com/office/drawing/2014/main" id="{ED966891-322F-4E28-5544-C7538FE880AF}"/>
+              </a:ext>
+            </a:extLst>
+          </p:cNvPr>
+          <p:cNvPicPr>
+            <a:picLocks noChangeAspect="1"/>
+          </p:cNvPicPr>
+          <p:nvPr/>
+        </p:nvPicPr>
+        <p:blipFill>
+          <a:blip r:embed="rId2"/>
+          <a:stretch>
+            <a:fillRect/>
+          </a:stretch>
+        </p:blipFill>
+        <p:spPr>
+          <a:xfrm>
+            <a:off x="7620" y="703384"/>
+            <a:ext cx="9144000" cy="3736731"/>
+          </a:xfrm>
+          <a:prstGeom prst="rect">
+            <a:avLst/>
+          </a:prstGeom>
+        </p:spPr>
+      </p:pic>
+    </p:spTree>
+    <p:extLst>
+      <p:ext uri="{BB962C8B-B14F-4D97-AF65-F5344CB8AC3E}">
+        <p14:creationId xmlns:p14="http://schemas.microsoft.com/office/powerpoint/2010/main" val="3387903545"/>
+      </p:ext>
+    </p:extLst>
+  </p:cSld>
+  <p:clrMapOvr>
+    <a:masterClrMapping/>
+  </p:clrMapOvr>
+</p:sld>
+</file>
+
+<file path=ppt/slides/slide15.xml><?xml version="1.0" encoding="utf-8"?>
+<p:sld xmlns:a="http://schemas.openxmlformats.org/drawingml/2006/main" xmlns:r="http://schemas.openxmlformats.org/officeDocument/2006/relationships" xmlns:p="http://schemas.openxmlformats.org/presentationml/2006/main">
+  <p:cSld>
+    <p:spTree>
+      <p:nvGrpSpPr>
+        <p:cNvPr id="1" name=""/>
+        <p:cNvGrpSpPr/>
+        <p:nvPr/>
+      </p:nvGrpSpPr>
+      <p:grpSpPr>
+        <a:xfrm>
+          <a:off x="0" y="0"/>
+          <a:ext cx="0" cy="0"/>
+          <a:chOff x="0" y="0"/>
+          <a:chExt cx="0" cy="0"/>
+        </a:xfrm>
+      </p:grpSpPr>
+      <p:sp>
+        <p:nvSpPr>
+          <p:cNvPr id="2" name="Заголовок 1">
+            <a:extLst>
+              <a:ext uri="{FF2B5EF4-FFF2-40B4-BE49-F238E27FC236}">
+                <a16:creationId xmlns:a16="http://schemas.microsoft.com/office/drawing/2014/main" id="{27109A04-86FB-1FE6-7C70-BEE1F7B4B4CA}"/>
+              </a:ext>
+            </a:extLst>
+          </p:cNvPr>
+          <p:cNvSpPr>
+            <a:spLocks noGrp="1"/>
+          </p:cNvSpPr>
+          <p:nvPr>
+            <p:ph type="title"/>
+          </p:nvPr>
+        </p:nvSpPr>
+        <p:spPr>
+          <a:xfrm>
+            <a:off x="1143000" y="1428750"/>
+            <a:ext cx="6252600" cy="276999"/>
+          </a:xfrm>
+        </p:spPr>
+        <p:txBody>
+          <a:bodyPr/>
+          <a:lstStyle/>
+          <a:p>
+            <a:pPr marL="285750" indent="-285750" algn="l">
+              <a:buFont typeface="Wingdings" panose="05000000000000000000" pitchFamily="2" charset="2"/>
+              <a:buChar char="q"/>
+            </a:pPr>
+            <a:r>
+              <a:rPr lang="ru-RU" sz="1800" b="0" dirty="0">
+                <a:latin typeface="Myriad Pro" panose="020B0503030403020204" charset="0"/>
+              </a:rPr>
+              <a:t>Анализ алгоритма функционирования</a:t>
+            </a:r>
+          </a:p>
+        </p:txBody>
+      </p:sp>
+      <p:sp>
+        <p:nvSpPr>
+          <p:cNvPr id="3" name="Текст 2">
+            <a:extLst>
+              <a:ext uri="{FF2B5EF4-FFF2-40B4-BE49-F238E27FC236}">
+                <a16:creationId xmlns:a16="http://schemas.microsoft.com/office/drawing/2014/main" id="{410036A5-2F33-5A4E-E7CD-40F2B7ED751A}"/>
+              </a:ext>
+            </a:extLst>
+          </p:cNvPr>
+          <p:cNvSpPr>
+            <a:spLocks noGrp="1"/>
+          </p:cNvSpPr>
+          <p:nvPr>
+            <p:ph type="body" idx="1"/>
+          </p:nvPr>
+        </p:nvSpPr>
+        <p:spPr>
+          <a:xfrm>
+            <a:off x="609600" y="732368"/>
+            <a:ext cx="6252600" cy="569387"/>
+          </a:xfrm>
+        </p:spPr>
+        <p:txBody>
+          <a:bodyPr/>
+          <a:lstStyle/>
+          <a:p>
+            <a:r>
+              <a:rPr lang="ru-RU" dirty="0">
+                <a:latin typeface="Myriad Pro Black" panose="020B0803030403020204" charset="0"/>
+              </a:rPr>
+              <a:t>Результаты</a:t>
+            </a:r>
+            <a:r>
+              <a:rPr lang="ru-RU" dirty="0"/>
+              <a:t>:</a:t>
+            </a:r>
+          </a:p>
+        </p:txBody>
+      </p:sp>
+      <p:sp>
+        <p:nvSpPr>
+          <p:cNvPr id="4" name="Заголовок 1">
+            <a:extLst>
+              <a:ext uri="{FF2B5EF4-FFF2-40B4-BE49-F238E27FC236}">
+                <a16:creationId xmlns:a16="http://schemas.microsoft.com/office/drawing/2014/main" id="{CD0CD54B-A5BC-DD62-0D41-77D720542E81}"/>
+              </a:ext>
+            </a:extLst>
+          </p:cNvPr>
+          <p:cNvSpPr txBox="1">
+            <a:spLocks/>
+          </p:cNvSpPr>
+          <p:nvPr/>
+        </p:nvSpPr>
+        <p:spPr>
+          <a:xfrm>
+            <a:off x="1135380" y="1978938"/>
+            <a:ext cx="6252600" cy="276999"/>
+          </a:xfrm>
+          <a:prstGeom prst="rect">
+            <a:avLst/>
+          </a:prstGeom>
+        </p:spPr>
+        <p:txBody>
+          <a:bodyPr wrap="square" lIns="0" tIns="0" rIns="0" bIns="0">
+            <a:spAutoFit/>
+          </a:bodyPr>
+          <a:lstStyle>
+            <a:lvl1pPr>
+              <a:defRPr sz="3700" b="1" i="0">
+                <a:solidFill>
+                  <a:srgbClr val="292929"/>
+                </a:solidFill>
+                <a:latin typeface="Calibri"/>
+                <a:ea typeface="+mj-ea"/>
+                <a:cs typeface="Calibri"/>
+              </a:defRPr>
+            </a:lvl1pPr>
+          </a:lstStyle>
+          <a:p>
+            <a:pPr marL="285750" indent="-285750" algn="l">
+              <a:buFont typeface="Wingdings" panose="05000000000000000000" pitchFamily="2" charset="2"/>
+              <a:buChar char="q"/>
+            </a:pPr>
+            <a:r>
+              <a:rPr lang="ru-RU" sz="1800" b="0" kern="0" dirty="0">
+                <a:latin typeface="Myriad Pro" panose="020B0503030403020204" charset="0"/>
+              </a:rPr>
+              <a:t>Структура системы через контекстные диаграммы</a:t>
+            </a:r>
+          </a:p>
+        </p:txBody>
+      </p:sp>
+      <p:sp>
+        <p:nvSpPr>
+          <p:cNvPr id="5" name="Заголовок 1">
+            <a:extLst>
+              <a:ext uri="{FF2B5EF4-FFF2-40B4-BE49-F238E27FC236}">
+                <a16:creationId xmlns:a16="http://schemas.microsoft.com/office/drawing/2014/main" id="{FED60446-66A9-9B7D-D0BA-C90651439688}"/>
+              </a:ext>
+            </a:extLst>
+          </p:cNvPr>
+          <p:cNvSpPr txBox="1">
+            <a:spLocks/>
+          </p:cNvSpPr>
+          <p:nvPr/>
+        </p:nvSpPr>
+        <p:spPr>
+          <a:xfrm>
+            <a:off x="1158240" y="2529126"/>
+            <a:ext cx="6252600" cy="276999"/>
+          </a:xfrm>
+          <a:prstGeom prst="rect">
+            <a:avLst/>
+          </a:prstGeom>
+        </p:spPr>
+        <p:txBody>
+          <a:bodyPr wrap="square" lIns="0" tIns="0" rIns="0" bIns="0">
+            <a:spAutoFit/>
+          </a:bodyPr>
+          <a:lstStyle>
+            <a:lvl1pPr>
+              <a:defRPr sz="3700" b="1" i="0">
+                <a:solidFill>
+                  <a:srgbClr val="292929"/>
+                </a:solidFill>
+                <a:latin typeface="Calibri"/>
+                <a:ea typeface="+mj-ea"/>
+                <a:cs typeface="Calibri"/>
+              </a:defRPr>
+            </a:lvl1pPr>
+          </a:lstStyle>
+          <a:p>
+            <a:pPr marL="285750" indent="-285750" algn="l">
+              <a:buFont typeface="Wingdings" panose="05000000000000000000" pitchFamily="2" charset="2"/>
+              <a:buChar char="q"/>
+            </a:pPr>
+            <a:r>
+              <a:rPr lang="ru-RU" sz="1800" b="0" kern="0" dirty="0">
+                <a:latin typeface="Myriad Pro" panose="020B0503030403020204" charset="0"/>
+              </a:rPr>
+              <a:t>Анализ потоков данных</a:t>
+            </a:r>
+          </a:p>
+        </p:txBody>
+      </p:sp>
+      <p:sp>
+        <p:nvSpPr>
+          <p:cNvPr id="6" name="Заголовок 1">
+            <a:extLst>
+              <a:ext uri="{FF2B5EF4-FFF2-40B4-BE49-F238E27FC236}">
+                <a16:creationId xmlns:a16="http://schemas.microsoft.com/office/drawing/2014/main" id="{C72752DF-D3DC-3B1C-F376-C03EE58DCD34}"/>
+              </a:ext>
+            </a:extLst>
+          </p:cNvPr>
+          <p:cNvSpPr txBox="1">
+            <a:spLocks/>
+          </p:cNvSpPr>
+          <p:nvPr/>
+        </p:nvSpPr>
+        <p:spPr>
+          <a:xfrm>
+            <a:off x="1135380" y="3079314"/>
+            <a:ext cx="6252600" cy="276999"/>
+          </a:xfrm>
+          <a:prstGeom prst="rect">
+            <a:avLst/>
+          </a:prstGeom>
+        </p:spPr>
+        <p:txBody>
+          <a:bodyPr wrap="square" lIns="0" tIns="0" rIns="0" bIns="0">
+            <a:spAutoFit/>
+          </a:bodyPr>
+          <a:lstStyle>
+            <a:lvl1pPr>
+              <a:defRPr sz="3700" b="1" i="0">
+                <a:solidFill>
+                  <a:srgbClr val="292929"/>
+                </a:solidFill>
+                <a:latin typeface="Calibri"/>
+                <a:ea typeface="+mj-ea"/>
+                <a:cs typeface="Calibri"/>
+              </a:defRPr>
+            </a:lvl1pPr>
+          </a:lstStyle>
+          <a:p>
+            <a:pPr marL="285750" indent="-285750">
+              <a:buFont typeface="Wingdings" panose="05000000000000000000" pitchFamily="2" charset="2"/>
+              <a:buChar char="q"/>
+            </a:pPr>
+            <a:r>
+              <a:rPr lang="ru-RU" sz="1800" b="0" kern="0" dirty="0">
+                <a:latin typeface="Myriad Pro" panose="020B0503030403020204" charset="0"/>
+              </a:rPr>
+              <a:t>Архитектура (разделение функциональности на три слоя)</a:t>
+            </a:r>
+          </a:p>
+        </p:txBody>
+      </p:sp>
+      <p:sp>
+        <p:nvSpPr>
+          <p:cNvPr id="7" name="Заголовок 1">
+            <a:extLst>
+              <a:ext uri="{FF2B5EF4-FFF2-40B4-BE49-F238E27FC236}">
+                <a16:creationId xmlns:a16="http://schemas.microsoft.com/office/drawing/2014/main" id="{9FBA3CE5-A067-F40E-7233-DA74BBF4DA64}"/>
+              </a:ext>
+            </a:extLst>
+          </p:cNvPr>
+          <p:cNvSpPr txBox="1">
+            <a:spLocks/>
+          </p:cNvSpPr>
+          <p:nvPr/>
+        </p:nvSpPr>
+        <p:spPr>
+          <a:xfrm>
+            <a:off x="1143000" y="3624055"/>
+            <a:ext cx="6477000" cy="276999"/>
+          </a:xfrm>
+          <a:prstGeom prst="rect">
+            <a:avLst/>
+          </a:prstGeom>
+        </p:spPr>
+        <p:txBody>
+          <a:bodyPr wrap="square" lIns="0" tIns="0" rIns="0" bIns="0">
+            <a:spAutoFit/>
+          </a:bodyPr>
+          <a:lstStyle>
+            <a:lvl1pPr>
+              <a:defRPr sz="3700" b="1" i="0">
+                <a:solidFill>
+                  <a:srgbClr val="292929"/>
+                </a:solidFill>
+                <a:latin typeface="Calibri"/>
+                <a:ea typeface="+mj-ea"/>
+                <a:cs typeface="Calibri"/>
+              </a:defRPr>
+            </a:lvl1pPr>
+          </a:lstStyle>
+          <a:p>
+            <a:pPr marL="285750" indent="-285750">
+              <a:buFont typeface="Wingdings" panose="05000000000000000000" pitchFamily="2" charset="2"/>
+              <a:buChar char="q"/>
+            </a:pPr>
+            <a:r>
+              <a:rPr lang="ru-RU" sz="1800" b="0" kern="0" dirty="0">
+                <a:latin typeface="Myriad Pro" panose="020B0503030403020204" charset="0"/>
+              </a:rPr>
+              <a:t>Наборы входных, вспомогательных и выходных параметров</a:t>
+            </a:r>
+          </a:p>
+        </p:txBody>
+      </p:sp>
+      <p:sp>
+        <p:nvSpPr>
+          <p:cNvPr id="8" name="Заголовок 1">
+            <a:extLst>
+              <a:ext uri="{FF2B5EF4-FFF2-40B4-BE49-F238E27FC236}">
+                <a16:creationId xmlns:a16="http://schemas.microsoft.com/office/drawing/2014/main" id="{D11FF4E7-63C4-76C6-4EB9-5C8C325AFB92}"/>
+              </a:ext>
+            </a:extLst>
+          </p:cNvPr>
+          <p:cNvSpPr txBox="1">
+            <a:spLocks/>
+          </p:cNvSpPr>
+          <p:nvPr/>
+        </p:nvSpPr>
+        <p:spPr>
+          <a:xfrm>
+            <a:off x="1158240" y="4168796"/>
+            <a:ext cx="7147560" cy="553998"/>
+          </a:xfrm>
+          <a:prstGeom prst="rect">
+            <a:avLst/>
+          </a:prstGeom>
+        </p:spPr>
+        <p:txBody>
+          <a:bodyPr wrap="square" lIns="0" tIns="0" rIns="0" bIns="0">
+            <a:spAutoFit/>
+          </a:bodyPr>
+          <a:lstStyle>
+            <a:lvl1pPr>
+              <a:defRPr sz="3700" b="1" i="0">
+                <a:solidFill>
+                  <a:srgbClr val="292929"/>
+                </a:solidFill>
+                <a:latin typeface="Calibri"/>
+                <a:ea typeface="+mj-ea"/>
+                <a:cs typeface="Calibri"/>
+              </a:defRPr>
+            </a:lvl1pPr>
+          </a:lstStyle>
+          <a:p>
+            <a:pPr marL="285750" indent="-285750">
+              <a:buFont typeface="Wingdings" panose="05000000000000000000" pitchFamily="2" charset="2"/>
+              <a:buChar char="q"/>
+            </a:pPr>
+            <a:r>
+              <a:rPr lang="ru-RU" sz="1800" b="0" kern="0" dirty="0">
+                <a:latin typeface="Myriad Pro" panose="020B0503030403020204" charset="0"/>
+              </a:rPr>
+              <a:t>Математические модели </a:t>
+            </a:r>
+            <a:r>
+              <a:rPr lang="en-US" sz="1800" b="0" kern="0" dirty="0">
+                <a:latin typeface="Myriad Pro" panose="020B0503030403020204" charset="0"/>
+              </a:rPr>
+              <a:t>MILP (</a:t>
+            </a:r>
+            <a:r>
+              <a:rPr lang="ru-RU" sz="1800" b="0" kern="0" dirty="0">
+                <a:latin typeface="Myriad Pro" panose="020B0503030403020204" charset="0"/>
+              </a:rPr>
+              <a:t>критерии оптимизации и ограничения)</a:t>
+            </a:r>
+          </a:p>
+        </p:txBody>
+      </p:sp>
+      <p:grpSp>
+        <p:nvGrpSpPr>
+          <p:cNvPr id="9" name="Группа 8">
+            <a:extLst>
+              <a:ext uri="{FF2B5EF4-FFF2-40B4-BE49-F238E27FC236}">
+                <a16:creationId xmlns:a16="http://schemas.microsoft.com/office/drawing/2014/main" id="{7F9CE82A-9E51-1823-12C7-7A00E37FBCF8}"/>
+              </a:ext>
+            </a:extLst>
+          </p:cNvPr>
+          <p:cNvGrpSpPr/>
+          <p:nvPr/>
+        </p:nvGrpSpPr>
+        <p:grpSpPr>
+          <a:xfrm>
+            <a:off x="0" y="-5563"/>
+            <a:ext cx="9144000" cy="574705"/>
+            <a:chOff x="0" y="-5563"/>
+            <a:chExt cx="9144000" cy="574705"/>
+          </a:xfrm>
+        </p:grpSpPr>
+        <p:grpSp>
+          <p:nvGrpSpPr>
+            <p:cNvPr id="10" name="Группа 9">
+              <a:extLst>
+                <a:ext uri="{FF2B5EF4-FFF2-40B4-BE49-F238E27FC236}">
+                  <a16:creationId xmlns:a16="http://schemas.microsoft.com/office/drawing/2014/main" id="{B78FC011-789C-A453-014E-B3042C04472F}"/>
+                </a:ext>
+              </a:extLst>
+            </p:cNvPr>
+            <p:cNvGrpSpPr/>
+            <p:nvPr/>
+          </p:nvGrpSpPr>
+          <p:grpSpPr>
+            <a:xfrm>
+              <a:off x="0" y="-5563"/>
+              <a:ext cx="9144000" cy="574705"/>
+              <a:chOff x="-2931" y="-6103"/>
+              <a:chExt cx="12194930" cy="867688"/>
+            </a:xfrm>
+          </p:grpSpPr>
+          <p:sp>
+            <p:nvSpPr>
+              <p:cNvPr id="12" name="Прямоугольник 11">
+                <a:extLst>
+                  <a:ext uri="{FF2B5EF4-FFF2-40B4-BE49-F238E27FC236}">
+                    <a16:creationId xmlns:a16="http://schemas.microsoft.com/office/drawing/2014/main" id="{F182262C-6014-D0F6-50FB-AFD609234374}"/>
+                  </a:ext>
+                </a:extLst>
+              </p:cNvPr>
+              <p:cNvSpPr/>
+              <p:nvPr/>
+            </p:nvSpPr>
+            <p:spPr>
+              <a:xfrm>
+                <a:off x="0" y="-6103"/>
+                <a:ext cx="12191999" cy="867688"/>
+              </a:xfrm>
+              <a:prstGeom prst="rect">
+                <a:avLst/>
+              </a:prstGeom>
+              <a:solidFill>
+                <a:srgbClr val="002060"/>
+              </a:solidFill>
+              <a:ln>
+                <a:noFill/>
+              </a:ln>
+            </p:spPr>
+            <p:style>
+              <a:lnRef idx="2">
+                <a:schemeClr val="accent1">
+                  <a:shade val="50000"/>
+                </a:schemeClr>
+              </a:lnRef>
+              <a:fillRef idx="1">
+                <a:schemeClr val="accent1"/>
+              </a:fillRef>
+              <a:effectRef idx="0">
+                <a:schemeClr val="accent1"/>
+              </a:effectRef>
+              <a:fontRef idx="minor">
+                <a:schemeClr val="lt1"/>
+              </a:fontRef>
+            </p:style>
+            <p:txBody>
+              <a:bodyPr rtlCol="0" anchor="ctr"/>
+              <a:lstStyle/>
+              <a:p>
+                <a:pPr algn="ctr"/>
+                <a:endParaRPr lang="ru-RU" dirty="0"/>
+              </a:p>
+            </p:txBody>
+          </p:sp>
+          <p:sp>
+            <p:nvSpPr>
+              <p:cNvPr id="13" name="Полилиния 13">
+                <a:extLst>
+                  <a:ext uri="{FF2B5EF4-FFF2-40B4-BE49-F238E27FC236}">
+                    <a16:creationId xmlns:a16="http://schemas.microsoft.com/office/drawing/2014/main" id="{3B8B8DA5-F5C0-9D8D-92AF-320D2F6C157C}"/>
+                  </a:ext>
+                </a:extLst>
+              </p:cNvPr>
+              <p:cNvSpPr/>
+              <p:nvPr/>
+            </p:nvSpPr>
+            <p:spPr>
+              <a:xfrm>
+                <a:off x="-2931" y="-6103"/>
+                <a:ext cx="8638075" cy="867685"/>
+              </a:xfrm>
+              <a:custGeom>
+                <a:avLst/>
+                <a:gdLst>
+                  <a:gd name="connsiteX0" fmla="*/ 0 w 9967865"/>
+                  <a:gd name="connsiteY0" fmla="*/ 0 h 679010"/>
+                  <a:gd name="connsiteX1" fmla="*/ 9967865 w 9967865"/>
+                  <a:gd name="connsiteY1" fmla="*/ 0 h 679010"/>
+                  <a:gd name="connsiteX2" fmla="*/ 7659232 w 9967865"/>
+                  <a:gd name="connsiteY2" fmla="*/ 679010 h 679010"/>
+                  <a:gd name="connsiteX3" fmla="*/ 0 w 9967865"/>
+                  <a:gd name="connsiteY3" fmla="*/ 679010 h 679010"/>
+                  <a:gd name="connsiteX4" fmla="*/ 0 w 9967865"/>
+                  <a:gd name="connsiteY4" fmla="*/ 0 h 679010"/>
+                  <a:gd name="connsiteX0" fmla="*/ 0 w 9967865"/>
+                  <a:gd name="connsiteY0" fmla="*/ 0 h 686788"/>
+                  <a:gd name="connsiteX1" fmla="*/ 9967865 w 9967865"/>
+                  <a:gd name="connsiteY1" fmla="*/ 0 h 686788"/>
+                  <a:gd name="connsiteX2" fmla="*/ 9086239 w 9967865"/>
+                  <a:gd name="connsiteY2" fmla="*/ 686788 h 686788"/>
+                  <a:gd name="connsiteX3" fmla="*/ 0 w 9967865"/>
+                  <a:gd name="connsiteY3" fmla="*/ 679010 h 686788"/>
+                  <a:gd name="connsiteX4" fmla="*/ 0 w 9967865"/>
+                  <a:gd name="connsiteY4" fmla="*/ 0 h 686788"/>
+                  <a:gd name="connsiteX0" fmla="*/ 0 w 9967865"/>
+                  <a:gd name="connsiteY0" fmla="*/ 0 h 750734"/>
+                  <a:gd name="connsiteX1" fmla="*/ 9967865 w 9967865"/>
+                  <a:gd name="connsiteY1" fmla="*/ 0 h 750734"/>
+                  <a:gd name="connsiteX2" fmla="*/ 9086239 w 9967865"/>
+                  <a:gd name="connsiteY2" fmla="*/ 686788 h 750734"/>
+                  <a:gd name="connsiteX3" fmla="*/ 422409 w 9967865"/>
+                  <a:gd name="connsiteY3" fmla="*/ 750734 h 750734"/>
+                  <a:gd name="connsiteX4" fmla="*/ 0 w 9967865"/>
+                  <a:gd name="connsiteY4" fmla="*/ 0 h 750734"/>
+                  <a:gd name="connsiteX0" fmla="*/ 0 w 9967865"/>
+                  <a:gd name="connsiteY0" fmla="*/ 0 h 688791"/>
+                  <a:gd name="connsiteX1" fmla="*/ 9967865 w 9967865"/>
+                  <a:gd name="connsiteY1" fmla="*/ 0 h 688791"/>
+                  <a:gd name="connsiteX2" fmla="*/ 9086239 w 9967865"/>
+                  <a:gd name="connsiteY2" fmla="*/ 686788 h 688791"/>
+                  <a:gd name="connsiteX3" fmla="*/ 4224 w 9967865"/>
+                  <a:gd name="connsiteY3" fmla="*/ 688791 h 688791"/>
+                  <a:gd name="connsiteX4" fmla="*/ 0 w 9967865"/>
+                  <a:gd name="connsiteY4" fmla="*/ 0 h 688791"/>
+                  <a:gd name="connsiteX0" fmla="*/ 0 w 9967865"/>
+                  <a:gd name="connsiteY0" fmla="*/ 0 h 688791"/>
+                  <a:gd name="connsiteX1" fmla="*/ 9967865 w 9967865"/>
+                  <a:gd name="connsiteY1" fmla="*/ 0 h 688791"/>
+                  <a:gd name="connsiteX2" fmla="*/ 9318564 w 9967865"/>
+                  <a:gd name="connsiteY2" fmla="*/ 634624 h 688791"/>
+                  <a:gd name="connsiteX3" fmla="*/ 4224 w 9967865"/>
+                  <a:gd name="connsiteY3" fmla="*/ 688791 h 688791"/>
+                  <a:gd name="connsiteX4" fmla="*/ 0 w 9967865"/>
+                  <a:gd name="connsiteY4" fmla="*/ 0 h 688791"/>
+                  <a:gd name="connsiteX0" fmla="*/ 0 w 9967865"/>
+                  <a:gd name="connsiteY0" fmla="*/ 0 h 688791"/>
+                  <a:gd name="connsiteX1" fmla="*/ 9967865 w 9967865"/>
+                  <a:gd name="connsiteY1" fmla="*/ 0 h 688791"/>
+                  <a:gd name="connsiteX2" fmla="*/ 9001757 w 9967865"/>
+                  <a:gd name="connsiteY2" fmla="*/ 683527 h 688791"/>
+                  <a:gd name="connsiteX3" fmla="*/ 4224 w 9967865"/>
+                  <a:gd name="connsiteY3" fmla="*/ 688791 h 688791"/>
+                  <a:gd name="connsiteX4" fmla="*/ 0 w 9967865"/>
+                  <a:gd name="connsiteY4" fmla="*/ 0 h 688791"/>
+                  <a:gd name="connsiteX0" fmla="*/ 0 w 9967865"/>
+                  <a:gd name="connsiteY0" fmla="*/ 0 h 688791"/>
+                  <a:gd name="connsiteX1" fmla="*/ 9967865 w 9967865"/>
+                  <a:gd name="connsiteY1" fmla="*/ 0 h 688791"/>
+                  <a:gd name="connsiteX2" fmla="*/ 8929948 w 9967865"/>
+                  <a:gd name="connsiteY2" fmla="*/ 686788 h 688791"/>
+                  <a:gd name="connsiteX3" fmla="*/ 4224 w 9967865"/>
+                  <a:gd name="connsiteY3" fmla="*/ 688791 h 688791"/>
+                  <a:gd name="connsiteX4" fmla="*/ 0 w 9967865"/>
+                  <a:gd name="connsiteY4" fmla="*/ 0 h 688791"/>
+                  <a:gd name="connsiteX0" fmla="*/ 0 w 9967865"/>
+                  <a:gd name="connsiteY0" fmla="*/ 0 h 774813"/>
+                  <a:gd name="connsiteX1" fmla="*/ 9967865 w 9967865"/>
+                  <a:gd name="connsiteY1" fmla="*/ 0 h 774813"/>
+                  <a:gd name="connsiteX2" fmla="*/ 9153824 w 9967865"/>
+                  <a:gd name="connsiteY2" fmla="*/ 774813 h 774813"/>
+                  <a:gd name="connsiteX3" fmla="*/ 4224 w 9967865"/>
+                  <a:gd name="connsiteY3" fmla="*/ 688791 h 774813"/>
+                  <a:gd name="connsiteX4" fmla="*/ 0 w 9967865"/>
+                  <a:gd name="connsiteY4" fmla="*/ 0 h 774813"/>
+                  <a:gd name="connsiteX0" fmla="*/ 0 w 9967865"/>
+                  <a:gd name="connsiteY0" fmla="*/ 0 h 688791"/>
+                  <a:gd name="connsiteX1" fmla="*/ 9967865 w 9967865"/>
+                  <a:gd name="connsiteY1" fmla="*/ 0 h 688791"/>
+                  <a:gd name="connsiteX2" fmla="*/ 8824346 w 9967865"/>
+                  <a:gd name="connsiteY2" fmla="*/ 484656 h 688791"/>
+                  <a:gd name="connsiteX3" fmla="*/ 4224 w 9967865"/>
+                  <a:gd name="connsiteY3" fmla="*/ 688791 h 688791"/>
+                  <a:gd name="connsiteX4" fmla="*/ 0 w 9967865"/>
+                  <a:gd name="connsiteY4" fmla="*/ 0 h 688791"/>
+                  <a:gd name="connsiteX0" fmla="*/ 0 w 9967865"/>
+                  <a:gd name="connsiteY0" fmla="*/ 0 h 690048"/>
+                  <a:gd name="connsiteX1" fmla="*/ 9967865 w 9967865"/>
+                  <a:gd name="connsiteY1" fmla="*/ 0 h 690048"/>
+                  <a:gd name="connsiteX2" fmla="*/ 8760984 w 9967865"/>
+                  <a:gd name="connsiteY2" fmla="*/ 690048 h 690048"/>
+                  <a:gd name="connsiteX3" fmla="*/ 4224 w 9967865"/>
+                  <a:gd name="connsiteY3" fmla="*/ 688791 h 690048"/>
+                  <a:gd name="connsiteX4" fmla="*/ 0 w 9967865"/>
+                  <a:gd name="connsiteY4" fmla="*/ 0 h 690048"/>
+                </a:gdLst>
+                <a:ahLst/>
+                <a:cxnLst>
+                  <a:cxn ang="0">
+                    <a:pos x="connsiteX0" y="connsiteY0"/>
+                  </a:cxn>
+                  <a:cxn ang="0">
+                    <a:pos x="connsiteX1" y="connsiteY1"/>
+                  </a:cxn>
+                  <a:cxn ang="0">
+                    <a:pos x="connsiteX2" y="connsiteY2"/>
+                  </a:cxn>
+                  <a:cxn ang="0">
+                    <a:pos x="connsiteX3" y="connsiteY3"/>
+                  </a:cxn>
+                  <a:cxn ang="0">
+                    <a:pos x="connsiteX4" y="connsiteY4"/>
+                  </a:cxn>
+                </a:cxnLst>
+                <a:rect l="l" t="t" r="r" b="b"/>
+                <a:pathLst>
+                  <a:path w="9967865" h="690048">
+                    <a:moveTo>
+                      <a:pt x="0" y="0"/>
+                    </a:moveTo>
+                    <a:lnTo>
+                      <a:pt x="9967865" y="0"/>
+                    </a:lnTo>
+                    <a:lnTo>
+                      <a:pt x="8760984" y="690048"/>
+                    </a:lnTo>
+                    <a:lnTo>
+                      <a:pt x="4224" y="688791"/>
+                    </a:lnTo>
+                    <a:lnTo>
+                      <a:pt x="0" y="0"/>
+                    </a:lnTo>
+                    <a:close/>
+                  </a:path>
+                </a:pathLst>
+              </a:custGeom>
+              <a:solidFill>
+                <a:srgbClr val="0070C0"/>
+              </a:solidFill>
+              <a:ln>
+                <a:noFill/>
+              </a:ln>
+            </p:spPr>
+            <p:style>
+              <a:lnRef idx="2">
+                <a:schemeClr val="accent1">
+                  <a:shade val="50000"/>
+                </a:schemeClr>
+              </a:lnRef>
+              <a:fillRef idx="1">
+                <a:schemeClr val="accent1"/>
+              </a:fillRef>
+              <a:effectRef idx="0">
+                <a:schemeClr val="accent1"/>
+              </a:effectRef>
+              <a:fontRef idx="minor">
+                <a:schemeClr val="lt1"/>
+              </a:fontRef>
+            </p:style>
+            <p:txBody>
+              <a:bodyPr rtlCol="0" anchor="ctr"/>
+              <a:lstStyle/>
+              <a:p>
+                <a:pPr algn="ctr"/>
+                <a:endParaRPr lang="ru-RU" dirty="0"/>
+              </a:p>
+            </p:txBody>
+          </p:sp>
+        </p:grpSp>
+        <p:pic>
+          <p:nvPicPr>
+            <p:cNvPr id="11" name="Рисунок 10">
+              <a:extLst>
+                <a:ext uri="{FF2B5EF4-FFF2-40B4-BE49-F238E27FC236}">
+                  <a16:creationId xmlns:a16="http://schemas.microsoft.com/office/drawing/2014/main" id="{A7DC5B9D-0CE9-89BB-B678-7C3C45CEEB95}"/>
+                </a:ext>
+              </a:extLst>
+            </p:cNvPr>
+            <p:cNvPicPr>
+              <a:picLocks noChangeAspect="1"/>
+            </p:cNvPicPr>
+            <p:nvPr/>
+          </p:nvPicPr>
+          <p:blipFill>
+            <a:blip r:embed="rId2" cstate="print">
+              <a:extLst>
+                <a:ext uri="{28A0092B-C50C-407E-A947-70E740481C1C}">
+                  <a14:useLocalDpi xmlns:a14="http://schemas.microsoft.com/office/drawing/2010/main" val="0"/>
+                </a:ext>
+              </a:extLst>
+            </a:blip>
+            <a:stretch>
+              <a:fillRect/>
+            </a:stretch>
+          </p:blipFill>
+          <p:spPr>
+            <a:xfrm>
+              <a:off x="7543800" y="91298"/>
+              <a:ext cx="1211316" cy="380979"/>
+            </a:xfrm>
+            <a:prstGeom prst="rect">
+              <a:avLst/>
+            </a:prstGeom>
+          </p:spPr>
+        </p:pic>
+      </p:grpSp>
+      <p:sp>
+        <p:nvSpPr>
+          <p:cNvPr id="14" name="TextBox 13">
+            <a:extLst>
+              <a:ext uri="{FF2B5EF4-FFF2-40B4-BE49-F238E27FC236}">
+                <a16:creationId xmlns:a16="http://schemas.microsoft.com/office/drawing/2014/main" id="{1C0F3133-43A9-2E40-982F-0D67A553D114}"/>
+              </a:ext>
+            </a:extLst>
+          </p:cNvPr>
+          <p:cNvSpPr txBox="1"/>
+          <p:nvPr/>
+        </p:nvSpPr>
+        <p:spPr>
+          <a:xfrm>
+            <a:off x="724617" y="147583"/>
+            <a:ext cx="8229600" cy="268407"/>
+          </a:xfrm>
+          <a:prstGeom prst="rect">
+            <a:avLst/>
+          </a:prstGeom>
+          <a:noFill/>
+        </p:spPr>
+        <p:txBody>
+          <a:bodyPr wrap="square" rtlCol="0">
+            <a:spAutoFit/>
+          </a:bodyPr>
+          <a:lstStyle/>
+          <a:p>
+            <a:pPr>
+              <a:lnSpc>
+                <a:spcPct val="80000"/>
+              </a:lnSpc>
+            </a:pPr>
+            <a:r>
+              <a:rPr lang="ru-RU" sz="1400" dirty="0">
+                <a:solidFill>
+                  <a:schemeClr val="bg1"/>
+                </a:solidFill>
+                <a:latin typeface="Myriad Pro Black" panose="020B0803030403020204" pitchFamily="34" charset="0"/>
+              </a:rPr>
+              <a:t>Системотехнический анализ и проектирование</a:t>
+            </a:r>
+          </a:p>
+        </p:txBody>
+      </p:sp>
+    </p:spTree>
+    <p:extLst>
+      <p:ext uri="{BB962C8B-B14F-4D97-AF65-F5344CB8AC3E}">
+        <p14:creationId xmlns:p14="http://schemas.microsoft.com/office/powerpoint/2010/main" val="1409615053"/>
+      </p:ext>
+    </p:extLst>
+  </p:cSld>
+  <p:clrMapOvr>
+    <a:masterClrMapping/>
+  </p:clrMapOvr>
+</p:sld>
+</file>
+
+<file path=ppt/slides/slide16.xml><?xml version="1.0" encoding="utf-8"?>
 <p:sld xmlns:a="http://schemas.openxmlformats.org/drawingml/2006/main" xmlns:r="http://schemas.openxmlformats.org/officeDocument/2006/relationships" xmlns:p="http://schemas.openxmlformats.org/presentationml/2006/main" showMasterSp="0">
   <p:cSld>
     <p:spTree>
@@ -3164,7 +5953,7 @@
         <p:spPr>
           <a:xfrm>
             <a:off x="724617" y="782411"/>
-            <a:ext cx="6555301" cy="1138773"/>
+            <a:ext cx="7352583" cy="1138773"/>
           </a:xfrm>
         </p:spPr>
         <p:txBody>
@@ -3172,7 +5961,9 @@
           <a:lstStyle/>
           <a:p>
             <a:r>
-              <a:rPr lang="ru-RU" dirty="0"/>
+              <a:rPr lang="ru-RU" dirty="0">
+                <a:latin typeface="Myriad Pro Black" panose="020B0803030403020204" charset="0"/>
+              </a:rPr>
               <a:t>Функциональная модель IDEF0 </a:t>
             </a:r>
           </a:p>
@@ -4295,7 +7086,7 @@
         </p:nvSpPr>
         <p:spPr>
           <a:xfrm>
-            <a:off x="382920" y="819150"/>
+            <a:off x="389337" y="819150"/>
             <a:ext cx="8534400" cy="553998"/>
           </a:xfrm>
         </p:spPr>
@@ -4304,8 +7095,16 @@
           <a:lstStyle/>
           <a:p>
             <a:r>
-              <a:rPr lang="ru-RU" sz="3600" b="1" dirty="0"/>
-              <a:t>Обобщённый алгоритм работы</a:t>
+              <a:rPr lang="ru-RU" sz="3200" b="1" dirty="0">
+                <a:latin typeface="Myriad Pro Black" panose="020B0803030403020204" charset="0"/>
+              </a:rPr>
+              <a:t>Обобщённый</a:t>
+            </a:r>
+            <a:r>
+              <a:rPr lang="ru-RU" sz="3600" b="1" dirty="0">
+                <a:latin typeface="Myriad Pro Black" panose="020B0803030403020204" charset="0"/>
+              </a:rPr>
+              <a:t> алгоритм работы</a:t>
             </a:r>
           </a:p>
         </p:txBody>
@@ -4372,43 +7171,10 @@
       </p:grpSpPr>
       <p:sp>
         <p:nvSpPr>
-          <p:cNvPr id="2" name="Заголовок 1">
-            <a:extLst>
-              <a:ext uri="{FF2B5EF4-FFF2-40B4-BE49-F238E27FC236}">
-                <a16:creationId xmlns:a16="http://schemas.microsoft.com/office/drawing/2014/main" id="{F8F4CC6D-2A91-03D6-CEC7-C60694B19630}"/>
-              </a:ext>
-            </a:extLst>
-          </p:cNvPr>
-          <p:cNvSpPr>
-            <a:spLocks noGrp="1"/>
-          </p:cNvSpPr>
-          <p:nvPr>
-            <p:ph type="title"/>
-          </p:nvPr>
-        </p:nvSpPr>
-        <p:spPr>
-          <a:xfrm>
-            <a:off x="533400" y="648068"/>
-            <a:ext cx="6252600" cy="569387"/>
-          </a:xfrm>
-        </p:spPr>
-        <p:txBody>
-          <a:bodyPr/>
-          <a:lstStyle/>
-          <a:p>
-            <a:r>
-              <a:rPr lang="ru-RU" dirty="0"/>
-              <a:t>Архитектура системы</a:t>
-            </a:r>
-          </a:p>
-        </p:txBody>
-      </p:sp>
-      <p:sp>
-        <p:nvSpPr>
           <p:cNvPr id="3" name="Текст 2">
             <a:extLst>
               <a:ext uri="{FF2B5EF4-FFF2-40B4-BE49-F238E27FC236}">
-                <a16:creationId xmlns:a16="http://schemas.microsoft.com/office/drawing/2014/main" id="{0AAA3DCA-BC45-0F6A-F934-D00979FCA7FB}"/>
+                <a16:creationId xmlns:a16="http://schemas.microsoft.com/office/drawing/2014/main" id="{2B2E4340-022F-9FE4-827C-89B9D9C286E7}"/>
               </a:ext>
             </a:extLst>
           </p:cNvPr>
@@ -4421,66 +7187,20 @@
         </p:nvSpPr>
         <p:spPr>
           <a:xfrm>
-            <a:off x="533400" y="1428750"/>
-            <a:ext cx="5868243" cy="3323987"/>
+            <a:off x="2286000" y="4328160"/>
+            <a:ext cx="7391400" cy="430887"/>
           </a:xfrm>
         </p:spPr>
         <p:txBody>
           <a:bodyPr/>
           <a:lstStyle/>
           <a:p>
-            <a:pPr lvl="0"/>
             <a:r>
-              <a:rPr lang="ru-RU" sz="1800" dirty="0"/>
-              <a:t>1) Представление: </a:t>
+              <a:rPr lang="ru-RU" sz="2800" dirty="0">
+                <a:latin typeface="Myriad Pro Black" panose="020B0803030403020204" charset="0"/>
+              </a:rPr>
+              <a:t>Алгоритм функционирования</a:t>
             </a:r>
-            <a:r>
-              <a:rPr lang="ru-RU" sz="1800" b="0" dirty="0"/>
-              <a:t>интерфейс пользователя. Отображение экранных форм и информации. Отрисовка диаграммы;</a:t>
-            </a:r>
-          </a:p>
-          <a:p>
-            <a:pPr lvl="0"/>
-            <a:endParaRPr lang="ru-RU" sz="1800" dirty="0"/>
-          </a:p>
-          <a:p>
-            <a:pPr lvl="0"/>
-            <a:r>
-              <a:rPr lang="ru-RU" sz="1800" dirty="0"/>
-              <a:t>2) Логика</a:t>
-            </a:r>
-            <a:r>
-              <a:rPr lang="ru-RU" sz="1800" b="0" dirty="0"/>
-              <a:t>: управление жизненным циклом программы, связь между слоями. Работа со структурами входных и выходных данных, а также математическими объектами </a:t>
-            </a:r>
-            <a:r>
-              <a:rPr lang="en-US" sz="1800" b="0" dirty="0"/>
-              <a:t>API</a:t>
-            </a:r>
-            <a:r>
-              <a:rPr lang="ru-RU" sz="1800" b="0" dirty="0"/>
-              <a:t>;</a:t>
-            </a:r>
-          </a:p>
-          <a:p>
-            <a:pPr lvl="0"/>
-            <a:endParaRPr lang="ru-RU" sz="1800" dirty="0"/>
-          </a:p>
-          <a:p>
-            <a:pPr lvl="0"/>
-            <a:r>
-              <a:rPr lang="ru-RU" sz="1800" dirty="0"/>
-              <a:t>3) Данные: </a:t>
-            </a:r>
-            <a:r>
-              <a:rPr lang="ru-RU" sz="1800" b="0" dirty="0"/>
-              <a:t>вычислительный модуль, основан на CPLEX. Принимает объект модели и выполняет математические расчёты. Возвращает результаты оптимизации.</a:t>
-            </a:r>
-          </a:p>
-          <a:p>
-            <a:endParaRPr lang="ru-RU" sz="1800" b="0" dirty="0">
-              <a:latin typeface="Myriad Pro" panose="020B0503030403020204" charset="0"/>
-            </a:endParaRPr>
           </a:p>
         </p:txBody>
       </p:sp>
@@ -4489,7 +7209,7 @@
           <p:cNvPr id="5" name="Рисунок 4">
             <a:extLst>
               <a:ext uri="{FF2B5EF4-FFF2-40B4-BE49-F238E27FC236}">
-                <a16:creationId xmlns:a16="http://schemas.microsoft.com/office/drawing/2014/main" id="{4261E5DE-7564-D5E4-4432-9F906ADC5D01}"/>
+                <a16:creationId xmlns:a16="http://schemas.microsoft.com/office/drawing/2014/main" id="{BEE46EA0-86F1-12FE-AED4-54CBC60EF6CE}"/>
               </a:ext>
             </a:extLst>
           </p:cNvPr>
@@ -4499,393 +7219,31 @@
           <p:nvPr/>
         </p:nvPicPr>
         <p:blipFill>
-          <a:blip r:embed="rId2"/>
+          <a:blip r:embed="rId2" cstate="print">
+            <a:extLst>
+              <a:ext uri="{28A0092B-C50C-407E-A947-70E740481C1C}">
+                <a14:useLocalDpi xmlns:a14="http://schemas.microsoft.com/office/drawing/2010/main" val="0"/>
+              </a:ext>
+            </a:extLst>
+          </a:blip>
           <a:stretch>
             <a:fillRect/>
           </a:stretch>
         </p:blipFill>
         <p:spPr>
           <a:xfrm>
-            <a:off x="6658382" y="968535"/>
-            <a:ext cx="2105461" cy="3206429"/>
+            <a:off x="1463040" y="167640"/>
+            <a:ext cx="6309360" cy="4206240"/>
           </a:xfrm>
           <a:prstGeom prst="rect">
             <a:avLst/>
           </a:prstGeom>
         </p:spPr>
       </p:pic>
-      <p:grpSp>
-        <p:nvGrpSpPr>
-          <p:cNvPr id="6" name="Группа 5">
-            <a:extLst>
-              <a:ext uri="{FF2B5EF4-FFF2-40B4-BE49-F238E27FC236}">
-                <a16:creationId xmlns:a16="http://schemas.microsoft.com/office/drawing/2014/main" id="{4A347707-3D10-5F1F-D96F-A2FCBEF79DC4}"/>
-              </a:ext>
-            </a:extLst>
-          </p:cNvPr>
-          <p:cNvGrpSpPr/>
-          <p:nvPr/>
-        </p:nvGrpSpPr>
-        <p:grpSpPr>
-          <a:xfrm>
-            <a:off x="0" y="-5563"/>
-            <a:ext cx="9144000" cy="574705"/>
-            <a:chOff x="0" y="-5563"/>
-            <a:chExt cx="9144000" cy="574705"/>
-          </a:xfrm>
-        </p:grpSpPr>
-        <p:grpSp>
-          <p:nvGrpSpPr>
-            <p:cNvPr id="7" name="Группа 6">
-              <a:extLst>
-                <a:ext uri="{FF2B5EF4-FFF2-40B4-BE49-F238E27FC236}">
-                  <a16:creationId xmlns:a16="http://schemas.microsoft.com/office/drawing/2014/main" id="{F1EF1BCD-2F4F-54F9-F180-AC8A6CC2204E}"/>
-                </a:ext>
-              </a:extLst>
-            </p:cNvPr>
-            <p:cNvGrpSpPr/>
-            <p:nvPr/>
-          </p:nvGrpSpPr>
-          <p:grpSpPr>
-            <a:xfrm>
-              <a:off x="0" y="-5563"/>
-              <a:ext cx="9144000" cy="574705"/>
-              <a:chOff x="-2931" y="-6103"/>
-              <a:chExt cx="12194930" cy="867688"/>
-            </a:xfrm>
-          </p:grpSpPr>
-          <p:sp>
-            <p:nvSpPr>
-              <p:cNvPr id="9" name="Прямоугольник 8">
-                <a:extLst>
-                  <a:ext uri="{FF2B5EF4-FFF2-40B4-BE49-F238E27FC236}">
-                    <a16:creationId xmlns:a16="http://schemas.microsoft.com/office/drawing/2014/main" id="{B0567BB9-EAB2-0FC8-1195-A484F13FB27F}"/>
-                  </a:ext>
-                </a:extLst>
-              </p:cNvPr>
-              <p:cNvSpPr/>
-              <p:nvPr/>
-            </p:nvSpPr>
-            <p:spPr>
-              <a:xfrm>
-                <a:off x="0" y="-6103"/>
-                <a:ext cx="12191999" cy="867688"/>
-              </a:xfrm>
-              <a:prstGeom prst="rect">
-                <a:avLst/>
-              </a:prstGeom>
-              <a:solidFill>
-                <a:srgbClr val="002060"/>
-              </a:solidFill>
-              <a:ln>
-                <a:noFill/>
-              </a:ln>
-            </p:spPr>
-            <p:style>
-              <a:lnRef idx="2">
-                <a:schemeClr val="accent1">
-                  <a:shade val="50000"/>
-                </a:schemeClr>
-              </a:lnRef>
-              <a:fillRef idx="1">
-                <a:schemeClr val="accent1"/>
-              </a:fillRef>
-              <a:effectRef idx="0">
-                <a:schemeClr val="accent1"/>
-              </a:effectRef>
-              <a:fontRef idx="minor">
-                <a:schemeClr val="lt1"/>
-              </a:fontRef>
-            </p:style>
-            <p:txBody>
-              <a:bodyPr rtlCol="0" anchor="ctr"/>
-              <a:lstStyle/>
-              <a:p>
-                <a:pPr algn="ctr"/>
-                <a:endParaRPr lang="ru-RU" dirty="0"/>
-              </a:p>
-            </p:txBody>
-          </p:sp>
-          <p:sp>
-            <p:nvSpPr>
-              <p:cNvPr id="10" name="Полилиния 13">
-                <a:extLst>
-                  <a:ext uri="{FF2B5EF4-FFF2-40B4-BE49-F238E27FC236}">
-                    <a16:creationId xmlns:a16="http://schemas.microsoft.com/office/drawing/2014/main" id="{38ED77F5-5116-B7A3-AE59-2621488CADFF}"/>
-                  </a:ext>
-                </a:extLst>
-              </p:cNvPr>
-              <p:cNvSpPr/>
-              <p:nvPr/>
-            </p:nvSpPr>
-            <p:spPr>
-              <a:xfrm>
-                <a:off x="-2931" y="-6103"/>
-                <a:ext cx="8638075" cy="867685"/>
-              </a:xfrm>
-              <a:custGeom>
-                <a:avLst/>
-                <a:gdLst>
-                  <a:gd name="connsiteX0" fmla="*/ 0 w 9967865"/>
-                  <a:gd name="connsiteY0" fmla="*/ 0 h 679010"/>
-                  <a:gd name="connsiteX1" fmla="*/ 9967865 w 9967865"/>
-                  <a:gd name="connsiteY1" fmla="*/ 0 h 679010"/>
-                  <a:gd name="connsiteX2" fmla="*/ 7659232 w 9967865"/>
-                  <a:gd name="connsiteY2" fmla="*/ 679010 h 679010"/>
-                  <a:gd name="connsiteX3" fmla="*/ 0 w 9967865"/>
-                  <a:gd name="connsiteY3" fmla="*/ 679010 h 679010"/>
-                  <a:gd name="connsiteX4" fmla="*/ 0 w 9967865"/>
-                  <a:gd name="connsiteY4" fmla="*/ 0 h 679010"/>
-                  <a:gd name="connsiteX0" fmla="*/ 0 w 9967865"/>
-                  <a:gd name="connsiteY0" fmla="*/ 0 h 686788"/>
-                  <a:gd name="connsiteX1" fmla="*/ 9967865 w 9967865"/>
-                  <a:gd name="connsiteY1" fmla="*/ 0 h 686788"/>
-                  <a:gd name="connsiteX2" fmla="*/ 9086239 w 9967865"/>
-                  <a:gd name="connsiteY2" fmla="*/ 686788 h 686788"/>
-                  <a:gd name="connsiteX3" fmla="*/ 0 w 9967865"/>
-                  <a:gd name="connsiteY3" fmla="*/ 679010 h 686788"/>
-                  <a:gd name="connsiteX4" fmla="*/ 0 w 9967865"/>
-                  <a:gd name="connsiteY4" fmla="*/ 0 h 686788"/>
-                  <a:gd name="connsiteX0" fmla="*/ 0 w 9967865"/>
-                  <a:gd name="connsiteY0" fmla="*/ 0 h 750734"/>
-                  <a:gd name="connsiteX1" fmla="*/ 9967865 w 9967865"/>
-                  <a:gd name="connsiteY1" fmla="*/ 0 h 750734"/>
-                  <a:gd name="connsiteX2" fmla="*/ 9086239 w 9967865"/>
-                  <a:gd name="connsiteY2" fmla="*/ 686788 h 750734"/>
-                  <a:gd name="connsiteX3" fmla="*/ 422409 w 9967865"/>
-                  <a:gd name="connsiteY3" fmla="*/ 750734 h 750734"/>
-                  <a:gd name="connsiteX4" fmla="*/ 0 w 9967865"/>
-                  <a:gd name="connsiteY4" fmla="*/ 0 h 750734"/>
-                  <a:gd name="connsiteX0" fmla="*/ 0 w 9967865"/>
-                  <a:gd name="connsiteY0" fmla="*/ 0 h 688791"/>
-                  <a:gd name="connsiteX1" fmla="*/ 9967865 w 9967865"/>
-                  <a:gd name="connsiteY1" fmla="*/ 0 h 688791"/>
-                  <a:gd name="connsiteX2" fmla="*/ 9086239 w 9967865"/>
-                  <a:gd name="connsiteY2" fmla="*/ 686788 h 688791"/>
-                  <a:gd name="connsiteX3" fmla="*/ 4224 w 9967865"/>
-                  <a:gd name="connsiteY3" fmla="*/ 688791 h 688791"/>
-                  <a:gd name="connsiteX4" fmla="*/ 0 w 9967865"/>
-                  <a:gd name="connsiteY4" fmla="*/ 0 h 688791"/>
-                  <a:gd name="connsiteX0" fmla="*/ 0 w 9967865"/>
-                  <a:gd name="connsiteY0" fmla="*/ 0 h 688791"/>
-                  <a:gd name="connsiteX1" fmla="*/ 9967865 w 9967865"/>
-                  <a:gd name="connsiteY1" fmla="*/ 0 h 688791"/>
-                  <a:gd name="connsiteX2" fmla="*/ 9318564 w 9967865"/>
-                  <a:gd name="connsiteY2" fmla="*/ 634624 h 688791"/>
-                  <a:gd name="connsiteX3" fmla="*/ 4224 w 9967865"/>
-                  <a:gd name="connsiteY3" fmla="*/ 688791 h 688791"/>
-                  <a:gd name="connsiteX4" fmla="*/ 0 w 9967865"/>
-                  <a:gd name="connsiteY4" fmla="*/ 0 h 688791"/>
-                  <a:gd name="connsiteX0" fmla="*/ 0 w 9967865"/>
-                  <a:gd name="connsiteY0" fmla="*/ 0 h 688791"/>
-                  <a:gd name="connsiteX1" fmla="*/ 9967865 w 9967865"/>
-                  <a:gd name="connsiteY1" fmla="*/ 0 h 688791"/>
-                  <a:gd name="connsiteX2" fmla="*/ 9001757 w 9967865"/>
-                  <a:gd name="connsiteY2" fmla="*/ 683527 h 688791"/>
-                  <a:gd name="connsiteX3" fmla="*/ 4224 w 9967865"/>
-                  <a:gd name="connsiteY3" fmla="*/ 688791 h 688791"/>
-                  <a:gd name="connsiteX4" fmla="*/ 0 w 9967865"/>
-                  <a:gd name="connsiteY4" fmla="*/ 0 h 688791"/>
-                  <a:gd name="connsiteX0" fmla="*/ 0 w 9967865"/>
-                  <a:gd name="connsiteY0" fmla="*/ 0 h 688791"/>
-                  <a:gd name="connsiteX1" fmla="*/ 9967865 w 9967865"/>
-                  <a:gd name="connsiteY1" fmla="*/ 0 h 688791"/>
-                  <a:gd name="connsiteX2" fmla="*/ 8929948 w 9967865"/>
-                  <a:gd name="connsiteY2" fmla="*/ 686788 h 688791"/>
-                  <a:gd name="connsiteX3" fmla="*/ 4224 w 9967865"/>
-                  <a:gd name="connsiteY3" fmla="*/ 688791 h 688791"/>
-                  <a:gd name="connsiteX4" fmla="*/ 0 w 9967865"/>
-                  <a:gd name="connsiteY4" fmla="*/ 0 h 688791"/>
-                  <a:gd name="connsiteX0" fmla="*/ 0 w 9967865"/>
-                  <a:gd name="connsiteY0" fmla="*/ 0 h 774813"/>
-                  <a:gd name="connsiteX1" fmla="*/ 9967865 w 9967865"/>
-                  <a:gd name="connsiteY1" fmla="*/ 0 h 774813"/>
-                  <a:gd name="connsiteX2" fmla="*/ 9153824 w 9967865"/>
-                  <a:gd name="connsiteY2" fmla="*/ 774813 h 774813"/>
-                  <a:gd name="connsiteX3" fmla="*/ 4224 w 9967865"/>
-                  <a:gd name="connsiteY3" fmla="*/ 688791 h 774813"/>
-                  <a:gd name="connsiteX4" fmla="*/ 0 w 9967865"/>
-                  <a:gd name="connsiteY4" fmla="*/ 0 h 774813"/>
-                  <a:gd name="connsiteX0" fmla="*/ 0 w 9967865"/>
-                  <a:gd name="connsiteY0" fmla="*/ 0 h 688791"/>
-                  <a:gd name="connsiteX1" fmla="*/ 9967865 w 9967865"/>
-                  <a:gd name="connsiteY1" fmla="*/ 0 h 688791"/>
-                  <a:gd name="connsiteX2" fmla="*/ 8824346 w 9967865"/>
-                  <a:gd name="connsiteY2" fmla="*/ 484656 h 688791"/>
-                  <a:gd name="connsiteX3" fmla="*/ 4224 w 9967865"/>
-                  <a:gd name="connsiteY3" fmla="*/ 688791 h 688791"/>
-                  <a:gd name="connsiteX4" fmla="*/ 0 w 9967865"/>
-                  <a:gd name="connsiteY4" fmla="*/ 0 h 688791"/>
-                  <a:gd name="connsiteX0" fmla="*/ 0 w 9967865"/>
-                  <a:gd name="connsiteY0" fmla="*/ 0 h 690048"/>
-                  <a:gd name="connsiteX1" fmla="*/ 9967865 w 9967865"/>
-                  <a:gd name="connsiteY1" fmla="*/ 0 h 690048"/>
-                  <a:gd name="connsiteX2" fmla="*/ 8760984 w 9967865"/>
-                  <a:gd name="connsiteY2" fmla="*/ 690048 h 690048"/>
-                  <a:gd name="connsiteX3" fmla="*/ 4224 w 9967865"/>
-                  <a:gd name="connsiteY3" fmla="*/ 688791 h 690048"/>
-                  <a:gd name="connsiteX4" fmla="*/ 0 w 9967865"/>
-                  <a:gd name="connsiteY4" fmla="*/ 0 h 690048"/>
-                </a:gdLst>
-                <a:ahLst/>
-                <a:cxnLst>
-                  <a:cxn ang="0">
-                    <a:pos x="connsiteX0" y="connsiteY0"/>
-                  </a:cxn>
-                  <a:cxn ang="0">
-                    <a:pos x="connsiteX1" y="connsiteY1"/>
-                  </a:cxn>
-                  <a:cxn ang="0">
-                    <a:pos x="connsiteX2" y="connsiteY2"/>
-                  </a:cxn>
-                  <a:cxn ang="0">
-                    <a:pos x="connsiteX3" y="connsiteY3"/>
-                  </a:cxn>
-                  <a:cxn ang="0">
-                    <a:pos x="connsiteX4" y="connsiteY4"/>
-                  </a:cxn>
-                </a:cxnLst>
-                <a:rect l="l" t="t" r="r" b="b"/>
-                <a:pathLst>
-                  <a:path w="9967865" h="690048">
-                    <a:moveTo>
-                      <a:pt x="0" y="0"/>
-                    </a:moveTo>
-                    <a:lnTo>
-                      <a:pt x="9967865" y="0"/>
-                    </a:lnTo>
-                    <a:lnTo>
-                      <a:pt x="8760984" y="690048"/>
-                    </a:lnTo>
-                    <a:lnTo>
-                      <a:pt x="4224" y="688791"/>
-                    </a:lnTo>
-                    <a:lnTo>
-                      <a:pt x="0" y="0"/>
-                    </a:lnTo>
-                    <a:close/>
-                  </a:path>
-                </a:pathLst>
-              </a:custGeom>
-              <a:solidFill>
-                <a:srgbClr val="0070C0"/>
-              </a:solidFill>
-              <a:ln>
-                <a:noFill/>
-              </a:ln>
-            </p:spPr>
-            <p:style>
-              <a:lnRef idx="2">
-                <a:schemeClr val="accent1">
-                  <a:shade val="50000"/>
-                </a:schemeClr>
-              </a:lnRef>
-              <a:fillRef idx="1">
-                <a:schemeClr val="accent1"/>
-              </a:fillRef>
-              <a:effectRef idx="0">
-                <a:schemeClr val="accent1"/>
-              </a:effectRef>
-              <a:fontRef idx="minor">
-                <a:schemeClr val="lt1"/>
-              </a:fontRef>
-            </p:style>
-            <p:txBody>
-              <a:bodyPr rtlCol="0" anchor="ctr"/>
-              <a:lstStyle/>
-              <a:p>
-                <a:pPr algn="ctr"/>
-                <a:endParaRPr lang="ru-RU" dirty="0"/>
-              </a:p>
-            </p:txBody>
-          </p:sp>
-        </p:grpSp>
-        <p:pic>
-          <p:nvPicPr>
-            <p:cNvPr id="8" name="Рисунок 7">
-              <a:extLst>
-                <a:ext uri="{FF2B5EF4-FFF2-40B4-BE49-F238E27FC236}">
-                  <a16:creationId xmlns:a16="http://schemas.microsoft.com/office/drawing/2014/main" id="{578D5C0F-F9FB-0642-2795-8B69D1BA8ED4}"/>
-                </a:ext>
-              </a:extLst>
-            </p:cNvPr>
-            <p:cNvPicPr>
-              <a:picLocks noChangeAspect="1"/>
-            </p:cNvPicPr>
-            <p:nvPr/>
-          </p:nvPicPr>
-          <p:blipFill>
-            <a:blip r:embed="rId3" cstate="print">
-              <a:extLst>
-                <a:ext uri="{28A0092B-C50C-407E-A947-70E740481C1C}">
-                  <a14:useLocalDpi xmlns:a14="http://schemas.microsoft.com/office/drawing/2010/main" val="0"/>
-                </a:ext>
-              </a:extLst>
-            </a:blip>
-            <a:stretch>
-              <a:fillRect/>
-            </a:stretch>
-          </p:blipFill>
-          <p:spPr>
-            <a:xfrm>
-              <a:off x="7543800" y="91298"/>
-              <a:ext cx="1211316" cy="380979"/>
-            </a:xfrm>
-            <a:prstGeom prst="rect">
-              <a:avLst/>
-            </a:prstGeom>
-          </p:spPr>
-        </p:pic>
-      </p:grpSp>
-      <p:sp>
-        <p:nvSpPr>
-          <p:cNvPr id="11" name="TextBox 10">
-            <a:extLst>
-              <a:ext uri="{FF2B5EF4-FFF2-40B4-BE49-F238E27FC236}">
-                <a16:creationId xmlns:a16="http://schemas.microsoft.com/office/drawing/2014/main" id="{BF8B4ED8-0826-7FAF-8038-8FEA45398A51}"/>
-              </a:ext>
-            </a:extLst>
-          </p:cNvPr>
-          <p:cNvSpPr txBox="1"/>
-          <p:nvPr/>
-        </p:nvSpPr>
-        <p:spPr>
-          <a:xfrm>
-            <a:off x="724617" y="147583"/>
-            <a:ext cx="8229600" cy="268407"/>
-          </a:xfrm>
-          <a:prstGeom prst="rect">
-            <a:avLst/>
-          </a:prstGeom>
-          <a:noFill/>
-        </p:spPr>
-        <p:txBody>
-          <a:bodyPr wrap="square" rtlCol="0">
-            <a:spAutoFit/>
-          </a:bodyPr>
-          <a:lstStyle/>
-          <a:p>
-            <a:pPr>
-              <a:lnSpc>
-                <a:spcPct val="80000"/>
-              </a:lnSpc>
-            </a:pPr>
-            <a:r>
-              <a:rPr lang="ru-RU" sz="1400" dirty="0">
-                <a:solidFill>
-                  <a:schemeClr val="bg1"/>
-                </a:solidFill>
-                <a:latin typeface="Myriad Pro Black" panose="020B0803030403020204" pitchFamily="34" charset="0"/>
-              </a:rPr>
-              <a:t>Системотехнический анализ и проектирование</a:t>
-            </a:r>
-          </a:p>
-        </p:txBody>
-      </p:sp>
     </p:spTree>
     <p:extLst>
       <p:ext uri="{BB962C8B-B14F-4D97-AF65-F5344CB8AC3E}">
-        <p14:creationId xmlns:p14="http://schemas.microsoft.com/office/powerpoint/2010/main" val="1317744477"/>
+        <p14:creationId xmlns:p14="http://schemas.microsoft.com/office/powerpoint/2010/main" val="1892952154"/>
       </p:ext>
     </p:extLst>
   </p:cSld>
